--- a/logos/logos.pptx
+++ b/logos/logos.pptx
@@ -9598,7 +9598,18 @@
           <p:nvPr/>
         </p:nvPicPr>
         <p:blipFill>
-          <a:blip r:embed="rId2"/>
+          <a:blip r:embed="rId2">
+            <a:clrChange>
+              <a:clrFrom>
+                <a:srgbClr val="FFFFFF"/>
+              </a:clrFrom>
+              <a:clrTo>
+                <a:srgbClr val="FFFFFF">
+                  <a:alpha val="0"/>
+                </a:srgbClr>
+              </a:clrTo>
+            </a:clrChange>
+          </a:blip>
           <a:stretch>
             <a:fillRect/>
           </a:stretch>
@@ -9628,14 +9639,25 @@
           <p:nvPr/>
         </p:nvPicPr>
         <p:blipFill>
-          <a:blip r:embed="rId3"/>
+          <a:blip r:embed="rId3">
+            <a:clrChange>
+              <a:clrFrom>
+                <a:srgbClr val="FFFFFF"/>
+              </a:clrFrom>
+              <a:clrTo>
+                <a:srgbClr val="FFFFFF">
+                  <a:alpha val="0"/>
+                </a:srgbClr>
+              </a:clrTo>
+            </a:clrChange>
+          </a:blip>
           <a:stretch>
             <a:fillRect/>
           </a:stretch>
         </p:blipFill>
         <p:spPr>
           <a:xfrm>
-            <a:off x="8529442" y="5989753"/>
+            <a:off x="-7320158" y="10866553"/>
             <a:ext cx="5092700" cy="5118100"/>
           </a:xfrm>
           <a:prstGeom prst="rect">
@@ -9658,14 +9680,25 @@
           <p:nvPr/>
         </p:nvPicPr>
         <p:blipFill>
-          <a:blip r:embed="rId4"/>
+          <a:blip r:embed="rId4">
+            <a:clrChange>
+              <a:clrFrom>
+                <a:srgbClr val="FFFFFF"/>
+              </a:clrFrom>
+              <a:clrTo>
+                <a:srgbClr val="FFFFFF">
+                  <a:alpha val="0"/>
+                </a:srgbClr>
+              </a:clrTo>
+            </a:clrChange>
+          </a:blip>
           <a:stretch>
             <a:fillRect/>
           </a:stretch>
         </p:blipFill>
         <p:spPr>
           <a:xfrm>
-            <a:off x="7142593" y="11446786"/>
+            <a:off x="5749144" y="10291989"/>
             <a:ext cx="5143500" cy="5143500"/>
           </a:xfrm>
           <a:prstGeom prst="rect">
@@ -9688,14 +9721,25 @@
           <p:nvPr/>
         </p:nvPicPr>
         <p:blipFill>
-          <a:blip r:embed="rId5"/>
+          <a:blip r:embed="rId5">
+            <a:clrChange>
+              <a:clrFrom>
+                <a:srgbClr val="FFFFFF"/>
+              </a:clrFrom>
+              <a:clrTo>
+                <a:srgbClr val="FFFFFF">
+                  <a:alpha val="0"/>
+                </a:srgbClr>
+              </a:clrTo>
+            </a:clrChange>
+          </a:blip>
           <a:stretch>
             <a:fillRect/>
           </a:stretch>
         </p:blipFill>
         <p:spPr>
           <a:xfrm>
-            <a:off x="15354751" y="4530638"/>
+            <a:off x="11206084" y="7938255"/>
             <a:ext cx="5232400" cy="5232400"/>
           </a:xfrm>
           <a:prstGeom prst="rect">
@@ -9718,14 +9762,25 @@
           <p:nvPr/>
         </p:nvPicPr>
         <p:blipFill>
-          <a:blip r:embed="rId6"/>
+          <a:blip r:embed="rId6">
+            <a:clrChange>
+              <a:clrFrom>
+                <a:srgbClr val="FFFFFF"/>
+              </a:clrFrom>
+              <a:clrTo>
+                <a:srgbClr val="FFFFFF">
+                  <a:alpha val="0"/>
+                </a:srgbClr>
+              </a:clrTo>
+            </a:clrChange>
+          </a:blip>
           <a:stretch>
             <a:fillRect/>
           </a:stretch>
         </p:blipFill>
         <p:spPr>
           <a:xfrm>
-            <a:off x="-482308" y="6363455"/>
+            <a:off x="-475580" y="7938255"/>
             <a:ext cx="5334000" cy="5359400"/>
           </a:xfrm>
           <a:prstGeom prst="rect">

--- a/logos/logos.pptx
+++ b/logos/logos.pptx
@@ -3669,58 +3669,6 @@
       </p:sp>
       <p:sp>
         <p:nvSpPr>
-          <p:cNvPr id="739" name="Rectangle 738">
-            <a:extLst>
-              <a:ext uri="{FF2B5EF4-FFF2-40B4-BE49-F238E27FC236}">
-                <a16:creationId xmlns:a16="http://schemas.microsoft.com/office/drawing/2014/main" id="{232B1E48-1AA7-464B-975D-0B043B27F3A2}"/>
-              </a:ext>
-            </a:extLst>
-          </p:cNvPr>
-          <p:cNvSpPr/>
-          <p:nvPr/>
-        </p:nvSpPr>
-        <p:spPr>
-          <a:xfrm rot="4179870">
-            <a:off x="6423085" y="3757354"/>
-            <a:ext cx="379872" cy="129216"/>
-          </a:xfrm>
-          <a:prstGeom prst="rect">
-            <a:avLst/>
-          </a:prstGeom>
-          <a:solidFill>
-            <a:schemeClr val="bg1"/>
-          </a:solidFill>
-          <a:ln>
-            <a:noFill/>
-          </a:ln>
-        </p:spPr>
-        <p:style>
-          <a:lnRef idx="2">
-            <a:schemeClr val="accent1">
-              <a:shade val="50000"/>
-            </a:schemeClr>
-          </a:lnRef>
-          <a:fillRef idx="1">
-            <a:schemeClr val="accent1"/>
-          </a:fillRef>
-          <a:effectRef idx="0">
-            <a:schemeClr val="accent1"/>
-          </a:effectRef>
-          <a:fontRef idx="minor">
-            <a:schemeClr val="lt1"/>
-          </a:fontRef>
-        </p:style>
-        <p:txBody>
-          <a:bodyPr rtlCol="0" anchor="ctr"/>
-          <a:lstStyle/>
-          <a:p>
-            <a:pPr algn="ctr"/>
-            <a:endParaRPr lang="en-US"/>
-          </a:p>
-        </p:txBody>
-      </p:sp>
-      <p:sp>
-        <p:nvSpPr>
           <p:cNvPr id="738" name="Rectangle 737">
             <a:extLst>
               <a:ext uri="{FF2B5EF4-FFF2-40B4-BE49-F238E27FC236}">
@@ -14494,6 +14442,53 @@
           </a:p>
         </p:txBody>
       </p:sp>
+      <p:sp>
+        <p:nvSpPr>
+          <p:cNvPr id="450" name="Rectangle 449">
+            <a:extLst>
+              <a:ext uri="{FF2B5EF4-FFF2-40B4-BE49-F238E27FC236}">
+                <a16:creationId xmlns:a16="http://schemas.microsoft.com/office/drawing/2014/main" id="{2DA6A98F-58B7-4942-85F1-49F2AF303FDA}"/>
+              </a:ext>
+            </a:extLst>
+          </p:cNvPr>
+          <p:cNvSpPr/>
+          <p:nvPr/>
+        </p:nvSpPr>
+        <p:spPr>
+          <a:xfrm>
+            <a:off x="6499367" y="398284"/>
+            <a:ext cx="1368208" cy="1368208"/>
+          </a:xfrm>
+          <a:prstGeom prst="rect">
+            <a:avLst/>
+          </a:prstGeom>
+          <a:noFill/>
+        </p:spPr>
+        <p:style>
+          <a:lnRef idx="2">
+            <a:schemeClr val="accent1">
+              <a:shade val="50000"/>
+            </a:schemeClr>
+          </a:lnRef>
+          <a:fillRef idx="1">
+            <a:schemeClr val="accent1"/>
+          </a:fillRef>
+          <a:effectRef idx="0">
+            <a:schemeClr val="accent1"/>
+          </a:effectRef>
+          <a:fontRef idx="minor">
+            <a:schemeClr val="lt1"/>
+          </a:fontRef>
+        </p:style>
+        <p:txBody>
+          <a:bodyPr rtlCol="0" anchor="ctr"/>
+          <a:lstStyle/>
+          <a:p>
+            <a:pPr algn="ctr"/>
+            <a:endParaRPr lang="en-US"/>
+          </a:p>
+        </p:txBody>
+      </p:sp>
       <p:grpSp>
         <p:nvGrpSpPr>
           <p:cNvPr id="428" name="Group 427">
@@ -14508,8 +14503,8 @@
         </p:nvGrpSpPr>
         <p:grpSpPr>
           <a:xfrm rot="20689380">
-            <a:off x="6684487" y="717172"/>
-            <a:ext cx="673850" cy="891540"/>
+            <a:off x="6715377" y="599304"/>
+            <a:ext cx="744260" cy="984696"/>
             <a:chOff x="7855592" y="4677715"/>
             <a:chExt cx="673850" cy="891540"/>
           </a:xfrm>
@@ -15288,53 +15283,6 @@
           </p:sp>
         </p:grpSp>
       </p:grpSp>
-      <p:sp>
-        <p:nvSpPr>
-          <p:cNvPr id="450" name="Rectangle 449">
-            <a:extLst>
-              <a:ext uri="{FF2B5EF4-FFF2-40B4-BE49-F238E27FC236}">
-                <a16:creationId xmlns:a16="http://schemas.microsoft.com/office/drawing/2014/main" id="{2DA6A98F-58B7-4942-85F1-49F2AF303FDA}"/>
-              </a:ext>
-            </a:extLst>
-          </p:cNvPr>
-          <p:cNvSpPr/>
-          <p:nvPr/>
-        </p:nvSpPr>
-        <p:spPr>
-          <a:xfrm>
-            <a:off x="6499367" y="398284"/>
-            <a:ext cx="1368208" cy="1368208"/>
-          </a:xfrm>
-          <a:prstGeom prst="rect">
-            <a:avLst/>
-          </a:prstGeom>
-          <a:noFill/>
-        </p:spPr>
-        <p:style>
-          <a:lnRef idx="2">
-            <a:schemeClr val="accent1">
-              <a:shade val="50000"/>
-            </a:schemeClr>
-          </a:lnRef>
-          <a:fillRef idx="1">
-            <a:schemeClr val="accent1"/>
-          </a:fillRef>
-          <a:effectRef idx="0">
-            <a:schemeClr val="accent1"/>
-          </a:effectRef>
-          <a:fontRef idx="minor">
-            <a:schemeClr val="lt1"/>
-          </a:fontRef>
-        </p:style>
-        <p:txBody>
-          <a:bodyPr rtlCol="0" anchor="ctr"/>
-          <a:lstStyle/>
-          <a:p>
-            <a:pPr algn="ctr"/>
-            <a:endParaRPr lang="en-US"/>
-          </a:p>
-        </p:txBody>
-      </p:sp>
       <p:grpSp>
         <p:nvGrpSpPr>
           <p:cNvPr id="93" name="Group 92">
@@ -15348,9 +15296,9 @@
           <p:nvPr/>
         </p:nvGrpSpPr>
         <p:grpSpPr>
-          <a:xfrm rot="19263493">
-            <a:off x="7159754" y="1065540"/>
-            <a:ext cx="637083" cy="149773"/>
+          <a:xfrm rot="18597694">
+            <a:off x="7187760" y="926914"/>
+            <a:ext cx="703651" cy="165423"/>
             <a:chOff x="10773793" y="1012310"/>
             <a:chExt cx="637083" cy="149773"/>
           </a:xfrm>
@@ -21220,54 +21168,6 @@
           </p:txBody>
         </p:sp>
       </p:grpSp>
-      <p:sp>
-        <p:nvSpPr>
-          <p:cNvPr id="663" name="Rectangle 662">
-            <a:extLst>
-              <a:ext uri="{FF2B5EF4-FFF2-40B4-BE49-F238E27FC236}">
-                <a16:creationId xmlns:a16="http://schemas.microsoft.com/office/drawing/2014/main" id="{5EDF0D96-2DE2-AF46-B221-68EFCC25EC51}"/>
-              </a:ext>
-            </a:extLst>
-          </p:cNvPr>
-          <p:cNvSpPr/>
-          <p:nvPr/>
-        </p:nvSpPr>
-        <p:spPr>
-          <a:xfrm>
-            <a:off x="5291355" y="2190135"/>
-            <a:ext cx="1828460" cy="1828460"/>
-          </a:xfrm>
-          <a:prstGeom prst="rect">
-            <a:avLst/>
-          </a:prstGeom>
-          <a:noFill/>
-          <a:ln w="19050"/>
-        </p:spPr>
-        <p:style>
-          <a:lnRef idx="2">
-            <a:schemeClr val="accent1">
-              <a:shade val="50000"/>
-            </a:schemeClr>
-          </a:lnRef>
-          <a:fillRef idx="1">
-            <a:schemeClr val="accent1"/>
-          </a:fillRef>
-          <a:effectRef idx="0">
-            <a:schemeClr val="accent1"/>
-          </a:effectRef>
-          <a:fontRef idx="minor">
-            <a:schemeClr val="lt1"/>
-          </a:fontRef>
-        </p:style>
-        <p:txBody>
-          <a:bodyPr rtlCol="0" anchor="ctr"/>
-          <a:lstStyle/>
-          <a:p>
-            <a:pPr algn="ctr"/>
-            <a:endParaRPr lang="en-US"/>
-          </a:p>
-        </p:txBody>
-      </p:sp>
       <p:grpSp>
         <p:nvGrpSpPr>
           <p:cNvPr id="734" name="Group 733">
@@ -21559,10 +21459,10 @@
         </p:nvGrpSpPr>
         <p:grpSpPr>
           <a:xfrm>
-            <a:off x="6574412" y="2239667"/>
-            <a:ext cx="536173" cy="496276"/>
-            <a:chOff x="6247281" y="2243170"/>
-            <a:chExt cx="411529" cy="380907"/>
+            <a:off x="6574420" y="2358001"/>
+            <a:ext cx="476607" cy="377945"/>
+            <a:chOff x="6247282" y="2333992"/>
+            <a:chExt cx="365810" cy="290084"/>
           </a:xfrm>
         </p:grpSpPr>
         <p:sp>
@@ -21579,8 +21479,8 @@
           </p:nvSpPr>
           <p:spPr>
             <a:xfrm>
-              <a:off x="6247281" y="2243170"/>
-              <a:ext cx="411529" cy="380907"/>
+              <a:off x="6247282" y="2333992"/>
+              <a:ext cx="365810" cy="290084"/>
             </a:xfrm>
             <a:prstGeom prst="rect">
               <a:avLst/>
@@ -21631,10 +21531,10 @@
           </p:nvGrpSpPr>
           <p:grpSpPr>
             <a:xfrm>
-              <a:off x="6248724" y="2304353"/>
-              <a:ext cx="349221" cy="282582"/>
-              <a:chOff x="5770832" y="1511977"/>
-              <a:chExt cx="346385" cy="229709"/>
+              <a:off x="6248724" y="2363625"/>
+              <a:ext cx="349221" cy="223307"/>
+              <a:chOff x="5770832" y="1560161"/>
+              <a:chExt cx="346385" cy="181525"/>
             </a:xfrm>
           </p:grpSpPr>
           <p:sp>
@@ -21651,8 +21551,8 @@
             </p:nvSpPr>
             <p:spPr>
               <a:xfrm>
-                <a:off x="5803713" y="1511977"/>
-                <a:ext cx="67891" cy="226167"/>
+                <a:off x="5803713" y="1560161"/>
+                <a:ext cx="67891" cy="177982"/>
               </a:xfrm>
               <a:prstGeom prst="rect">
                 <a:avLst/>
@@ -23390,10 +23290,10 @@
       </p:grpSp>
       <p:grpSp>
         <p:nvGrpSpPr>
-          <p:cNvPr id="714" name="Group 713">
+          <p:cNvPr id="803" name="Group 802">
             <a:extLst>
               <a:ext uri="{FF2B5EF4-FFF2-40B4-BE49-F238E27FC236}">
-                <a16:creationId xmlns:a16="http://schemas.microsoft.com/office/drawing/2014/main" id="{58A19778-858C-6242-8347-65B32B7C9F0F}"/>
+                <a16:creationId xmlns:a16="http://schemas.microsoft.com/office/drawing/2014/main" id="{FFDE3F14-EF1A-7440-BBB0-13F5533A67B5}"/>
               </a:ext>
             </a:extLst>
           </p:cNvPr>
@@ -23403,60 +23303,17 @@
         <p:grpSpPr>
           <a:xfrm>
             <a:off x="5803130" y="3252245"/>
-            <a:ext cx="836040" cy="714657"/>
-            <a:chOff x="9431517" y="5515365"/>
-            <a:chExt cx="668549" cy="571483"/>
+            <a:ext cx="874499" cy="759653"/>
+            <a:chOff x="5803130" y="3252245"/>
+            <a:chExt cx="874499" cy="759653"/>
           </a:xfrm>
         </p:grpSpPr>
-        <p:cxnSp>
-          <p:nvCxnSpPr>
-            <p:cNvPr id="715" name="Straight Connector 714">
-              <a:extLst>
-                <a:ext uri="{FF2B5EF4-FFF2-40B4-BE49-F238E27FC236}">
-                  <a16:creationId xmlns:a16="http://schemas.microsoft.com/office/drawing/2014/main" id="{906B6BEE-D072-EB40-B664-E5BD770C2ED4}"/>
-                </a:ext>
-              </a:extLst>
-            </p:cNvPr>
-            <p:cNvCxnSpPr>
-              <a:cxnSpLocks/>
-            </p:cNvCxnSpPr>
-            <p:nvPr/>
-          </p:nvCxnSpPr>
-          <p:spPr>
-            <a:xfrm flipH="1" flipV="1">
-              <a:off x="9929748" y="5566933"/>
-              <a:ext cx="170318" cy="485070"/>
-            </a:xfrm>
-            <a:prstGeom prst="line">
-              <a:avLst/>
-            </a:prstGeom>
-            <a:ln w="38100" cap="rnd">
-              <a:solidFill>
-                <a:schemeClr val="tx1"/>
-              </a:solidFill>
-            </a:ln>
-          </p:spPr>
-          <p:style>
-            <a:lnRef idx="1">
-              <a:schemeClr val="accent1"/>
-            </a:lnRef>
-            <a:fillRef idx="0">
-              <a:schemeClr val="accent1"/>
-            </a:fillRef>
-            <a:effectRef idx="0">
-              <a:schemeClr val="accent1"/>
-            </a:effectRef>
-            <a:fontRef idx="minor">
-              <a:schemeClr val="tx1"/>
-            </a:fontRef>
-          </p:style>
-        </p:cxnSp>
         <p:sp>
           <p:nvSpPr>
-            <p:cNvPr id="716" name="Terminator 715">
-              <a:extLst>
-                <a:ext uri="{FF2B5EF4-FFF2-40B4-BE49-F238E27FC236}">
-                  <a16:creationId xmlns:a16="http://schemas.microsoft.com/office/drawing/2014/main" id="{0146C195-1292-9E41-B4DC-6181FA6CDE7D}"/>
+            <p:cNvPr id="739" name="Rectangle 738">
+              <a:extLst>
+                <a:ext uri="{FF2B5EF4-FFF2-40B4-BE49-F238E27FC236}">
+                  <a16:creationId xmlns:a16="http://schemas.microsoft.com/office/drawing/2014/main" id="{232B1E48-1AA7-464B-975D-0B043B27F3A2}"/>
                 </a:ext>
               </a:extLst>
             </p:cNvPr>
@@ -23464,20 +23321,18 @@
             <p:nvPr/>
           </p:nvSpPr>
           <p:spPr>
-            <a:xfrm rot="2474403">
-              <a:off x="9431517" y="5791310"/>
-              <a:ext cx="263532" cy="86965"/>
-            </a:xfrm>
-            <a:prstGeom prst="flowChartTerminator">
+            <a:xfrm rot="4179870">
+              <a:off x="6423085" y="3757354"/>
+              <a:ext cx="379872" cy="129216"/>
+            </a:xfrm>
+            <a:prstGeom prst="rect">
               <a:avLst/>
             </a:prstGeom>
             <a:solidFill>
-              <a:schemeClr val="tx1"/>
+              <a:schemeClr val="bg1"/>
             </a:solidFill>
-            <a:ln w="19050">
-              <a:solidFill>
-                <a:schemeClr val="bg1"/>
-              </a:solidFill>
+            <a:ln>
+              <a:noFill/>
             </a:ln>
           </p:spPr>
           <p:style>
@@ -23505,330 +23360,448 @@
             </a:p>
           </p:txBody>
         </p:sp>
-        <p:sp>
-          <p:nvSpPr>
-            <p:cNvPr id="717" name="Terminator 716">
-              <a:extLst>
-                <a:ext uri="{FF2B5EF4-FFF2-40B4-BE49-F238E27FC236}">
-                  <a16:creationId xmlns:a16="http://schemas.microsoft.com/office/drawing/2014/main" id="{0CD1C98D-0BAC-654F-8CC3-5C6352DA7371}"/>
-                </a:ext>
-              </a:extLst>
-            </p:cNvPr>
-            <p:cNvSpPr/>
-            <p:nvPr/>
-          </p:nvSpPr>
-          <p:spPr>
-            <a:xfrm rot="19815812">
-              <a:off x="9804897" y="5785045"/>
-              <a:ext cx="263532" cy="86965"/>
-            </a:xfrm>
-            <a:prstGeom prst="flowChartTerminator">
-              <a:avLst/>
-            </a:prstGeom>
-            <a:solidFill>
-              <a:schemeClr val="tx1"/>
-            </a:solidFill>
-            <a:ln w="19050">
-              <a:solidFill>
-                <a:schemeClr val="bg1"/>
-              </a:solidFill>
-            </a:ln>
-          </p:spPr>
-          <p:style>
-            <a:lnRef idx="2">
-              <a:schemeClr val="accent1">
-                <a:shade val="50000"/>
-              </a:schemeClr>
-            </a:lnRef>
-            <a:fillRef idx="1">
-              <a:schemeClr val="accent1"/>
-            </a:fillRef>
-            <a:effectRef idx="0">
-              <a:schemeClr val="accent1"/>
-            </a:effectRef>
-            <a:fontRef idx="minor">
-              <a:schemeClr val="lt1"/>
-            </a:fontRef>
-          </p:style>
-          <p:txBody>
-            <a:bodyPr rtlCol="0" anchor="ctr"/>
-            <a:lstStyle/>
-            <a:p>
-              <a:pPr algn="ctr"/>
-              <a:endParaRPr lang="en-US"/>
-            </a:p>
-          </p:txBody>
-        </p:sp>
-        <p:sp>
-          <p:nvSpPr>
-            <p:cNvPr id="718" name="Delay 717">
-              <a:extLst>
-                <a:ext uri="{FF2B5EF4-FFF2-40B4-BE49-F238E27FC236}">
-                  <a16:creationId xmlns:a16="http://schemas.microsoft.com/office/drawing/2014/main" id="{7E2F7D6D-027D-C444-AC7D-9A082C2AED99}"/>
-                </a:ext>
-              </a:extLst>
-            </p:cNvPr>
-            <p:cNvSpPr/>
-            <p:nvPr/>
-          </p:nvSpPr>
-          <p:spPr>
-            <a:xfrm rot="16200000">
-              <a:off x="9606971" y="5827497"/>
-              <a:ext cx="282101" cy="236602"/>
-            </a:xfrm>
-            <a:prstGeom prst="flowChartDelay">
-              <a:avLst/>
-            </a:prstGeom>
-            <a:solidFill>
-              <a:schemeClr val="tx1"/>
-            </a:solidFill>
-            <a:ln w="19050">
-              <a:solidFill>
-                <a:schemeClr val="bg1"/>
-              </a:solidFill>
-            </a:ln>
-          </p:spPr>
-          <p:style>
-            <a:lnRef idx="2">
-              <a:schemeClr val="accent1">
-                <a:shade val="50000"/>
-              </a:schemeClr>
-            </a:lnRef>
-            <a:fillRef idx="1">
-              <a:schemeClr val="accent1"/>
-            </a:fillRef>
-            <a:effectRef idx="0">
-              <a:schemeClr val="accent1"/>
-            </a:effectRef>
-            <a:fontRef idx="minor">
-              <a:schemeClr val="lt1"/>
-            </a:fontRef>
-          </p:style>
-          <p:txBody>
-            <a:bodyPr rtlCol="0" anchor="ctr"/>
-            <a:lstStyle/>
-            <a:p>
-              <a:pPr algn="ctr"/>
-              <a:endParaRPr lang="en-US" dirty="0"/>
-            </a:p>
-          </p:txBody>
-        </p:sp>
-        <p:sp>
-          <p:nvSpPr>
-            <p:cNvPr id="719" name="Triangle 718">
-              <a:extLst>
-                <a:ext uri="{FF2B5EF4-FFF2-40B4-BE49-F238E27FC236}">
-                  <a16:creationId xmlns:a16="http://schemas.microsoft.com/office/drawing/2014/main" id="{658C96FC-7BFE-1745-83C5-B396375E3174}"/>
-                </a:ext>
-              </a:extLst>
-            </p:cNvPr>
-            <p:cNvSpPr/>
-            <p:nvPr/>
-          </p:nvSpPr>
-          <p:spPr>
+        <p:grpSp>
+          <p:nvGrpSpPr>
+            <p:cNvPr id="714" name="Group 713">
+              <a:extLst>
+                <a:ext uri="{FF2B5EF4-FFF2-40B4-BE49-F238E27FC236}">
+                  <a16:creationId xmlns:a16="http://schemas.microsoft.com/office/drawing/2014/main" id="{58A19778-858C-6242-8347-65B32B7C9F0F}"/>
+                </a:ext>
+              </a:extLst>
+            </p:cNvPr>
+            <p:cNvGrpSpPr/>
+            <p:nvPr/>
+          </p:nvGrpSpPr>
+          <p:grpSpPr>
             <a:xfrm>
-              <a:off x="9682336" y="5515365"/>
-              <a:ext cx="128995" cy="165659"/>
-            </a:xfrm>
-            <a:prstGeom prst="triangle">
-              <a:avLst/>
-            </a:prstGeom>
-            <a:solidFill>
-              <a:schemeClr val="tx1"/>
-            </a:solidFill>
-            <a:ln w="19050">
-              <a:solidFill>
+              <a:off x="5803130" y="3252245"/>
+              <a:ext cx="836040" cy="714657"/>
+              <a:chOff x="9431517" y="5515365"/>
+              <a:chExt cx="668549" cy="571483"/>
+            </a:xfrm>
+          </p:grpSpPr>
+          <p:cxnSp>
+            <p:nvCxnSpPr>
+              <p:cNvPr id="715" name="Straight Connector 714">
+                <a:extLst>
+                  <a:ext uri="{FF2B5EF4-FFF2-40B4-BE49-F238E27FC236}">
+                    <a16:creationId xmlns:a16="http://schemas.microsoft.com/office/drawing/2014/main" id="{906B6BEE-D072-EB40-B664-E5BD770C2ED4}"/>
+                  </a:ext>
+                </a:extLst>
+              </p:cNvPr>
+              <p:cNvCxnSpPr>
+                <a:cxnSpLocks/>
+              </p:cNvCxnSpPr>
+              <p:nvPr/>
+            </p:nvCxnSpPr>
+            <p:spPr>
+              <a:xfrm flipH="1" flipV="1">
+                <a:off x="9929748" y="5566933"/>
+                <a:ext cx="170318" cy="485070"/>
+              </a:xfrm>
+              <a:prstGeom prst="line">
+                <a:avLst/>
+              </a:prstGeom>
+              <a:ln w="38100" cap="rnd">
+                <a:solidFill>
+                  <a:schemeClr val="tx1"/>
+                </a:solidFill>
+              </a:ln>
+            </p:spPr>
+            <p:style>
+              <a:lnRef idx="1">
+                <a:schemeClr val="accent1"/>
+              </a:lnRef>
+              <a:fillRef idx="0">
+                <a:schemeClr val="accent1"/>
+              </a:fillRef>
+              <a:effectRef idx="0">
+                <a:schemeClr val="accent1"/>
+              </a:effectRef>
+              <a:fontRef idx="minor">
                 <a:schemeClr val="tx1"/>
-              </a:solidFill>
-            </a:ln>
-          </p:spPr>
-          <p:style>
-            <a:lnRef idx="2">
-              <a:schemeClr val="accent1">
-                <a:shade val="50000"/>
-              </a:schemeClr>
-            </a:lnRef>
-            <a:fillRef idx="1">
-              <a:schemeClr val="accent1"/>
-            </a:fillRef>
-            <a:effectRef idx="0">
-              <a:schemeClr val="accent1"/>
-            </a:effectRef>
-            <a:fontRef idx="minor">
-              <a:schemeClr val="lt1"/>
-            </a:fontRef>
-          </p:style>
-          <p:txBody>
-            <a:bodyPr rtlCol="0" anchor="ctr"/>
-            <a:lstStyle/>
-            <a:p>
-              <a:pPr algn="ctr"/>
-              <a:endParaRPr lang="en-US"/>
-            </a:p>
-          </p:txBody>
-        </p:sp>
-        <p:sp>
-          <p:nvSpPr>
-            <p:cNvPr id="720" name="Oval 719">
-              <a:extLst>
-                <a:ext uri="{FF2B5EF4-FFF2-40B4-BE49-F238E27FC236}">
-                  <a16:creationId xmlns:a16="http://schemas.microsoft.com/office/drawing/2014/main" id="{14C095E7-6945-1141-9617-058F8492857B}"/>
-                </a:ext>
-              </a:extLst>
-            </p:cNvPr>
-            <p:cNvSpPr/>
-            <p:nvPr/>
-          </p:nvSpPr>
-          <p:spPr>
-            <a:xfrm>
-              <a:off x="9573248" y="5632534"/>
-              <a:ext cx="356500" cy="206228"/>
-            </a:xfrm>
-            <a:prstGeom prst="ellipse">
-              <a:avLst/>
-            </a:prstGeom>
-            <a:solidFill>
-              <a:schemeClr val="tx1"/>
-            </a:solidFill>
-            <a:ln w="19050">
-              <a:solidFill>
-                <a:schemeClr val="bg1"/>
-              </a:solidFill>
-            </a:ln>
-          </p:spPr>
-          <p:style>
-            <a:lnRef idx="2">
-              <a:schemeClr val="accent1">
-                <a:shade val="50000"/>
-              </a:schemeClr>
-            </a:lnRef>
-            <a:fillRef idx="1">
-              <a:schemeClr val="accent1"/>
-            </a:fillRef>
-            <a:effectRef idx="0">
-              <a:schemeClr val="accent1"/>
-            </a:effectRef>
-            <a:fontRef idx="minor">
-              <a:schemeClr val="lt1"/>
-            </a:fontRef>
-          </p:style>
-          <p:txBody>
-            <a:bodyPr rtlCol="0" anchor="ctr"/>
-            <a:lstStyle/>
-            <a:p>
-              <a:pPr algn="ctr"/>
-              <a:endParaRPr lang="en-US"/>
-            </a:p>
-          </p:txBody>
-        </p:sp>
-        <p:sp>
-          <p:nvSpPr>
-            <p:cNvPr id="721" name="Oval 720">
-              <a:extLst>
-                <a:ext uri="{FF2B5EF4-FFF2-40B4-BE49-F238E27FC236}">
-                  <a16:creationId xmlns:a16="http://schemas.microsoft.com/office/drawing/2014/main" id="{D43E4F5C-448B-874D-B801-51D7D3251839}"/>
-                </a:ext>
-              </a:extLst>
-            </p:cNvPr>
-            <p:cNvSpPr/>
-            <p:nvPr/>
-          </p:nvSpPr>
-          <p:spPr>
-            <a:xfrm>
-              <a:off x="9668020" y="5689211"/>
-              <a:ext cx="163260" cy="163260"/>
-            </a:xfrm>
-            <a:prstGeom prst="ellipse">
-              <a:avLst/>
-            </a:prstGeom>
-            <a:solidFill>
-              <a:schemeClr val="tx1"/>
-            </a:solidFill>
-            <a:ln w="19050">
-              <a:solidFill>
-                <a:schemeClr val="bg1"/>
-              </a:solidFill>
-            </a:ln>
-          </p:spPr>
-          <p:style>
-            <a:lnRef idx="2">
-              <a:schemeClr val="accent1">
-                <a:shade val="50000"/>
-              </a:schemeClr>
-            </a:lnRef>
-            <a:fillRef idx="1">
-              <a:schemeClr val="accent1"/>
-            </a:fillRef>
-            <a:effectRef idx="0">
-              <a:schemeClr val="accent1"/>
-            </a:effectRef>
-            <a:fontRef idx="minor">
-              <a:schemeClr val="lt1"/>
-            </a:fontRef>
-          </p:style>
-          <p:txBody>
-            <a:bodyPr rtlCol="0" anchor="ctr"/>
-            <a:lstStyle/>
-            <a:p>
-              <a:pPr algn="ctr"/>
-              <a:endParaRPr lang="en-US"/>
-            </a:p>
-          </p:txBody>
-        </p:sp>
-        <p:sp>
-          <p:nvSpPr>
-            <p:cNvPr id="722" name="Oval 721">
-              <a:extLst>
-                <a:ext uri="{FF2B5EF4-FFF2-40B4-BE49-F238E27FC236}">
-                  <a16:creationId xmlns:a16="http://schemas.microsoft.com/office/drawing/2014/main" id="{769D354F-3C85-EE45-86CF-6393F41359D4}"/>
-                </a:ext>
-              </a:extLst>
-            </p:cNvPr>
-            <p:cNvSpPr/>
-            <p:nvPr/>
-          </p:nvSpPr>
-          <p:spPr>
-            <a:xfrm>
-              <a:off x="9898202" y="5535387"/>
-              <a:ext cx="63093" cy="63093"/>
-            </a:xfrm>
-            <a:prstGeom prst="ellipse">
-              <a:avLst/>
-            </a:prstGeom>
-            <a:solidFill>
-              <a:schemeClr val="tx1"/>
-            </a:solidFill>
-            <a:ln w="19050">
+              </a:fontRef>
+            </p:style>
+          </p:cxnSp>
+          <p:sp>
+            <p:nvSpPr>
+              <p:cNvPr id="716" name="Terminator 715">
+                <a:extLst>
+                  <a:ext uri="{FF2B5EF4-FFF2-40B4-BE49-F238E27FC236}">
+                    <a16:creationId xmlns:a16="http://schemas.microsoft.com/office/drawing/2014/main" id="{0146C195-1292-9E41-B4DC-6181FA6CDE7D}"/>
+                  </a:ext>
+                </a:extLst>
+              </p:cNvPr>
+              <p:cNvSpPr/>
+              <p:nvPr/>
+            </p:nvSpPr>
+            <p:spPr>
+              <a:xfrm rot="2474403">
+                <a:off x="9431517" y="5791310"/>
+                <a:ext cx="263532" cy="86965"/>
+              </a:xfrm>
+              <a:prstGeom prst="flowChartTerminator">
+                <a:avLst/>
+              </a:prstGeom>
               <a:solidFill>
                 <a:schemeClr val="tx1"/>
               </a:solidFill>
-            </a:ln>
-          </p:spPr>
-          <p:style>
-            <a:lnRef idx="2">
-              <a:schemeClr val="accent1">
-                <a:shade val="50000"/>
-              </a:schemeClr>
-            </a:lnRef>
-            <a:fillRef idx="1">
-              <a:schemeClr val="accent1"/>
-            </a:fillRef>
-            <a:effectRef idx="0">
-              <a:schemeClr val="accent1"/>
-            </a:effectRef>
-            <a:fontRef idx="minor">
-              <a:schemeClr val="lt1"/>
-            </a:fontRef>
-          </p:style>
-          <p:txBody>
-            <a:bodyPr rtlCol="0" anchor="ctr"/>
-            <a:lstStyle/>
-            <a:p>
-              <a:pPr algn="ctr"/>
-              <a:endParaRPr lang="en-US"/>
-            </a:p>
-          </p:txBody>
-        </p:sp>
+              <a:ln w="19050">
+                <a:solidFill>
+                  <a:schemeClr val="bg1"/>
+                </a:solidFill>
+              </a:ln>
+            </p:spPr>
+            <p:style>
+              <a:lnRef idx="2">
+                <a:schemeClr val="accent1">
+                  <a:shade val="50000"/>
+                </a:schemeClr>
+              </a:lnRef>
+              <a:fillRef idx="1">
+                <a:schemeClr val="accent1"/>
+              </a:fillRef>
+              <a:effectRef idx="0">
+                <a:schemeClr val="accent1"/>
+              </a:effectRef>
+              <a:fontRef idx="minor">
+                <a:schemeClr val="lt1"/>
+              </a:fontRef>
+            </p:style>
+            <p:txBody>
+              <a:bodyPr rtlCol="0" anchor="ctr"/>
+              <a:lstStyle/>
+              <a:p>
+                <a:pPr algn="ctr"/>
+                <a:endParaRPr lang="en-US"/>
+              </a:p>
+            </p:txBody>
+          </p:sp>
+          <p:sp>
+            <p:nvSpPr>
+              <p:cNvPr id="717" name="Terminator 716">
+                <a:extLst>
+                  <a:ext uri="{FF2B5EF4-FFF2-40B4-BE49-F238E27FC236}">
+                    <a16:creationId xmlns:a16="http://schemas.microsoft.com/office/drawing/2014/main" id="{0CD1C98D-0BAC-654F-8CC3-5C6352DA7371}"/>
+                  </a:ext>
+                </a:extLst>
+              </p:cNvPr>
+              <p:cNvSpPr/>
+              <p:nvPr/>
+            </p:nvSpPr>
+            <p:spPr>
+              <a:xfrm rot="19815812">
+                <a:off x="9804897" y="5785045"/>
+                <a:ext cx="263532" cy="86965"/>
+              </a:xfrm>
+              <a:prstGeom prst="flowChartTerminator">
+                <a:avLst/>
+              </a:prstGeom>
+              <a:solidFill>
+                <a:schemeClr val="tx1"/>
+              </a:solidFill>
+              <a:ln w="19050">
+                <a:solidFill>
+                  <a:schemeClr val="bg1"/>
+                </a:solidFill>
+              </a:ln>
+            </p:spPr>
+            <p:style>
+              <a:lnRef idx="2">
+                <a:schemeClr val="accent1">
+                  <a:shade val="50000"/>
+                </a:schemeClr>
+              </a:lnRef>
+              <a:fillRef idx="1">
+                <a:schemeClr val="accent1"/>
+              </a:fillRef>
+              <a:effectRef idx="0">
+                <a:schemeClr val="accent1"/>
+              </a:effectRef>
+              <a:fontRef idx="minor">
+                <a:schemeClr val="lt1"/>
+              </a:fontRef>
+            </p:style>
+            <p:txBody>
+              <a:bodyPr rtlCol="0" anchor="ctr"/>
+              <a:lstStyle/>
+              <a:p>
+                <a:pPr algn="ctr"/>
+                <a:endParaRPr lang="en-US"/>
+              </a:p>
+            </p:txBody>
+          </p:sp>
+          <p:sp>
+            <p:nvSpPr>
+              <p:cNvPr id="718" name="Delay 717">
+                <a:extLst>
+                  <a:ext uri="{FF2B5EF4-FFF2-40B4-BE49-F238E27FC236}">
+                    <a16:creationId xmlns:a16="http://schemas.microsoft.com/office/drawing/2014/main" id="{7E2F7D6D-027D-C444-AC7D-9A082C2AED99}"/>
+                  </a:ext>
+                </a:extLst>
+              </p:cNvPr>
+              <p:cNvSpPr/>
+              <p:nvPr/>
+            </p:nvSpPr>
+            <p:spPr>
+              <a:xfrm rot="16200000">
+                <a:off x="9606971" y="5827497"/>
+                <a:ext cx="282101" cy="236602"/>
+              </a:xfrm>
+              <a:prstGeom prst="flowChartDelay">
+                <a:avLst/>
+              </a:prstGeom>
+              <a:solidFill>
+                <a:schemeClr val="tx1"/>
+              </a:solidFill>
+              <a:ln w="19050">
+                <a:solidFill>
+                  <a:schemeClr val="bg1"/>
+                </a:solidFill>
+              </a:ln>
+            </p:spPr>
+            <p:style>
+              <a:lnRef idx="2">
+                <a:schemeClr val="accent1">
+                  <a:shade val="50000"/>
+                </a:schemeClr>
+              </a:lnRef>
+              <a:fillRef idx="1">
+                <a:schemeClr val="accent1"/>
+              </a:fillRef>
+              <a:effectRef idx="0">
+                <a:schemeClr val="accent1"/>
+              </a:effectRef>
+              <a:fontRef idx="minor">
+                <a:schemeClr val="lt1"/>
+              </a:fontRef>
+            </p:style>
+            <p:txBody>
+              <a:bodyPr rtlCol="0" anchor="ctr"/>
+              <a:lstStyle/>
+              <a:p>
+                <a:pPr algn="ctr"/>
+                <a:endParaRPr lang="en-US" dirty="0"/>
+              </a:p>
+            </p:txBody>
+          </p:sp>
+          <p:sp>
+            <p:nvSpPr>
+              <p:cNvPr id="719" name="Triangle 718">
+                <a:extLst>
+                  <a:ext uri="{FF2B5EF4-FFF2-40B4-BE49-F238E27FC236}">
+                    <a16:creationId xmlns:a16="http://schemas.microsoft.com/office/drawing/2014/main" id="{658C96FC-7BFE-1745-83C5-B396375E3174}"/>
+                  </a:ext>
+                </a:extLst>
+              </p:cNvPr>
+              <p:cNvSpPr/>
+              <p:nvPr/>
+            </p:nvSpPr>
+            <p:spPr>
+              <a:xfrm>
+                <a:off x="9682336" y="5515365"/>
+                <a:ext cx="128995" cy="165659"/>
+              </a:xfrm>
+              <a:prstGeom prst="triangle">
+                <a:avLst/>
+              </a:prstGeom>
+              <a:solidFill>
+                <a:schemeClr val="tx1"/>
+              </a:solidFill>
+              <a:ln w="19050">
+                <a:solidFill>
+                  <a:schemeClr val="tx1"/>
+                </a:solidFill>
+              </a:ln>
+            </p:spPr>
+            <p:style>
+              <a:lnRef idx="2">
+                <a:schemeClr val="accent1">
+                  <a:shade val="50000"/>
+                </a:schemeClr>
+              </a:lnRef>
+              <a:fillRef idx="1">
+                <a:schemeClr val="accent1"/>
+              </a:fillRef>
+              <a:effectRef idx="0">
+                <a:schemeClr val="accent1"/>
+              </a:effectRef>
+              <a:fontRef idx="minor">
+                <a:schemeClr val="lt1"/>
+              </a:fontRef>
+            </p:style>
+            <p:txBody>
+              <a:bodyPr rtlCol="0" anchor="ctr"/>
+              <a:lstStyle/>
+              <a:p>
+                <a:pPr algn="ctr"/>
+                <a:endParaRPr lang="en-US"/>
+              </a:p>
+            </p:txBody>
+          </p:sp>
+          <p:sp>
+            <p:nvSpPr>
+              <p:cNvPr id="720" name="Oval 719">
+                <a:extLst>
+                  <a:ext uri="{FF2B5EF4-FFF2-40B4-BE49-F238E27FC236}">
+                    <a16:creationId xmlns:a16="http://schemas.microsoft.com/office/drawing/2014/main" id="{14C095E7-6945-1141-9617-058F8492857B}"/>
+                  </a:ext>
+                </a:extLst>
+              </p:cNvPr>
+              <p:cNvSpPr/>
+              <p:nvPr/>
+            </p:nvSpPr>
+            <p:spPr>
+              <a:xfrm>
+                <a:off x="9573248" y="5632534"/>
+                <a:ext cx="356500" cy="206228"/>
+              </a:xfrm>
+              <a:prstGeom prst="ellipse">
+                <a:avLst/>
+              </a:prstGeom>
+              <a:solidFill>
+                <a:schemeClr val="tx1"/>
+              </a:solidFill>
+              <a:ln w="19050">
+                <a:solidFill>
+                  <a:schemeClr val="bg1"/>
+                </a:solidFill>
+              </a:ln>
+            </p:spPr>
+            <p:style>
+              <a:lnRef idx="2">
+                <a:schemeClr val="accent1">
+                  <a:shade val="50000"/>
+                </a:schemeClr>
+              </a:lnRef>
+              <a:fillRef idx="1">
+                <a:schemeClr val="accent1"/>
+              </a:fillRef>
+              <a:effectRef idx="0">
+                <a:schemeClr val="accent1"/>
+              </a:effectRef>
+              <a:fontRef idx="minor">
+                <a:schemeClr val="lt1"/>
+              </a:fontRef>
+            </p:style>
+            <p:txBody>
+              <a:bodyPr rtlCol="0" anchor="ctr"/>
+              <a:lstStyle/>
+              <a:p>
+                <a:pPr algn="ctr"/>
+                <a:endParaRPr lang="en-US"/>
+              </a:p>
+            </p:txBody>
+          </p:sp>
+          <p:sp>
+            <p:nvSpPr>
+              <p:cNvPr id="721" name="Oval 720">
+                <a:extLst>
+                  <a:ext uri="{FF2B5EF4-FFF2-40B4-BE49-F238E27FC236}">
+                    <a16:creationId xmlns:a16="http://schemas.microsoft.com/office/drawing/2014/main" id="{D43E4F5C-448B-874D-B801-51D7D3251839}"/>
+                  </a:ext>
+                </a:extLst>
+              </p:cNvPr>
+              <p:cNvSpPr/>
+              <p:nvPr/>
+            </p:nvSpPr>
+            <p:spPr>
+              <a:xfrm>
+                <a:off x="9668020" y="5689211"/>
+                <a:ext cx="163260" cy="163260"/>
+              </a:xfrm>
+              <a:prstGeom prst="ellipse">
+                <a:avLst/>
+              </a:prstGeom>
+              <a:solidFill>
+                <a:schemeClr val="tx1"/>
+              </a:solidFill>
+              <a:ln w="19050">
+                <a:solidFill>
+                  <a:schemeClr val="bg1"/>
+                </a:solidFill>
+              </a:ln>
+            </p:spPr>
+            <p:style>
+              <a:lnRef idx="2">
+                <a:schemeClr val="accent1">
+                  <a:shade val="50000"/>
+                </a:schemeClr>
+              </a:lnRef>
+              <a:fillRef idx="1">
+                <a:schemeClr val="accent1"/>
+              </a:fillRef>
+              <a:effectRef idx="0">
+                <a:schemeClr val="accent1"/>
+              </a:effectRef>
+              <a:fontRef idx="minor">
+                <a:schemeClr val="lt1"/>
+              </a:fontRef>
+            </p:style>
+            <p:txBody>
+              <a:bodyPr rtlCol="0" anchor="ctr"/>
+              <a:lstStyle/>
+              <a:p>
+                <a:pPr algn="ctr"/>
+                <a:endParaRPr lang="en-US"/>
+              </a:p>
+            </p:txBody>
+          </p:sp>
+          <p:sp>
+            <p:nvSpPr>
+              <p:cNvPr id="722" name="Oval 721">
+                <a:extLst>
+                  <a:ext uri="{FF2B5EF4-FFF2-40B4-BE49-F238E27FC236}">
+                    <a16:creationId xmlns:a16="http://schemas.microsoft.com/office/drawing/2014/main" id="{769D354F-3C85-EE45-86CF-6393F41359D4}"/>
+                  </a:ext>
+                </a:extLst>
+              </p:cNvPr>
+              <p:cNvSpPr/>
+              <p:nvPr/>
+            </p:nvSpPr>
+            <p:spPr>
+              <a:xfrm>
+                <a:off x="9898202" y="5535387"/>
+                <a:ext cx="63093" cy="63093"/>
+              </a:xfrm>
+              <a:prstGeom prst="ellipse">
+                <a:avLst/>
+              </a:prstGeom>
+              <a:solidFill>
+                <a:schemeClr val="tx1"/>
+              </a:solidFill>
+              <a:ln w="19050">
+                <a:solidFill>
+                  <a:schemeClr val="tx1"/>
+                </a:solidFill>
+              </a:ln>
+            </p:spPr>
+            <p:style>
+              <a:lnRef idx="2">
+                <a:schemeClr val="accent1">
+                  <a:shade val="50000"/>
+                </a:schemeClr>
+              </a:lnRef>
+              <a:fillRef idx="1">
+                <a:schemeClr val="accent1"/>
+              </a:fillRef>
+              <a:effectRef idx="0">
+                <a:schemeClr val="accent1"/>
+              </a:effectRef>
+              <a:fontRef idx="minor">
+                <a:schemeClr val="lt1"/>
+              </a:fontRef>
+            </p:style>
+            <p:txBody>
+              <a:bodyPr rtlCol="0" anchor="ctr"/>
+              <a:lstStyle/>
+              <a:p>
+                <a:pPr algn="ctr"/>
+                <a:endParaRPr lang="en-US"/>
+              </a:p>
+            </p:txBody>
+          </p:sp>
+        </p:grpSp>
       </p:grpSp>
       <p:pic>
         <p:nvPicPr>
@@ -26408,15 +26381,67 @@
           <p:nvPr/>
         </p:nvPicPr>
         <p:blipFill>
-          <a:blip r:embed="rId12"/>
+          <a:blip r:embed="rId12">
+            <a:clrChange>
+              <a:clrFrom>
+                <a:srgbClr val="FFFFFF"/>
+              </a:clrFrom>
+              <a:clrTo>
+                <a:srgbClr val="FFFFFF">
+                  <a:alpha val="0"/>
+                </a:srgbClr>
+              </a:clrTo>
+            </a:clrChange>
+          </a:blip>
           <a:stretch>
             <a:fillRect/>
           </a:stretch>
         </p:blipFill>
         <p:spPr>
           <a:xfrm>
-            <a:off x="-7659733" y="-8146144"/>
+            <a:off x="-11389097" y="-2220532"/>
             <a:ext cx="5219700" cy="5156200"/>
+          </a:xfrm>
+          <a:prstGeom prst="rect">
+            <a:avLst/>
+          </a:prstGeom>
+        </p:spPr>
+      </p:pic>
+      <p:pic>
+        <p:nvPicPr>
+          <p:cNvPr id="807" name="Picture 806">
+            <a:extLst>
+              <a:ext uri="{FF2B5EF4-FFF2-40B4-BE49-F238E27FC236}">
+                <a16:creationId xmlns:a16="http://schemas.microsoft.com/office/drawing/2014/main" id="{FDEDA922-4C99-4B41-85BB-27B177FC45D8}"/>
+              </a:ext>
+            </a:extLst>
+          </p:cNvPr>
+          <p:cNvPicPr>
+            <a:picLocks noChangeAspect="1"/>
+          </p:cNvPicPr>
+          <p:nvPr/>
+        </p:nvPicPr>
+        <p:blipFill>
+          <a:blip r:embed="rId13">
+            <a:clrChange>
+              <a:clrFrom>
+                <a:srgbClr val="FFFFFF"/>
+              </a:clrFrom>
+              <a:clrTo>
+                <a:srgbClr val="FFFFFF">
+                  <a:alpha val="0"/>
+                </a:srgbClr>
+              </a:clrTo>
+            </a:clrChange>
+          </a:blip>
+          <a:stretch>
+            <a:fillRect/>
+          </a:stretch>
+        </p:blipFill>
+        <p:spPr>
+          <a:xfrm>
+            <a:off x="-13624899" y="4642288"/>
+            <a:ext cx="5308600" cy="5321300"/>
           </a:xfrm>
           <a:prstGeom prst="rect">
             <a:avLst/>

--- a/logos/logos.pptx
+++ b/logos/logos.pptx
@@ -261,7 +261,7 @@
           <a:p>
             <a:fld id="{16F93EB0-79FE-3A48-9677-781C433206CF}" type="datetimeFigureOut">
               <a:rPr lang="en-US" smtClean="0"/>
-              <a:t>8/24/21</a:t>
+              <a:t>8/28/21</a:t>
             </a:fld>
             <a:endParaRPr lang="en-US"/>
           </a:p>
@@ -461,7 +461,7 @@
           <a:p>
             <a:fld id="{16F93EB0-79FE-3A48-9677-781C433206CF}" type="datetimeFigureOut">
               <a:rPr lang="en-US" smtClean="0"/>
-              <a:t>8/24/21</a:t>
+              <a:t>8/28/21</a:t>
             </a:fld>
             <a:endParaRPr lang="en-US"/>
           </a:p>
@@ -671,7 +671,7 @@
           <a:p>
             <a:fld id="{16F93EB0-79FE-3A48-9677-781C433206CF}" type="datetimeFigureOut">
               <a:rPr lang="en-US" smtClean="0"/>
-              <a:t>8/24/21</a:t>
+              <a:t>8/28/21</a:t>
             </a:fld>
             <a:endParaRPr lang="en-US"/>
           </a:p>
@@ -871,7 +871,7 @@
           <a:p>
             <a:fld id="{16F93EB0-79FE-3A48-9677-781C433206CF}" type="datetimeFigureOut">
               <a:rPr lang="en-US" smtClean="0"/>
-              <a:t>8/24/21</a:t>
+              <a:t>8/28/21</a:t>
             </a:fld>
             <a:endParaRPr lang="en-US"/>
           </a:p>
@@ -1147,7 +1147,7 @@
           <a:p>
             <a:fld id="{16F93EB0-79FE-3A48-9677-781C433206CF}" type="datetimeFigureOut">
               <a:rPr lang="en-US" smtClean="0"/>
-              <a:t>8/24/21</a:t>
+              <a:t>8/28/21</a:t>
             </a:fld>
             <a:endParaRPr lang="en-US"/>
           </a:p>
@@ -1415,7 +1415,7 @@
           <a:p>
             <a:fld id="{16F93EB0-79FE-3A48-9677-781C433206CF}" type="datetimeFigureOut">
               <a:rPr lang="en-US" smtClean="0"/>
-              <a:t>8/24/21</a:t>
+              <a:t>8/28/21</a:t>
             </a:fld>
             <a:endParaRPr lang="en-US"/>
           </a:p>
@@ -1830,7 +1830,7 @@
           <a:p>
             <a:fld id="{16F93EB0-79FE-3A48-9677-781C433206CF}" type="datetimeFigureOut">
               <a:rPr lang="en-US" smtClean="0"/>
-              <a:t>8/24/21</a:t>
+              <a:t>8/28/21</a:t>
             </a:fld>
             <a:endParaRPr lang="en-US"/>
           </a:p>
@@ -1972,7 +1972,7 @@
           <a:p>
             <a:fld id="{16F93EB0-79FE-3A48-9677-781C433206CF}" type="datetimeFigureOut">
               <a:rPr lang="en-US" smtClean="0"/>
-              <a:t>8/24/21</a:t>
+              <a:t>8/28/21</a:t>
             </a:fld>
             <a:endParaRPr lang="en-US"/>
           </a:p>
@@ -2085,7 +2085,7 @@
           <a:p>
             <a:fld id="{16F93EB0-79FE-3A48-9677-781C433206CF}" type="datetimeFigureOut">
               <a:rPr lang="en-US" smtClean="0"/>
-              <a:t>8/24/21</a:t>
+              <a:t>8/28/21</a:t>
             </a:fld>
             <a:endParaRPr lang="en-US"/>
           </a:p>
@@ -2398,7 +2398,7 @@
           <a:p>
             <a:fld id="{16F93EB0-79FE-3A48-9677-781C433206CF}" type="datetimeFigureOut">
               <a:rPr lang="en-US" smtClean="0"/>
-              <a:t>8/24/21</a:t>
+              <a:t>8/28/21</a:t>
             </a:fld>
             <a:endParaRPr lang="en-US"/>
           </a:p>
@@ -2687,7 +2687,7 @@
           <a:p>
             <a:fld id="{16F93EB0-79FE-3A48-9677-781C433206CF}" type="datetimeFigureOut">
               <a:rPr lang="en-US" smtClean="0"/>
-              <a:t>8/24/21</a:t>
+              <a:t>8/28/21</a:t>
             </a:fld>
             <a:endParaRPr lang="en-US"/>
           </a:p>
@@ -2930,7 +2930,7 @@
           <a:p>
             <a:fld id="{16F93EB0-79FE-3A48-9677-781C433206CF}" type="datetimeFigureOut">
               <a:rPr lang="en-US" smtClean="0"/>
-              <a:t>8/24/21</a:t>
+              <a:t>8/28/21</a:t>
             </a:fld>
             <a:endParaRPr lang="en-US"/>
           </a:p>
@@ -26448,6 +26448,1004 @@
           </a:prstGeom>
         </p:spPr>
       </p:pic>
+      <p:grpSp>
+        <p:nvGrpSpPr>
+          <p:cNvPr id="494" name="Group 493">
+            <a:extLst>
+              <a:ext uri="{FF2B5EF4-FFF2-40B4-BE49-F238E27FC236}">
+                <a16:creationId xmlns:a16="http://schemas.microsoft.com/office/drawing/2014/main" id="{4825365A-41F7-CC4B-839A-F9F2444548C4}"/>
+              </a:ext>
+            </a:extLst>
+          </p:cNvPr>
+          <p:cNvGrpSpPr/>
+          <p:nvPr/>
+        </p:nvGrpSpPr>
+        <p:grpSpPr>
+          <a:xfrm>
+            <a:off x="7959639" y="3319750"/>
+            <a:ext cx="535049" cy="482789"/>
+            <a:chOff x="6227183" y="2691999"/>
+            <a:chExt cx="418056" cy="377222"/>
+          </a:xfrm>
+        </p:grpSpPr>
+        <p:sp>
+          <p:nvSpPr>
+            <p:cNvPr id="495" name="Rectangle 494">
+              <a:extLst>
+                <a:ext uri="{FF2B5EF4-FFF2-40B4-BE49-F238E27FC236}">
+                  <a16:creationId xmlns:a16="http://schemas.microsoft.com/office/drawing/2014/main" id="{B200CF7F-211A-F249-B71A-77DD90927BD6}"/>
+                </a:ext>
+              </a:extLst>
+            </p:cNvPr>
+            <p:cNvSpPr/>
+            <p:nvPr/>
+          </p:nvSpPr>
+          <p:spPr>
+            <a:xfrm>
+              <a:off x="6233054" y="2869072"/>
+              <a:ext cx="412185" cy="200149"/>
+            </a:xfrm>
+            <a:prstGeom prst="rect">
+              <a:avLst/>
+            </a:prstGeom>
+            <a:solidFill>
+              <a:schemeClr val="bg1"/>
+            </a:solidFill>
+            <a:ln>
+              <a:noFill/>
+            </a:ln>
+          </p:spPr>
+          <p:style>
+            <a:lnRef idx="2">
+              <a:schemeClr val="accent1">
+                <a:shade val="50000"/>
+              </a:schemeClr>
+            </a:lnRef>
+            <a:fillRef idx="1">
+              <a:schemeClr val="accent1"/>
+            </a:fillRef>
+            <a:effectRef idx="0">
+              <a:schemeClr val="accent1"/>
+            </a:effectRef>
+            <a:fontRef idx="minor">
+              <a:schemeClr val="lt1"/>
+            </a:fontRef>
+          </p:style>
+          <p:txBody>
+            <a:bodyPr rtlCol="0" anchor="ctr"/>
+            <a:lstStyle/>
+            <a:p>
+              <a:pPr algn="ctr"/>
+              <a:endParaRPr lang="en-US"/>
+            </a:p>
+          </p:txBody>
+        </p:sp>
+        <p:grpSp>
+          <p:nvGrpSpPr>
+            <p:cNvPr id="496" name="Group 495">
+              <a:extLst>
+                <a:ext uri="{FF2B5EF4-FFF2-40B4-BE49-F238E27FC236}">
+                  <a16:creationId xmlns:a16="http://schemas.microsoft.com/office/drawing/2014/main" id="{8F916719-94FC-434C-BFF7-C327721A6BF0}"/>
+                </a:ext>
+              </a:extLst>
+            </p:cNvPr>
+            <p:cNvGrpSpPr/>
+            <p:nvPr/>
+          </p:nvGrpSpPr>
+          <p:grpSpPr>
+            <a:xfrm>
+              <a:off x="6227183" y="2691999"/>
+              <a:ext cx="373276" cy="354952"/>
+              <a:chOff x="6400534" y="1760400"/>
+              <a:chExt cx="302867" cy="288000"/>
+            </a:xfrm>
+          </p:grpSpPr>
+          <p:sp>
+            <p:nvSpPr>
+              <p:cNvPr id="497" name="Rectangle 496">
+                <a:extLst>
+                  <a:ext uri="{FF2B5EF4-FFF2-40B4-BE49-F238E27FC236}">
+                    <a16:creationId xmlns:a16="http://schemas.microsoft.com/office/drawing/2014/main" id="{4C84FA73-8E29-F24A-81FE-4244D7B1AA02}"/>
+                  </a:ext>
+                </a:extLst>
+              </p:cNvPr>
+              <p:cNvSpPr/>
+              <p:nvPr/>
+            </p:nvSpPr>
+            <p:spPr>
+              <a:xfrm>
+                <a:off x="6405181" y="2030400"/>
+                <a:ext cx="288000" cy="18000"/>
+              </a:xfrm>
+              <a:prstGeom prst="rect">
+                <a:avLst/>
+              </a:prstGeom>
+              <a:solidFill>
+                <a:schemeClr val="tx1"/>
+              </a:solidFill>
+              <a:ln w="19050">
+                <a:solidFill>
+                  <a:schemeClr val="tx1"/>
+                </a:solidFill>
+              </a:ln>
+            </p:spPr>
+            <p:style>
+              <a:lnRef idx="2">
+                <a:schemeClr val="accent1">
+                  <a:shade val="50000"/>
+                </a:schemeClr>
+              </a:lnRef>
+              <a:fillRef idx="1">
+                <a:schemeClr val="accent1"/>
+              </a:fillRef>
+              <a:effectRef idx="0">
+                <a:schemeClr val="accent1"/>
+              </a:effectRef>
+              <a:fontRef idx="minor">
+                <a:schemeClr val="lt1"/>
+              </a:fontRef>
+            </p:style>
+            <p:txBody>
+              <a:bodyPr rtlCol="0" anchor="ctr"/>
+              <a:lstStyle/>
+              <a:p>
+                <a:pPr algn="ctr"/>
+                <a:endParaRPr lang="en-US"/>
+              </a:p>
+            </p:txBody>
+          </p:sp>
+          <p:sp>
+            <p:nvSpPr>
+              <p:cNvPr id="498" name="Rectangle 497">
+                <a:extLst>
+                  <a:ext uri="{FF2B5EF4-FFF2-40B4-BE49-F238E27FC236}">
+                    <a16:creationId xmlns:a16="http://schemas.microsoft.com/office/drawing/2014/main" id="{50024883-C85C-2B4F-9495-A05276D27417}"/>
+                  </a:ext>
+                </a:extLst>
+              </p:cNvPr>
+              <p:cNvSpPr/>
+              <p:nvPr/>
+            </p:nvSpPr>
+            <p:spPr>
+              <a:xfrm rot="5400000">
+                <a:off x="6265534" y="1895400"/>
+                <a:ext cx="288000" cy="18000"/>
+              </a:xfrm>
+              <a:prstGeom prst="rect">
+                <a:avLst/>
+              </a:prstGeom>
+              <a:solidFill>
+                <a:schemeClr val="tx1"/>
+              </a:solidFill>
+              <a:ln w="19050">
+                <a:solidFill>
+                  <a:schemeClr val="tx1"/>
+                </a:solidFill>
+              </a:ln>
+            </p:spPr>
+            <p:style>
+              <a:lnRef idx="2">
+                <a:schemeClr val="accent1">
+                  <a:shade val="50000"/>
+                </a:schemeClr>
+              </a:lnRef>
+              <a:fillRef idx="1">
+                <a:schemeClr val="accent1"/>
+              </a:fillRef>
+              <a:effectRef idx="0">
+                <a:schemeClr val="accent1"/>
+              </a:effectRef>
+              <a:fontRef idx="minor">
+                <a:schemeClr val="lt1"/>
+              </a:fontRef>
+            </p:style>
+            <p:txBody>
+              <a:bodyPr rtlCol="0" anchor="ctr"/>
+              <a:lstStyle/>
+              <a:p>
+                <a:pPr algn="ctr"/>
+                <a:endParaRPr lang="en-US"/>
+              </a:p>
+            </p:txBody>
+          </p:sp>
+          <p:sp>
+            <p:nvSpPr>
+              <p:cNvPr id="499" name="Rectangle 498">
+                <a:extLst>
+                  <a:ext uri="{FF2B5EF4-FFF2-40B4-BE49-F238E27FC236}">
+                    <a16:creationId xmlns:a16="http://schemas.microsoft.com/office/drawing/2014/main" id="{5C0542BD-D652-574C-8A0D-E76053B48E8F}"/>
+                  </a:ext>
+                </a:extLst>
+              </p:cNvPr>
+              <p:cNvSpPr/>
+              <p:nvPr/>
+            </p:nvSpPr>
+            <p:spPr>
+              <a:xfrm rot="19077046">
+                <a:off x="6415401" y="1884276"/>
+                <a:ext cx="288000" cy="18000"/>
+              </a:xfrm>
+              <a:prstGeom prst="rect">
+                <a:avLst/>
+              </a:prstGeom>
+              <a:solidFill>
+                <a:schemeClr val="tx1"/>
+              </a:solidFill>
+              <a:ln w="19050">
+                <a:solidFill>
+                  <a:schemeClr val="tx1"/>
+                </a:solidFill>
+              </a:ln>
+            </p:spPr>
+            <p:style>
+              <a:lnRef idx="2">
+                <a:schemeClr val="accent1">
+                  <a:shade val="50000"/>
+                </a:schemeClr>
+              </a:lnRef>
+              <a:fillRef idx="1">
+                <a:schemeClr val="accent1"/>
+              </a:fillRef>
+              <a:effectRef idx="0">
+                <a:schemeClr val="accent1"/>
+              </a:effectRef>
+              <a:fontRef idx="minor">
+                <a:schemeClr val="lt1"/>
+              </a:fontRef>
+            </p:style>
+            <p:txBody>
+              <a:bodyPr rtlCol="0" anchor="ctr"/>
+              <a:lstStyle/>
+              <a:p>
+                <a:pPr algn="ctr"/>
+                <a:endParaRPr lang="en-US"/>
+              </a:p>
+            </p:txBody>
+          </p:sp>
+          <p:sp>
+            <p:nvSpPr>
+              <p:cNvPr id="500" name="Oval 499">
+                <a:extLst>
+                  <a:ext uri="{FF2B5EF4-FFF2-40B4-BE49-F238E27FC236}">
+                    <a16:creationId xmlns:a16="http://schemas.microsoft.com/office/drawing/2014/main" id="{378DA487-5027-4A4C-B404-A8A4933FBA1D}"/>
+                  </a:ext>
+                </a:extLst>
+              </p:cNvPr>
+              <p:cNvSpPr/>
+              <p:nvPr/>
+            </p:nvSpPr>
+            <p:spPr>
+              <a:xfrm>
+                <a:off x="6472750" y="1878430"/>
+                <a:ext cx="45719" cy="45719"/>
+              </a:xfrm>
+              <a:prstGeom prst="ellipse">
+                <a:avLst/>
+              </a:prstGeom>
+              <a:solidFill>
+                <a:schemeClr val="tx1"/>
+              </a:solidFill>
+              <a:ln w="6350">
+                <a:solidFill>
+                  <a:schemeClr val="tx1"/>
+                </a:solidFill>
+              </a:ln>
+            </p:spPr>
+            <p:style>
+              <a:lnRef idx="2">
+                <a:schemeClr val="accent1">
+                  <a:shade val="50000"/>
+                </a:schemeClr>
+              </a:lnRef>
+              <a:fillRef idx="1">
+                <a:schemeClr val="accent1"/>
+              </a:fillRef>
+              <a:effectRef idx="0">
+                <a:schemeClr val="accent1"/>
+              </a:effectRef>
+              <a:fontRef idx="minor">
+                <a:schemeClr val="lt1"/>
+              </a:fontRef>
+            </p:style>
+            <p:txBody>
+              <a:bodyPr rtlCol="0" anchor="ctr"/>
+              <a:lstStyle/>
+              <a:p>
+                <a:pPr algn="ctr"/>
+                <a:endParaRPr lang="en-US"/>
+              </a:p>
+            </p:txBody>
+          </p:sp>
+          <p:sp>
+            <p:nvSpPr>
+              <p:cNvPr id="501" name="Oval 500">
+                <a:extLst>
+                  <a:ext uri="{FF2B5EF4-FFF2-40B4-BE49-F238E27FC236}">
+                    <a16:creationId xmlns:a16="http://schemas.microsoft.com/office/drawing/2014/main" id="{818C3961-DAF5-6643-9C5C-2E215396958F}"/>
+                  </a:ext>
+                </a:extLst>
+              </p:cNvPr>
+              <p:cNvSpPr/>
+              <p:nvPr/>
+            </p:nvSpPr>
+            <p:spPr>
+              <a:xfrm>
+                <a:off x="6527050" y="1819949"/>
+                <a:ext cx="45719" cy="45719"/>
+              </a:xfrm>
+              <a:prstGeom prst="ellipse">
+                <a:avLst/>
+              </a:prstGeom>
+              <a:solidFill>
+                <a:schemeClr val="tx1"/>
+              </a:solidFill>
+              <a:ln w="6350">
+                <a:solidFill>
+                  <a:schemeClr val="tx1"/>
+                </a:solidFill>
+              </a:ln>
+            </p:spPr>
+            <p:style>
+              <a:lnRef idx="2">
+                <a:schemeClr val="accent1">
+                  <a:shade val="50000"/>
+                </a:schemeClr>
+              </a:lnRef>
+              <a:fillRef idx="1">
+                <a:schemeClr val="accent1"/>
+              </a:fillRef>
+              <a:effectRef idx="0">
+                <a:schemeClr val="accent1"/>
+              </a:effectRef>
+              <a:fontRef idx="minor">
+                <a:schemeClr val="lt1"/>
+              </a:fontRef>
+            </p:style>
+            <p:txBody>
+              <a:bodyPr rtlCol="0" anchor="ctr"/>
+              <a:lstStyle/>
+              <a:p>
+                <a:pPr algn="ctr"/>
+                <a:endParaRPr lang="en-US"/>
+              </a:p>
+            </p:txBody>
+          </p:sp>
+          <p:sp>
+            <p:nvSpPr>
+              <p:cNvPr id="502" name="Oval 501">
+                <a:extLst>
+                  <a:ext uri="{FF2B5EF4-FFF2-40B4-BE49-F238E27FC236}">
+                    <a16:creationId xmlns:a16="http://schemas.microsoft.com/office/drawing/2014/main" id="{589A2672-A439-9043-8172-14D347D14D92}"/>
+                  </a:ext>
+                </a:extLst>
+              </p:cNvPr>
+              <p:cNvSpPr/>
+              <p:nvPr/>
+            </p:nvSpPr>
+            <p:spPr>
+              <a:xfrm>
+                <a:off x="6540673" y="1888255"/>
+                <a:ext cx="45719" cy="45719"/>
+              </a:xfrm>
+              <a:prstGeom prst="ellipse">
+                <a:avLst/>
+              </a:prstGeom>
+              <a:solidFill>
+                <a:schemeClr val="tx1"/>
+              </a:solidFill>
+              <a:ln w="6350">
+                <a:solidFill>
+                  <a:schemeClr val="tx1"/>
+                </a:solidFill>
+              </a:ln>
+            </p:spPr>
+            <p:style>
+              <a:lnRef idx="2">
+                <a:schemeClr val="accent1">
+                  <a:shade val="50000"/>
+                </a:schemeClr>
+              </a:lnRef>
+              <a:fillRef idx="1">
+                <a:schemeClr val="accent1"/>
+              </a:fillRef>
+              <a:effectRef idx="0">
+                <a:schemeClr val="accent1"/>
+              </a:effectRef>
+              <a:fontRef idx="minor">
+                <a:schemeClr val="lt1"/>
+              </a:fontRef>
+            </p:style>
+            <p:txBody>
+              <a:bodyPr rtlCol="0" anchor="ctr"/>
+              <a:lstStyle/>
+              <a:p>
+                <a:pPr algn="ctr"/>
+                <a:endParaRPr lang="en-US"/>
+              </a:p>
+            </p:txBody>
+          </p:sp>
+          <p:sp>
+            <p:nvSpPr>
+              <p:cNvPr id="503" name="Oval 502">
+                <a:extLst>
+                  <a:ext uri="{FF2B5EF4-FFF2-40B4-BE49-F238E27FC236}">
+                    <a16:creationId xmlns:a16="http://schemas.microsoft.com/office/drawing/2014/main" id="{FF1AA6EC-F408-8041-AC24-3CDEB80C011C}"/>
+                  </a:ext>
+                </a:extLst>
+              </p:cNvPr>
+              <p:cNvSpPr/>
+              <p:nvPr/>
+            </p:nvSpPr>
+            <p:spPr>
+              <a:xfrm>
+                <a:off x="6456113" y="1953950"/>
+                <a:ext cx="45719" cy="45719"/>
+              </a:xfrm>
+              <a:prstGeom prst="ellipse">
+                <a:avLst/>
+              </a:prstGeom>
+              <a:solidFill>
+                <a:schemeClr val="tx1"/>
+              </a:solidFill>
+              <a:ln w="6350">
+                <a:solidFill>
+                  <a:schemeClr val="tx1"/>
+                </a:solidFill>
+              </a:ln>
+            </p:spPr>
+            <p:style>
+              <a:lnRef idx="2">
+                <a:schemeClr val="accent1">
+                  <a:shade val="50000"/>
+                </a:schemeClr>
+              </a:lnRef>
+              <a:fillRef idx="1">
+                <a:schemeClr val="accent1"/>
+              </a:fillRef>
+              <a:effectRef idx="0">
+                <a:schemeClr val="accent1"/>
+              </a:effectRef>
+              <a:fontRef idx="minor">
+                <a:schemeClr val="lt1"/>
+              </a:fontRef>
+            </p:style>
+            <p:txBody>
+              <a:bodyPr rtlCol="0" anchor="ctr"/>
+              <a:lstStyle/>
+              <a:p>
+                <a:pPr algn="ctr"/>
+                <a:endParaRPr lang="en-US"/>
+              </a:p>
+            </p:txBody>
+          </p:sp>
+          <p:sp>
+            <p:nvSpPr>
+              <p:cNvPr id="504" name="Oval 503">
+                <a:extLst>
+                  <a:ext uri="{FF2B5EF4-FFF2-40B4-BE49-F238E27FC236}">
+                    <a16:creationId xmlns:a16="http://schemas.microsoft.com/office/drawing/2014/main" id="{93A03DEF-02EF-0C4B-9D6A-23E9EA639D4E}"/>
+                  </a:ext>
+                </a:extLst>
+              </p:cNvPr>
+              <p:cNvSpPr/>
+              <p:nvPr/>
+            </p:nvSpPr>
+            <p:spPr>
+              <a:xfrm>
+                <a:off x="6515244" y="1941800"/>
+                <a:ext cx="45719" cy="45719"/>
+              </a:xfrm>
+              <a:prstGeom prst="ellipse">
+                <a:avLst/>
+              </a:prstGeom>
+              <a:solidFill>
+                <a:schemeClr val="tx1"/>
+              </a:solidFill>
+              <a:ln w="6350">
+                <a:solidFill>
+                  <a:schemeClr val="tx1"/>
+                </a:solidFill>
+              </a:ln>
+            </p:spPr>
+            <p:style>
+              <a:lnRef idx="2">
+                <a:schemeClr val="accent1">
+                  <a:shade val="50000"/>
+                </a:schemeClr>
+              </a:lnRef>
+              <a:fillRef idx="1">
+                <a:schemeClr val="accent1"/>
+              </a:fillRef>
+              <a:effectRef idx="0">
+                <a:schemeClr val="accent1"/>
+              </a:effectRef>
+              <a:fontRef idx="minor">
+                <a:schemeClr val="lt1"/>
+              </a:fontRef>
+            </p:style>
+            <p:txBody>
+              <a:bodyPr rtlCol="0" anchor="ctr"/>
+              <a:lstStyle/>
+              <a:p>
+                <a:pPr algn="ctr"/>
+                <a:endParaRPr lang="en-US"/>
+              </a:p>
+            </p:txBody>
+          </p:sp>
+          <p:sp>
+            <p:nvSpPr>
+              <p:cNvPr id="505" name="Oval 504">
+                <a:extLst>
+                  <a:ext uri="{FF2B5EF4-FFF2-40B4-BE49-F238E27FC236}">
+                    <a16:creationId xmlns:a16="http://schemas.microsoft.com/office/drawing/2014/main" id="{278BBDC7-E9FD-5849-AB0A-9C67D4AF6F51}"/>
+                  </a:ext>
+                </a:extLst>
+              </p:cNvPr>
+              <p:cNvSpPr/>
+              <p:nvPr/>
+            </p:nvSpPr>
+            <p:spPr>
+              <a:xfrm>
+                <a:off x="6582490" y="1809229"/>
+                <a:ext cx="45719" cy="45719"/>
+              </a:xfrm>
+              <a:prstGeom prst="ellipse">
+                <a:avLst/>
+              </a:prstGeom>
+              <a:solidFill>
+                <a:schemeClr val="tx1"/>
+              </a:solidFill>
+              <a:ln w="6350">
+                <a:solidFill>
+                  <a:schemeClr val="tx1"/>
+                </a:solidFill>
+              </a:ln>
+            </p:spPr>
+            <p:style>
+              <a:lnRef idx="2">
+                <a:schemeClr val="accent1">
+                  <a:shade val="50000"/>
+                </a:schemeClr>
+              </a:lnRef>
+              <a:fillRef idx="1">
+                <a:schemeClr val="accent1"/>
+              </a:fillRef>
+              <a:effectRef idx="0">
+                <a:schemeClr val="accent1"/>
+              </a:effectRef>
+              <a:fontRef idx="minor">
+                <a:schemeClr val="lt1"/>
+              </a:fontRef>
+            </p:style>
+            <p:txBody>
+              <a:bodyPr rtlCol="0" anchor="ctr"/>
+              <a:lstStyle/>
+              <a:p>
+                <a:pPr algn="ctr"/>
+                <a:endParaRPr lang="en-US"/>
+              </a:p>
+            </p:txBody>
+          </p:sp>
+          <p:sp>
+            <p:nvSpPr>
+              <p:cNvPr id="506" name="Oval 505">
+                <a:extLst>
+                  <a:ext uri="{FF2B5EF4-FFF2-40B4-BE49-F238E27FC236}">
+                    <a16:creationId xmlns:a16="http://schemas.microsoft.com/office/drawing/2014/main" id="{2919F4DA-6A2E-ED42-AEC3-A572B924670D}"/>
+                  </a:ext>
+                </a:extLst>
+              </p:cNvPr>
+              <p:cNvSpPr/>
+              <p:nvPr/>
+            </p:nvSpPr>
+            <p:spPr>
+              <a:xfrm>
+                <a:off x="6605737" y="1874242"/>
+                <a:ext cx="45719" cy="45719"/>
+              </a:xfrm>
+              <a:prstGeom prst="ellipse">
+                <a:avLst/>
+              </a:prstGeom>
+              <a:solidFill>
+                <a:schemeClr val="tx1"/>
+              </a:solidFill>
+              <a:ln w="6350">
+                <a:solidFill>
+                  <a:schemeClr val="tx1"/>
+                </a:solidFill>
+              </a:ln>
+            </p:spPr>
+            <p:style>
+              <a:lnRef idx="2">
+                <a:schemeClr val="accent1">
+                  <a:shade val="50000"/>
+                </a:schemeClr>
+              </a:lnRef>
+              <a:fillRef idx="1">
+                <a:schemeClr val="accent1"/>
+              </a:fillRef>
+              <a:effectRef idx="0">
+                <a:schemeClr val="accent1"/>
+              </a:effectRef>
+              <a:fontRef idx="minor">
+                <a:schemeClr val="lt1"/>
+              </a:fontRef>
+            </p:style>
+            <p:txBody>
+              <a:bodyPr rtlCol="0" anchor="ctr"/>
+              <a:lstStyle/>
+              <a:p>
+                <a:pPr algn="ctr"/>
+                <a:endParaRPr lang="en-US"/>
+              </a:p>
+            </p:txBody>
+          </p:sp>
+          <p:sp>
+            <p:nvSpPr>
+              <p:cNvPr id="508" name="Oval 507">
+                <a:extLst>
+                  <a:ext uri="{FF2B5EF4-FFF2-40B4-BE49-F238E27FC236}">
+                    <a16:creationId xmlns:a16="http://schemas.microsoft.com/office/drawing/2014/main" id="{88AA6C3D-934C-704F-830B-839FE63D2840}"/>
+                  </a:ext>
+                </a:extLst>
+              </p:cNvPr>
+              <p:cNvSpPr/>
+              <p:nvPr/>
+            </p:nvSpPr>
+            <p:spPr>
+              <a:xfrm>
+                <a:off x="6651456" y="1813910"/>
+                <a:ext cx="45719" cy="45719"/>
+              </a:xfrm>
+              <a:prstGeom prst="ellipse">
+                <a:avLst/>
+              </a:prstGeom>
+              <a:solidFill>
+                <a:schemeClr val="tx1"/>
+              </a:solidFill>
+              <a:ln w="6350">
+                <a:solidFill>
+                  <a:schemeClr val="tx1"/>
+                </a:solidFill>
+              </a:ln>
+            </p:spPr>
+            <p:style>
+              <a:lnRef idx="2">
+                <a:schemeClr val="accent1">
+                  <a:shade val="50000"/>
+                </a:schemeClr>
+              </a:lnRef>
+              <a:fillRef idx="1">
+                <a:schemeClr val="accent1"/>
+              </a:fillRef>
+              <a:effectRef idx="0">
+                <a:schemeClr val="accent1"/>
+              </a:effectRef>
+              <a:fontRef idx="minor">
+                <a:schemeClr val="lt1"/>
+              </a:fontRef>
+            </p:style>
+            <p:txBody>
+              <a:bodyPr rtlCol="0" anchor="ctr"/>
+              <a:lstStyle/>
+              <a:p>
+                <a:pPr algn="ctr"/>
+                <a:endParaRPr lang="en-US"/>
+              </a:p>
+            </p:txBody>
+          </p:sp>
+        </p:grpSp>
+      </p:grpSp>
+      <p:grpSp>
+        <p:nvGrpSpPr>
+          <p:cNvPr id="519" name="Group 518">
+            <a:extLst>
+              <a:ext uri="{FF2B5EF4-FFF2-40B4-BE49-F238E27FC236}">
+                <a16:creationId xmlns:a16="http://schemas.microsoft.com/office/drawing/2014/main" id="{1CB7020A-1FAA-B64C-8706-BBA67DCEC25E}"/>
+              </a:ext>
+            </a:extLst>
+          </p:cNvPr>
+          <p:cNvGrpSpPr/>
+          <p:nvPr/>
+        </p:nvGrpSpPr>
+        <p:grpSpPr>
+          <a:xfrm>
+            <a:off x="7804601" y="2532862"/>
+            <a:ext cx="476607" cy="377945"/>
+            <a:chOff x="6247282" y="2333992"/>
+            <a:chExt cx="365810" cy="290084"/>
+          </a:xfrm>
+        </p:grpSpPr>
+        <p:sp>
+          <p:nvSpPr>
+            <p:cNvPr id="522" name="Rectangle 521">
+              <a:extLst>
+                <a:ext uri="{FF2B5EF4-FFF2-40B4-BE49-F238E27FC236}">
+                  <a16:creationId xmlns:a16="http://schemas.microsoft.com/office/drawing/2014/main" id="{77099642-9E07-3845-A3FD-50B8AFF20C47}"/>
+                </a:ext>
+              </a:extLst>
+            </p:cNvPr>
+            <p:cNvSpPr/>
+            <p:nvPr/>
+          </p:nvSpPr>
+          <p:spPr>
+            <a:xfrm>
+              <a:off x="6247282" y="2333992"/>
+              <a:ext cx="365810" cy="290084"/>
+            </a:xfrm>
+            <a:prstGeom prst="rect">
+              <a:avLst/>
+            </a:prstGeom>
+            <a:solidFill>
+              <a:schemeClr val="bg1"/>
+            </a:solidFill>
+            <a:ln>
+              <a:noFill/>
+            </a:ln>
+          </p:spPr>
+          <p:style>
+            <a:lnRef idx="2">
+              <a:schemeClr val="accent1">
+                <a:shade val="50000"/>
+              </a:schemeClr>
+            </a:lnRef>
+            <a:fillRef idx="1">
+              <a:schemeClr val="accent1"/>
+            </a:fillRef>
+            <a:effectRef idx="0">
+              <a:schemeClr val="accent1"/>
+            </a:effectRef>
+            <a:fontRef idx="minor">
+              <a:schemeClr val="lt1"/>
+            </a:fontRef>
+          </p:style>
+          <p:txBody>
+            <a:bodyPr rtlCol="0" anchor="ctr"/>
+            <a:lstStyle/>
+            <a:p>
+              <a:pPr algn="ctr"/>
+              <a:endParaRPr lang="en-US"/>
+            </a:p>
+          </p:txBody>
+        </p:sp>
+        <p:grpSp>
+          <p:nvGrpSpPr>
+            <p:cNvPr id="523" name="Group 522">
+              <a:extLst>
+                <a:ext uri="{FF2B5EF4-FFF2-40B4-BE49-F238E27FC236}">
+                  <a16:creationId xmlns:a16="http://schemas.microsoft.com/office/drawing/2014/main" id="{FF3A8C10-DD59-7A49-9C58-FB2789A95AE1}"/>
+                </a:ext>
+              </a:extLst>
+            </p:cNvPr>
+            <p:cNvGrpSpPr/>
+            <p:nvPr/>
+          </p:nvGrpSpPr>
+          <p:grpSpPr>
+            <a:xfrm>
+              <a:off x="6248724" y="2363625"/>
+              <a:ext cx="349221" cy="223307"/>
+              <a:chOff x="5770832" y="1560161"/>
+              <a:chExt cx="346385" cy="181525"/>
+            </a:xfrm>
+          </p:grpSpPr>
+          <p:sp>
+            <p:nvSpPr>
+              <p:cNvPr id="524" name="Rectangle 523">
+                <a:extLst>
+                  <a:ext uri="{FF2B5EF4-FFF2-40B4-BE49-F238E27FC236}">
+                    <a16:creationId xmlns:a16="http://schemas.microsoft.com/office/drawing/2014/main" id="{C558A689-1877-2740-AF81-D458D9181600}"/>
+                  </a:ext>
+                </a:extLst>
+              </p:cNvPr>
+              <p:cNvSpPr/>
+              <p:nvPr/>
+            </p:nvSpPr>
+            <p:spPr>
+              <a:xfrm>
+                <a:off x="5803713" y="1560161"/>
+                <a:ext cx="67891" cy="177982"/>
+              </a:xfrm>
+              <a:prstGeom prst="rect">
+                <a:avLst/>
+              </a:prstGeom>
+              <a:solidFill>
+                <a:schemeClr val="tx1"/>
+              </a:solidFill>
+              <a:ln w="19050">
+                <a:solidFill>
+                  <a:schemeClr val="tx1"/>
+                </a:solidFill>
+              </a:ln>
+            </p:spPr>
+            <p:style>
+              <a:lnRef idx="2">
+                <a:schemeClr val="accent1">
+                  <a:shade val="50000"/>
+                </a:schemeClr>
+              </a:lnRef>
+              <a:fillRef idx="1">
+                <a:schemeClr val="accent1"/>
+              </a:fillRef>
+              <a:effectRef idx="0">
+                <a:schemeClr val="accent1"/>
+              </a:effectRef>
+              <a:fontRef idx="minor">
+                <a:schemeClr val="lt1"/>
+              </a:fontRef>
+            </p:style>
+            <p:txBody>
+              <a:bodyPr rtlCol="0" anchor="ctr"/>
+              <a:lstStyle/>
+              <a:p>
+                <a:pPr algn="ctr"/>
+                <a:endParaRPr lang="en-US"/>
+              </a:p>
+            </p:txBody>
+          </p:sp>
+          <p:sp>
+            <p:nvSpPr>
+              <p:cNvPr id="525" name="Rectangle 524">
+                <a:extLst>
+                  <a:ext uri="{FF2B5EF4-FFF2-40B4-BE49-F238E27FC236}">
+                    <a16:creationId xmlns:a16="http://schemas.microsoft.com/office/drawing/2014/main" id="{D26070EF-0FDE-1441-8A26-BA27CFD96D65}"/>
+                  </a:ext>
+                </a:extLst>
+              </p:cNvPr>
+              <p:cNvSpPr/>
+              <p:nvPr/>
+            </p:nvSpPr>
+            <p:spPr>
+              <a:xfrm>
+                <a:off x="5905943" y="1597910"/>
+                <a:ext cx="74277" cy="140234"/>
+              </a:xfrm>
+              <a:prstGeom prst="rect">
+                <a:avLst/>
+              </a:prstGeom>
+              <a:solidFill>
+                <a:schemeClr val="tx1"/>
+              </a:solidFill>
+              <a:ln w="19050">
+                <a:solidFill>
+                  <a:schemeClr val="tx1"/>
+                </a:solidFill>
+              </a:ln>
+            </p:spPr>
+            <p:style>
+              <a:lnRef idx="2">
+                <a:schemeClr val="accent1">
+                  <a:shade val="50000"/>
+                </a:schemeClr>
+              </a:lnRef>
+              <a:fillRef idx="1">
+                <a:schemeClr val="accent1"/>
+              </a:fillRef>
+              <a:effectRef idx="0">
+                <a:schemeClr val="accent1"/>
+              </a:effectRef>
+              <a:fontRef idx="minor">
+                <a:schemeClr val="lt1"/>
+              </a:fontRef>
+            </p:style>
+            <p:txBody>
+              <a:bodyPr rtlCol="0" anchor="ctr"/>
+              <a:lstStyle/>
+              <a:p>
+                <a:pPr algn="ctr"/>
+                <a:endParaRPr lang="en-US"/>
+              </a:p>
+            </p:txBody>
+          </p:sp>
+          <p:sp>
+            <p:nvSpPr>
+              <p:cNvPr id="527" name="Rectangle 526">
+                <a:extLst>
+                  <a:ext uri="{FF2B5EF4-FFF2-40B4-BE49-F238E27FC236}">
+                    <a16:creationId xmlns:a16="http://schemas.microsoft.com/office/drawing/2014/main" id="{9396C55C-EA51-5F46-AA51-F65640C6C25A}"/>
+                  </a:ext>
+                </a:extLst>
+              </p:cNvPr>
+              <p:cNvSpPr/>
+              <p:nvPr/>
+            </p:nvSpPr>
+            <p:spPr>
+              <a:xfrm>
+                <a:off x="6008601" y="1660525"/>
+                <a:ext cx="79854" cy="76204"/>
+              </a:xfrm>
+              <a:prstGeom prst="rect">
+                <a:avLst/>
+              </a:prstGeom>
+              <a:solidFill>
+                <a:schemeClr val="tx1"/>
+              </a:solidFill>
+              <a:ln w="19050">
+                <a:solidFill>
+                  <a:schemeClr val="tx1"/>
+                </a:solidFill>
+              </a:ln>
+            </p:spPr>
+            <p:style>
+              <a:lnRef idx="2">
+                <a:schemeClr val="accent1">
+                  <a:shade val="50000"/>
+                </a:schemeClr>
+              </a:lnRef>
+              <a:fillRef idx="1">
+                <a:schemeClr val="accent1"/>
+              </a:fillRef>
+              <a:effectRef idx="0">
+                <a:schemeClr val="accent1"/>
+              </a:effectRef>
+              <a:fontRef idx="minor">
+                <a:schemeClr val="lt1"/>
+              </a:fontRef>
+            </p:style>
+            <p:txBody>
+              <a:bodyPr rtlCol="0" anchor="ctr"/>
+              <a:lstStyle/>
+              <a:p>
+                <a:pPr algn="ctr"/>
+                <a:endParaRPr lang="en-US"/>
+              </a:p>
+            </p:txBody>
+          </p:sp>
+          <p:sp>
+            <p:nvSpPr>
+              <p:cNvPr id="529" name="Rectangle 528">
+                <a:extLst>
+                  <a:ext uri="{FF2B5EF4-FFF2-40B4-BE49-F238E27FC236}">
+                    <a16:creationId xmlns:a16="http://schemas.microsoft.com/office/drawing/2014/main" id="{C8016662-117A-DE4F-93EB-996EF1F09AAF}"/>
+                  </a:ext>
+                </a:extLst>
+              </p:cNvPr>
+              <p:cNvSpPr/>
+              <p:nvPr/>
+            </p:nvSpPr>
+            <p:spPr>
+              <a:xfrm>
+                <a:off x="5770832" y="1728903"/>
+                <a:ext cx="346385" cy="12783"/>
+              </a:xfrm>
+              <a:prstGeom prst="rect">
+                <a:avLst/>
+              </a:prstGeom>
+              <a:solidFill>
+                <a:schemeClr val="tx1"/>
+              </a:solidFill>
+              <a:ln w="19050">
+                <a:solidFill>
+                  <a:schemeClr val="tx1"/>
+                </a:solidFill>
+              </a:ln>
+            </p:spPr>
+            <p:style>
+              <a:lnRef idx="2">
+                <a:schemeClr val="accent1">
+                  <a:shade val="50000"/>
+                </a:schemeClr>
+              </a:lnRef>
+              <a:fillRef idx="1">
+                <a:schemeClr val="accent1"/>
+              </a:fillRef>
+              <a:effectRef idx="0">
+                <a:schemeClr val="accent1"/>
+              </a:effectRef>
+              <a:fontRef idx="minor">
+                <a:schemeClr val="lt1"/>
+              </a:fontRef>
+            </p:style>
+            <p:txBody>
+              <a:bodyPr rtlCol="0" anchor="ctr"/>
+              <a:lstStyle/>
+              <a:p>
+                <a:pPr algn="ctr"/>
+                <a:endParaRPr lang="en-US"/>
+              </a:p>
+            </p:txBody>
+          </p:sp>
+        </p:grpSp>
+      </p:grpSp>
     </p:spTree>
     <p:extLst>
       <p:ext uri="{BB962C8B-B14F-4D97-AF65-F5344CB8AC3E}">

--- a/logos/logos.pptx
+++ b/logos/logos.pptx
@@ -261,7 +261,7 @@
           <a:p>
             <a:fld id="{16F93EB0-79FE-3A48-9677-781C433206CF}" type="datetimeFigureOut">
               <a:rPr lang="en-US" smtClean="0"/>
-              <a:t>8/28/21</a:t>
+              <a:t>8/30/21</a:t>
             </a:fld>
             <a:endParaRPr lang="en-US"/>
           </a:p>
@@ -461,7 +461,7 @@
           <a:p>
             <a:fld id="{16F93EB0-79FE-3A48-9677-781C433206CF}" type="datetimeFigureOut">
               <a:rPr lang="en-US" smtClean="0"/>
-              <a:t>8/28/21</a:t>
+              <a:t>8/30/21</a:t>
             </a:fld>
             <a:endParaRPr lang="en-US"/>
           </a:p>
@@ -671,7 +671,7 @@
           <a:p>
             <a:fld id="{16F93EB0-79FE-3A48-9677-781C433206CF}" type="datetimeFigureOut">
               <a:rPr lang="en-US" smtClean="0"/>
-              <a:t>8/28/21</a:t>
+              <a:t>8/30/21</a:t>
             </a:fld>
             <a:endParaRPr lang="en-US"/>
           </a:p>
@@ -871,7 +871,7 @@
           <a:p>
             <a:fld id="{16F93EB0-79FE-3A48-9677-781C433206CF}" type="datetimeFigureOut">
               <a:rPr lang="en-US" smtClean="0"/>
-              <a:t>8/28/21</a:t>
+              <a:t>8/30/21</a:t>
             </a:fld>
             <a:endParaRPr lang="en-US"/>
           </a:p>
@@ -1147,7 +1147,7 @@
           <a:p>
             <a:fld id="{16F93EB0-79FE-3A48-9677-781C433206CF}" type="datetimeFigureOut">
               <a:rPr lang="en-US" smtClean="0"/>
-              <a:t>8/28/21</a:t>
+              <a:t>8/30/21</a:t>
             </a:fld>
             <a:endParaRPr lang="en-US"/>
           </a:p>
@@ -1415,7 +1415,7 @@
           <a:p>
             <a:fld id="{16F93EB0-79FE-3A48-9677-781C433206CF}" type="datetimeFigureOut">
               <a:rPr lang="en-US" smtClean="0"/>
-              <a:t>8/28/21</a:t>
+              <a:t>8/30/21</a:t>
             </a:fld>
             <a:endParaRPr lang="en-US"/>
           </a:p>
@@ -1830,7 +1830,7 @@
           <a:p>
             <a:fld id="{16F93EB0-79FE-3A48-9677-781C433206CF}" type="datetimeFigureOut">
               <a:rPr lang="en-US" smtClean="0"/>
-              <a:t>8/28/21</a:t>
+              <a:t>8/30/21</a:t>
             </a:fld>
             <a:endParaRPr lang="en-US"/>
           </a:p>
@@ -1972,7 +1972,7 @@
           <a:p>
             <a:fld id="{16F93EB0-79FE-3A48-9677-781C433206CF}" type="datetimeFigureOut">
               <a:rPr lang="en-US" smtClean="0"/>
-              <a:t>8/28/21</a:t>
+              <a:t>8/30/21</a:t>
             </a:fld>
             <a:endParaRPr lang="en-US"/>
           </a:p>
@@ -2085,7 +2085,7 @@
           <a:p>
             <a:fld id="{16F93EB0-79FE-3A48-9677-781C433206CF}" type="datetimeFigureOut">
               <a:rPr lang="en-US" smtClean="0"/>
-              <a:t>8/28/21</a:t>
+              <a:t>8/30/21</a:t>
             </a:fld>
             <a:endParaRPr lang="en-US"/>
           </a:p>
@@ -2398,7 +2398,7 @@
           <a:p>
             <a:fld id="{16F93EB0-79FE-3A48-9677-781C433206CF}" type="datetimeFigureOut">
               <a:rPr lang="en-US" smtClean="0"/>
-              <a:t>8/28/21</a:t>
+              <a:t>8/30/21</a:t>
             </a:fld>
             <a:endParaRPr lang="en-US"/>
           </a:p>
@@ -2687,7 +2687,7 @@
           <a:p>
             <a:fld id="{16F93EB0-79FE-3A48-9677-781C433206CF}" type="datetimeFigureOut">
               <a:rPr lang="en-US" smtClean="0"/>
-              <a:t>8/28/21</a:t>
+              <a:t>8/30/21</a:t>
             </a:fld>
             <a:endParaRPr lang="en-US"/>
           </a:p>
@@ -2930,7 +2930,7 @@
           <a:p>
             <a:fld id="{16F93EB0-79FE-3A48-9677-781C433206CF}" type="datetimeFigureOut">
               <a:rPr lang="en-US" smtClean="0"/>
-              <a:t>8/28/21</a:t>
+              <a:t>8/30/21</a:t>
             </a:fld>
             <a:endParaRPr lang="en-US"/>
           </a:p>
@@ -27446,6 +27446,733 @@
           </p:sp>
         </p:grpSp>
       </p:grpSp>
+      <p:grpSp>
+        <p:nvGrpSpPr>
+          <p:cNvPr id="531" name="Group 530">
+            <a:extLst>
+              <a:ext uri="{FF2B5EF4-FFF2-40B4-BE49-F238E27FC236}">
+                <a16:creationId xmlns:a16="http://schemas.microsoft.com/office/drawing/2014/main" id="{BBFD4A86-F8BB-214A-A146-7FEC120C801E}"/>
+              </a:ext>
+            </a:extLst>
+          </p:cNvPr>
+          <p:cNvGrpSpPr/>
+          <p:nvPr/>
+        </p:nvGrpSpPr>
+        <p:grpSpPr>
+          <a:xfrm>
+            <a:off x="9687460" y="3296976"/>
+            <a:ext cx="1322836" cy="1495710"/>
+            <a:chOff x="9818170" y="3088909"/>
+            <a:chExt cx="670592" cy="758227"/>
+          </a:xfrm>
+        </p:grpSpPr>
+        <p:sp>
+          <p:nvSpPr>
+            <p:cNvPr id="535" name="Terminator 534">
+              <a:extLst>
+                <a:ext uri="{FF2B5EF4-FFF2-40B4-BE49-F238E27FC236}">
+                  <a16:creationId xmlns:a16="http://schemas.microsoft.com/office/drawing/2014/main" id="{A5DB144E-E77B-F447-B0F0-43FFD899C04D}"/>
+                </a:ext>
+              </a:extLst>
+            </p:cNvPr>
+            <p:cNvSpPr/>
+            <p:nvPr/>
+          </p:nvSpPr>
+          <p:spPr>
+            <a:xfrm rot="17063310">
+              <a:off x="9666442" y="3545945"/>
+              <a:ext cx="452919" cy="149463"/>
+            </a:xfrm>
+            <a:prstGeom prst="flowChartTerminator">
+              <a:avLst/>
+            </a:prstGeom>
+            <a:solidFill>
+              <a:schemeClr val="tx1"/>
+            </a:solidFill>
+            <a:ln w="28575">
+              <a:solidFill>
+                <a:schemeClr val="bg1"/>
+              </a:solidFill>
+            </a:ln>
+          </p:spPr>
+          <p:style>
+            <a:lnRef idx="2">
+              <a:schemeClr val="accent1">
+                <a:shade val="50000"/>
+              </a:schemeClr>
+            </a:lnRef>
+            <a:fillRef idx="1">
+              <a:schemeClr val="accent1"/>
+            </a:fillRef>
+            <a:effectRef idx="0">
+              <a:schemeClr val="accent1"/>
+            </a:effectRef>
+            <a:fontRef idx="minor">
+              <a:schemeClr val="lt1"/>
+            </a:fontRef>
+          </p:style>
+          <p:txBody>
+            <a:bodyPr rtlCol="0" anchor="ctr"/>
+            <a:lstStyle/>
+            <a:p>
+              <a:pPr algn="ctr"/>
+              <a:endParaRPr lang="en-US"/>
+            </a:p>
+          </p:txBody>
+        </p:sp>
+        <p:sp>
+          <p:nvSpPr>
+            <p:cNvPr id="540" name="Terminator 539">
+              <a:extLst>
+                <a:ext uri="{FF2B5EF4-FFF2-40B4-BE49-F238E27FC236}">
+                  <a16:creationId xmlns:a16="http://schemas.microsoft.com/office/drawing/2014/main" id="{786AC2C6-591B-3241-B0CA-5D66AA67805F}"/>
+                </a:ext>
+              </a:extLst>
+            </p:cNvPr>
+            <p:cNvSpPr/>
+            <p:nvPr/>
+          </p:nvSpPr>
+          <p:spPr>
+            <a:xfrm rot="3683302">
+              <a:off x="10187571" y="3543492"/>
+              <a:ext cx="452919" cy="149463"/>
+            </a:xfrm>
+            <a:prstGeom prst="flowChartTerminator">
+              <a:avLst/>
+            </a:prstGeom>
+            <a:solidFill>
+              <a:schemeClr val="tx1"/>
+            </a:solidFill>
+            <a:ln w="28575">
+              <a:solidFill>
+                <a:schemeClr val="bg1"/>
+              </a:solidFill>
+            </a:ln>
+          </p:spPr>
+          <p:style>
+            <a:lnRef idx="2">
+              <a:schemeClr val="accent1">
+                <a:shade val="50000"/>
+              </a:schemeClr>
+            </a:lnRef>
+            <a:fillRef idx="1">
+              <a:schemeClr val="accent1"/>
+            </a:fillRef>
+            <a:effectRef idx="0">
+              <a:schemeClr val="accent1"/>
+            </a:effectRef>
+            <a:fontRef idx="minor">
+              <a:schemeClr val="lt1"/>
+            </a:fontRef>
+          </p:style>
+          <p:txBody>
+            <a:bodyPr rtlCol="0" anchor="ctr"/>
+            <a:lstStyle/>
+            <a:p>
+              <a:pPr algn="ctr"/>
+              <a:endParaRPr lang="en-US"/>
+            </a:p>
+          </p:txBody>
+        </p:sp>
+        <p:sp>
+          <p:nvSpPr>
+            <p:cNvPr id="541" name="Delay 540">
+              <a:extLst>
+                <a:ext uri="{FF2B5EF4-FFF2-40B4-BE49-F238E27FC236}">
+                  <a16:creationId xmlns:a16="http://schemas.microsoft.com/office/drawing/2014/main" id="{37D2DA66-A24E-E240-8C20-833386F126EC}"/>
+                </a:ext>
+              </a:extLst>
+            </p:cNvPr>
+            <p:cNvSpPr/>
+            <p:nvPr/>
+          </p:nvSpPr>
+          <p:spPr>
+            <a:xfrm rot="16200000">
+              <a:off x="9886099" y="3369205"/>
+              <a:ext cx="514626" cy="406636"/>
+            </a:xfrm>
+            <a:prstGeom prst="flowChartDelay">
+              <a:avLst/>
+            </a:prstGeom>
+            <a:solidFill>
+              <a:schemeClr val="tx1"/>
+            </a:solidFill>
+            <a:ln w="38100">
+              <a:solidFill>
+                <a:schemeClr val="bg1"/>
+              </a:solidFill>
+            </a:ln>
+          </p:spPr>
+          <p:style>
+            <a:lnRef idx="2">
+              <a:schemeClr val="accent1">
+                <a:shade val="50000"/>
+              </a:schemeClr>
+            </a:lnRef>
+            <a:fillRef idx="1">
+              <a:schemeClr val="accent1"/>
+            </a:fillRef>
+            <a:effectRef idx="0">
+              <a:schemeClr val="accent1"/>
+            </a:effectRef>
+            <a:fontRef idx="minor">
+              <a:schemeClr val="lt1"/>
+            </a:fontRef>
+          </p:style>
+          <p:txBody>
+            <a:bodyPr rtlCol="0" anchor="ctr"/>
+            <a:lstStyle/>
+            <a:p>
+              <a:pPr algn="ctr"/>
+              <a:endParaRPr lang="en-US" dirty="0"/>
+            </a:p>
+          </p:txBody>
+        </p:sp>
+        <p:sp>
+          <p:nvSpPr>
+            <p:cNvPr id="542" name="Oval 541">
+              <a:extLst>
+                <a:ext uri="{FF2B5EF4-FFF2-40B4-BE49-F238E27FC236}">
+                  <a16:creationId xmlns:a16="http://schemas.microsoft.com/office/drawing/2014/main" id="{5253E6BA-99DC-A44F-8EE8-8703B01A5D82}"/>
+                </a:ext>
+              </a:extLst>
+            </p:cNvPr>
+            <p:cNvSpPr/>
+            <p:nvPr/>
+          </p:nvSpPr>
+          <p:spPr>
+            <a:xfrm>
+              <a:off x="9986505" y="3088909"/>
+              <a:ext cx="316756" cy="316756"/>
+            </a:xfrm>
+            <a:prstGeom prst="ellipse">
+              <a:avLst/>
+            </a:prstGeom>
+            <a:solidFill>
+              <a:schemeClr val="tx1"/>
+            </a:solidFill>
+            <a:ln w="38100">
+              <a:solidFill>
+                <a:schemeClr val="bg1"/>
+              </a:solidFill>
+            </a:ln>
+          </p:spPr>
+          <p:style>
+            <a:lnRef idx="2">
+              <a:schemeClr val="accent1">
+                <a:shade val="50000"/>
+              </a:schemeClr>
+            </a:lnRef>
+            <a:fillRef idx="1">
+              <a:schemeClr val="accent1"/>
+            </a:fillRef>
+            <a:effectRef idx="0">
+              <a:schemeClr val="accent1"/>
+            </a:effectRef>
+            <a:fontRef idx="minor">
+              <a:schemeClr val="lt1"/>
+            </a:fontRef>
+          </p:style>
+          <p:txBody>
+            <a:bodyPr rtlCol="0" anchor="ctr"/>
+            <a:lstStyle/>
+            <a:p>
+              <a:pPr algn="ctr"/>
+              <a:endParaRPr lang="en-US"/>
+            </a:p>
+          </p:txBody>
+        </p:sp>
+      </p:grpSp>
+      <p:sp>
+        <p:nvSpPr>
+          <p:cNvPr id="4" name="Moon 3">
+            <a:extLst>
+              <a:ext uri="{FF2B5EF4-FFF2-40B4-BE49-F238E27FC236}">
+                <a16:creationId xmlns:a16="http://schemas.microsoft.com/office/drawing/2014/main" id="{ED463851-C602-7942-826F-6E7959971A51}"/>
+              </a:ext>
+            </a:extLst>
+          </p:cNvPr>
+          <p:cNvSpPr/>
+          <p:nvPr/>
+        </p:nvSpPr>
+        <p:spPr>
+          <a:xfrm rot="5400000" flipV="1">
+            <a:off x="10517324" y="3331487"/>
+            <a:ext cx="188413" cy="544289"/>
+          </a:xfrm>
+          <a:custGeom>
+            <a:avLst/>
+            <a:gdLst>
+              <a:gd name="connsiteX0" fmla="*/ 400181 w 400181"/>
+              <a:gd name="connsiteY0" fmla="*/ 800362 h 800362"/>
+              <a:gd name="connsiteX1" fmla="*/ 0 w 400181"/>
+              <a:gd name="connsiteY1" fmla="*/ 400181 h 800362"/>
+              <a:gd name="connsiteX2" fmla="*/ 400181 w 400181"/>
+              <a:gd name="connsiteY2" fmla="*/ 0 h 800362"/>
+              <a:gd name="connsiteX3" fmla="*/ 200091 w 400181"/>
+              <a:gd name="connsiteY3" fmla="*/ 400181 h 800362"/>
+              <a:gd name="connsiteX4" fmla="*/ 400181 w 400181"/>
+              <a:gd name="connsiteY4" fmla="*/ 800362 h 800362"/>
+              <a:gd name="connsiteX0" fmla="*/ 400181 w 555995"/>
+              <a:gd name="connsiteY0" fmla="*/ 800362 h 800362"/>
+              <a:gd name="connsiteX1" fmla="*/ 0 w 555995"/>
+              <a:gd name="connsiteY1" fmla="*/ 400181 h 800362"/>
+              <a:gd name="connsiteX2" fmla="*/ 400181 w 555995"/>
+              <a:gd name="connsiteY2" fmla="*/ 0 h 800362"/>
+              <a:gd name="connsiteX3" fmla="*/ 555995 w 555995"/>
+              <a:gd name="connsiteY3" fmla="*/ 383755 h 800362"/>
+              <a:gd name="connsiteX4" fmla="*/ 400181 w 555995"/>
+              <a:gd name="connsiteY4" fmla="*/ 800362 h 800362"/>
+              <a:gd name="connsiteX0" fmla="*/ 137872 w 293686"/>
+              <a:gd name="connsiteY0" fmla="*/ 800362 h 800362"/>
+              <a:gd name="connsiteX1" fmla="*/ 27890 w 293686"/>
+              <a:gd name="connsiteY1" fmla="*/ 405656 h 800362"/>
+              <a:gd name="connsiteX2" fmla="*/ 137872 w 293686"/>
+              <a:gd name="connsiteY2" fmla="*/ 0 h 800362"/>
+              <a:gd name="connsiteX3" fmla="*/ 293686 w 293686"/>
+              <a:gd name="connsiteY3" fmla="*/ 383755 h 800362"/>
+              <a:gd name="connsiteX4" fmla="*/ 137872 w 293686"/>
+              <a:gd name="connsiteY4" fmla="*/ 800362 h 800362"/>
+              <a:gd name="connsiteX0" fmla="*/ 137872 w 293686"/>
+              <a:gd name="connsiteY0" fmla="*/ 800362 h 800362"/>
+              <a:gd name="connsiteX1" fmla="*/ 27890 w 293686"/>
+              <a:gd name="connsiteY1" fmla="*/ 405656 h 800362"/>
+              <a:gd name="connsiteX2" fmla="*/ 137872 w 293686"/>
+              <a:gd name="connsiteY2" fmla="*/ 0 h 800362"/>
+              <a:gd name="connsiteX3" fmla="*/ 293686 w 293686"/>
+              <a:gd name="connsiteY3" fmla="*/ 383755 h 800362"/>
+              <a:gd name="connsiteX4" fmla="*/ 137872 w 293686"/>
+              <a:gd name="connsiteY4" fmla="*/ 800362 h 800362"/>
+              <a:gd name="connsiteX0" fmla="*/ 137872 w 293686"/>
+              <a:gd name="connsiteY0" fmla="*/ 800362 h 800362"/>
+              <a:gd name="connsiteX1" fmla="*/ 27890 w 293686"/>
+              <a:gd name="connsiteY1" fmla="*/ 405656 h 800362"/>
+              <a:gd name="connsiteX2" fmla="*/ 137872 w 293686"/>
+              <a:gd name="connsiteY2" fmla="*/ 0 h 800362"/>
+              <a:gd name="connsiteX3" fmla="*/ 293686 w 293686"/>
+              <a:gd name="connsiteY3" fmla="*/ 383755 h 800362"/>
+              <a:gd name="connsiteX4" fmla="*/ 137872 w 293686"/>
+              <a:gd name="connsiteY4" fmla="*/ 800362 h 800362"/>
+              <a:gd name="connsiteX0" fmla="*/ 137872 w 293686"/>
+              <a:gd name="connsiteY0" fmla="*/ 800362 h 800362"/>
+              <a:gd name="connsiteX1" fmla="*/ 27890 w 293686"/>
+              <a:gd name="connsiteY1" fmla="*/ 405656 h 800362"/>
+              <a:gd name="connsiteX2" fmla="*/ 137872 w 293686"/>
+              <a:gd name="connsiteY2" fmla="*/ 0 h 800362"/>
+              <a:gd name="connsiteX3" fmla="*/ 293686 w 293686"/>
+              <a:gd name="connsiteY3" fmla="*/ 383755 h 800362"/>
+              <a:gd name="connsiteX4" fmla="*/ 137872 w 293686"/>
+              <a:gd name="connsiteY4" fmla="*/ 800362 h 800362"/>
+              <a:gd name="connsiteX0" fmla="*/ 111565 w 267379"/>
+              <a:gd name="connsiteY0" fmla="*/ 800362 h 800362"/>
+              <a:gd name="connsiteX1" fmla="*/ 1583 w 267379"/>
+              <a:gd name="connsiteY1" fmla="*/ 405656 h 800362"/>
+              <a:gd name="connsiteX2" fmla="*/ 111565 w 267379"/>
+              <a:gd name="connsiteY2" fmla="*/ 0 h 800362"/>
+              <a:gd name="connsiteX3" fmla="*/ 267379 w 267379"/>
+              <a:gd name="connsiteY3" fmla="*/ 383755 h 800362"/>
+              <a:gd name="connsiteX4" fmla="*/ 111565 w 267379"/>
+              <a:gd name="connsiteY4" fmla="*/ 800362 h 800362"/>
+              <a:gd name="connsiteX0" fmla="*/ 121242 w 277056"/>
+              <a:gd name="connsiteY0" fmla="*/ 800362 h 800362"/>
+              <a:gd name="connsiteX1" fmla="*/ 309 w 277056"/>
+              <a:gd name="connsiteY1" fmla="*/ 427558 h 800362"/>
+              <a:gd name="connsiteX2" fmla="*/ 121242 w 277056"/>
+              <a:gd name="connsiteY2" fmla="*/ 0 h 800362"/>
+              <a:gd name="connsiteX3" fmla="*/ 277056 w 277056"/>
+              <a:gd name="connsiteY3" fmla="*/ 383755 h 800362"/>
+              <a:gd name="connsiteX4" fmla="*/ 121242 w 277056"/>
+              <a:gd name="connsiteY4" fmla="*/ 800362 h 800362"/>
+              <a:gd name="connsiteX0" fmla="*/ 121242 w 277056"/>
+              <a:gd name="connsiteY0" fmla="*/ 800362 h 800362"/>
+              <a:gd name="connsiteX1" fmla="*/ 309 w 277056"/>
+              <a:gd name="connsiteY1" fmla="*/ 427558 h 800362"/>
+              <a:gd name="connsiteX2" fmla="*/ 121242 w 277056"/>
+              <a:gd name="connsiteY2" fmla="*/ 0 h 800362"/>
+              <a:gd name="connsiteX3" fmla="*/ 277056 w 277056"/>
+              <a:gd name="connsiteY3" fmla="*/ 389231 h 800362"/>
+              <a:gd name="connsiteX4" fmla="*/ 121242 w 277056"/>
+              <a:gd name="connsiteY4" fmla="*/ 800362 h 800362"/>
+            </a:gdLst>
+            <a:ahLst/>
+            <a:cxnLst>
+              <a:cxn ang="0">
+                <a:pos x="connsiteX0" y="connsiteY0"/>
+              </a:cxn>
+              <a:cxn ang="0">
+                <a:pos x="connsiteX1" y="connsiteY1"/>
+              </a:cxn>
+              <a:cxn ang="0">
+                <a:pos x="connsiteX2" y="connsiteY2"/>
+              </a:cxn>
+              <a:cxn ang="0">
+                <a:pos x="connsiteX3" y="connsiteY3"/>
+              </a:cxn>
+              <a:cxn ang="0">
+                <a:pos x="connsiteX4" y="connsiteY4"/>
+              </a:cxn>
+            </a:cxnLst>
+            <a:rect l="l" t="t" r="r" b="b"/>
+            <a:pathLst>
+              <a:path w="277056" h="800362">
+                <a:moveTo>
+                  <a:pt x="121242" y="800362"/>
+                </a:moveTo>
+                <a:cubicBezTo>
+                  <a:pt x="48065" y="647050"/>
+                  <a:pt x="309" y="648572"/>
+                  <a:pt x="309" y="427558"/>
+                </a:cubicBezTo>
+                <a:cubicBezTo>
+                  <a:pt x="309" y="206544"/>
+                  <a:pt x="-12165" y="120460"/>
+                  <a:pt x="121242" y="0"/>
+                </a:cubicBezTo>
+                <a:cubicBezTo>
+                  <a:pt x="186923" y="50666"/>
+                  <a:pt x="277056" y="231781"/>
+                  <a:pt x="277056" y="389231"/>
+                </a:cubicBezTo>
+                <a:cubicBezTo>
+                  <a:pt x="277056" y="546681"/>
+                  <a:pt x="192400" y="585432"/>
+                  <a:pt x="121242" y="800362"/>
+                </a:cubicBezTo>
+                <a:close/>
+              </a:path>
+            </a:pathLst>
+          </a:custGeom>
+          <a:solidFill>
+            <a:schemeClr val="bg1"/>
+          </a:solidFill>
+          <a:ln w="57150">
+            <a:solidFill>
+              <a:schemeClr val="tx1"/>
+            </a:solidFill>
+          </a:ln>
+        </p:spPr>
+        <p:style>
+          <a:lnRef idx="2">
+            <a:schemeClr val="accent1">
+              <a:shade val="50000"/>
+            </a:schemeClr>
+          </a:lnRef>
+          <a:fillRef idx="1">
+            <a:schemeClr val="accent1"/>
+          </a:fillRef>
+          <a:effectRef idx="0">
+            <a:schemeClr val="accent1"/>
+          </a:effectRef>
+          <a:fontRef idx="minor">
+            <a:schemeClr val="lt1"/>
+          </a:fontRef>
+        </p:style>
+        <p:txBody>
+          <a:bodyPr rtlCol="0" anchor="ctr"/>
+          <a:lstStyle/>
+          <a:p>
+            <a:pPr algn="ctr"/>
+            <a:endParaRPr lang="en-US"/>
+          </a:p>
+        </p:txBody>
+      </p:sp>
+      <p:sp>
+        <p:nvSpPr>
+          <p:cNvPr id="543" name="Moon 3">
+            <a:extLst>
+              <a:ext uri="{FF2B5EF4-FFF2-40B4-BE49-F238E27FC236}">
+                <a16:creationId xmlns:a16="http://schemas.microsoft.com/office/drawing/2014/main" id="{0F282097-2EC0-054F-8D3A-36981066700D}"/>
+              </a:ext>
+            </a:extLst>
+          </p:cNvPr>
+          <p:cNvSpPr/>
+          <p:nvPr/>
+        </p:nvSpPr>
+        <p:spPr>
+          <a:xfrm rot="16200000" flipH="1" flipV="1">
+            <a:off x="9980810" y="3331487"/>
+            <a:ext cx="188413" cy="544289"/>
+          </a:xfrm>
+          <a:custGeom>
+            <a:avLst/>
+            <a:gdLst>
+              <a:gd name="connsiteX0" fmla="*/ 400181 w 400181"/>
+              <a:gd name="connsiteY0" fmla="*/ 800362 h 800362"/>
+              <a:gd name="connsiteX1" fmla="*/ 0 w 400181"/>
+              <a:gd name="connsiteY1" fmla="*/ 400181 h 800362"/>
+              <a:gd name="connsiteX2" fmla="*/ 400181 w 400181"/>
+              <a:gd name="connsiteY2" fmla="*/ 0 h 800362"/>
+              <a:gd name="connsiteX3" fmla="*/ 200091 w 400181"/>
+              <a:gd name="connsiteY3" fmla="*/ 400181 h 800362"/>
+              <a:gd name="connsiteX4" fmla="*/ 400181 w 400181"/>
+              <a:gd name="connsiteY4" fmla="*/ 800362 h 800362"/>
+              <a:gd name="connsiteX0" fmla="*/ 400181 w 555995"/>
+              <a:gd name="connsiteY0" fmla="*/ 800362 h 800362"/>
+              <a:gd name="connsiteX1" fmla="*/ 0 w 555995"/>
+              <a:gd name="connsiteY1" fmla="*/ 400181 h 800362"/>
+              <a:gd name="connsiteX2" fmla="*/ 400181 w 555995"/>
+              <a:gd name="connsiteY2" fmla="*/ 0 h 800362"/>
+              <a:gd name="connsiteX3" fmla="*/ 555995 w 555995"/>
+              <a:gd name="connsiteY3" fmla="*/ 383755 h 800362"/>
+              <a:gd name="connsiteX4" fmla="*/ 400181 w 555995"/>
+              <a:gd name="connsiteY4" fmla="*/ 800362 h 800362"/>
+              <a:gd name="connsiteX0" fmla="*/ 137872 w 293686"/>
+              <a:gd name="connsiteY0" fmla="*/ 800362 h 800362"/>
+              <a:gd name="connsiteX1" fmla="*/ 27890 w 293686"/>
+              <a:gd name="connsiteY1" fmla="*/ 405656 h 800362"/>
+              <a:gd name="connsiteX2" fmla="*/ 137872 w 293686"/>
+              <a:gd name="connsiteY2" fmla="*/ 0 h 800362"/>
+              <a:gd name="connsiteX3" fmla="*/ 293686 w 293686"/>
+              <a:gd name="connsiteY3" fmla="*/ 383755 h 800362"/>
+              <a:gd name="connsiteX4" fmla="*/ 137872 w 293686"/>
+              <a:gd name="connsiteY4" fmla="*/ 800362 h 800362"/>
+              <a:gd name="connsiteX0" fmla="*/ 137872 w 293686"/>
+              <a:gd name="connsiteY0" fmla="*/ 800362 h 800362"/>
+              <a:gd name="connsiteX1" fmla="*/ 27890 w 293686"/>
+              <a:gd name="connsiteY1" fmla="*/ 405656 h 800362"/>
+              <a:gd name="connsiteX2" fmla="*/ 137872 w 293686"/>
+              <a:gd name="connsiteY2" fmla="*/ 0 h 800362"/>
+              <a:gd name="connsiteX3" fmla="*/ 293686 w 293686"/>
+              <a:gd name="connsiteY3" fmla="*/ 383755 h 800362"/>
+              <a:gd name="connsiteX4" fmla="*/ 137872 w 293686"/>
+              <a:gd name="connsiteY4" fmla="*/ 800362 h 800362"/>
+              <a:gd name="connsiteX0" fmla="*/ 137872 w 293686"/>
+              <a:gd name="connsiteY0" fmla="*/ 800362 h 800362"/>
+              <a:gd name="connsiteX1" fmla="*/ 27890 w 293686"/>
+              <a:gd name="connsiteY1" fmla="*/ 405656 h 800362"/>
+              <a:gd name="connsiteX2" fmla="*/ 137872 w 293686"/>
+              <a:gd name="connsiteY2" fmla="*/ 0 h 800362"/>
+              <a:gd name="connsiteX3" fmla="*/ 293686 w 293686"/>
+              <a:gd name="connsiteY3" fmla="*/ 383755 h 800362"/>
+              <a:gd name="connsiteX4" fmla="*/ 137872 w 293686"/>
+              <a:gd name="connsiteY4" fmla="*/ 800362 h 800362"/>
+              <a:gd name="connsiteX0" fmla="*/ 137872 w 293686"/>
+              <a:gd name="connsiteY0" fmla="*/ 800362 h 800362"/>
+              <a:gd name="connsiteX1" fmla="*/ 27890 w 293686"/>
+              <a:gd name="connsiteY1" fmla="*/ 405656 h 800362"/>
+              <a:gd name="connsiteX2" fmla="*/ 137872 w 293686"/>
+              <a:gd name="connsiteY2" fmla="*/ 0 h 800362"/>
+              <a:gd name="connsiteX3" fmla="*/ 293686 w 293686"/>
+              <a:gd name="connsiteY3" fmla="*/ 383755 h 800362"/>
+              <a:gd name="connsiteX4" fmla="*/ 137872 w 293686"/>
+              <a:gd name="connsiteY4" fmla="*/ 800362 h 800362"/>
+              <a:gd name="connsiteX0" fmla="*/ 111565 w 267379"/>
+              <a:gd name="connsiteY0" fmla="*/ 800362 h 800362"/>
+              <a:gd name="connsiteX1" fmla="*/ 1583 w 267379"/>
+              <a:gd name="connsiteY1" fmla="*/ 405656 h 800362"/>
+              <a:gd name="connsiteX2" fmla="*/ 111565 w 267379"/>
+              <a:gd name="connsiteY2" fmla="*/ 0 h 800362"/>
+              <a:gd name="connsiteX3" fmla="*/ 267379 w 267379"/>
+              <a:gd name="connsiteY3" fmla="*/ 383755 h 800362"/>
+              <a:gd name="connsiteX4" fmla="*/ 111565 w 267379"/>
+              <a:gd name="connsiteY4" fmla="*/ 800362 h 800362"/>
+              <a:gd name="connsiteX0" fmla="*/ 121242 w 277056"/>
+              <a:gd name="connsiteY0" fmla="*/ 800362 h 800362"/>
+              <a:gd name="connsiteX1" fmla="*/ 309 w 277056"/>
+              <a:gd name="connsiteY1" fmla="*/ 427558 h 800362"/>
+              <a:gd name="connsiteX2" fmla="*/ 121242 w 277056"/>
+              <a:gd name="connsiteY2" fmla="*/ 0 h 800362"/>
+              <a:gd name="connsiteX3" fmla="*/ 277056 w 277056"/>
+              <a:gd name="connsiteY3" fmla="*/ 383755 h 800362"/>
+              <a:gd name="connsiteX4" fmla="*/ 121242 w 277056"/>
+              <a:gd name="connsiteY4" fmla="*/ 800362 h 800362"/>
+              <a:gd name="connsiteX0" fmla="*/ 121242 w 277056"/>
+              <a:gd name="connsiteY0" fmla="*/ 800362 h 800362"/>
+              <a:gd name="connsiteX1" fmla="*/ 309 w 277056"/>
+              <a:gd name="connsiteY1" fmla="*/ 427558 h 800362"/>
+              <a:gd name="connsiteX2" fmla="*/ 121242 w 277056"/>
+              <a:gd name="connsiteY2" fmla="*/ 0 h 800362"/>
+              <a:gd name="connsiteX3" fmla="*/ 277056 w 277056"/>
+              <a:gd name="connsiteY3" fmla="*/ 389231 h 800362"/>
+              <a:gd name="connsiteX4" fmla="*/ 121242 w 277056"/>
+              <a:gd name="connsiteY4" fmla="*/ 800362 h 800362"/>
+            </a:gdLst>
+            <a:ahLst/>
+            <a:cxnLst>
+              <a:cxn ang="0">
+                <a:pos x="connsiteX0" y="connsiteY0"/>
+              </a:cxn>
+              <a:cxn ang="0">
+                <a:pos x="connsiteX1" y="connsiteY1"/>
+              </a:cxn>
+              <a:cxn ang="0">
+                <a:pos x="connsiteX2" y="connsiteY2"/>
+              </a:cxn>
+              <a:cxn ang="0">
+                <a:pos x="connsiteX3" y="connsiteY3"/>
+              </a:cxn>
+              <a:cxn ang="0">
+                <a:pos x="connsiteX4" y="connsiteY4"/>
+              </a:cxn>
+            </a:cxnLst>
+            <a:rect l="l" t="t" r="r" b="b"/>
+            <a:pathLst>
+              <a:path w="277056" h="800362">
+                <a:moveTo>
+                  <a:pt x="121242" y="800362"/>
+                </a:moveTo>
+                <a:cubicBezTo>
+                  <a:pt x="48065" y="647050"/>
+                  <a:pt x="309" y="648572"/>
+                  <a:pt x="309" y="427558"/>
+                </a:cubicBezTo>
+                <a:cubicBezTo>
+                  <a:pt x="309" y="206544"/>
+                  <a:pt x="-12165" y="120460"/>
+                  <a:pt x="121242" y="0"/>
+                </a:cubicBezTo>
+                <a:cubicBezTo>
+                  <a:pt x="186923" y="50666"/>
+                  <a:pt x="277056" y="231781"/>
+                  <a:pt x="277056" y="389231"/>
+                </a:cubicBezTo>
+                <a:cubicBezTo>
+                  <a:pt x="277056" y="546681"/>
+                  <a:pt x="192400" y="585432"/>
+                  <a:pt x="121242" y="800362"/>
+                </a:cubicBezTo>
+                <a:close/>
+              </a:path>
+            </a:pathLst>
+          </a:custGeom>
+          <a:solidFill>
+            <a:schemeClr val="bg1"/>
+          </a:solidFill>
+          <a:ln w="57150">
+            <a:solidFill>
+              <a:schemeClr val="tx1"/>
+            </a:solidFill>
+          </a:ln>
+        </p:spPr>
+        <p:style>
+          <a:lnRef idx="2">
+            <a:schemeClr val="accent1">
+              <a:shade val="50000"/>
+            </a:schemeClr>
+          </a:lnRef>
+          <a:fillRef idx="1">
+            <a:schemeClr val="accent1"/>
+          </a:fillRef>
+          <a:effectRef idx="0">
+            <a:schemeClr val="accent1"/>
+          </a:effectRef>
+          <a:fontRef idx="minor">
+            <a:schemeClr val="lt1"/>
+          </a:fontRef>
+        </p:style>
+        <p:txBody>
+          <a:bodyPr rtlCol="0" anchor="ctr"/>
+          <a:lstStyle/>
+          <a:p>
+            <a:pPr algn="ctr"/>
+            <a:endParaRPr lang="en-US"/>
+          </a:p>
+        </p:txBody>
+      </p:sp>
+      <p:sp>
+        <p:nvSpPr>
+          <p:cNvPr id="544" name="Oval 543">
+            <a:extLst>
+              <a:ext uri="{FF2B5EF4-FFF2-40B4-BE49-F238E27FC236}">
+                <a16:creationId xmlns:a16="http://schemas.microsoft.com/office/drawing/2014/main" id="{B0D7CD39-8FFC-4C4D-AEA5-3C9885DAFF77}"/>
+              </a:ext>
+            </a:extLst>
+          </p:cNvPr>
+          <p:cNvSpPr/>
+          <p:nvPr/>
+        </p:nvSpPr>
+        <p:spPr>
+          <a:xfrm>
+            <a:off x="10011783" y="3497202"/>
+            <a:ext cx="164092" cy="164092"/>
+          </a:xfrm>
+          <a:prstGeom prst="ellipse">
+            <a:avLst/>
+          </a:prstGeom>
+          <a:solidFill>
+            <a:schemeClr val="tx1"/>
+          </a:solidFill>
+          <a:ln w="38100">
+            <a:noFill/>
+          </a:ln>
+        </p:spPr>
+        <p:style>
+          <a:lnRef idx="2">
+            <a:schemeClr val="accent1">
+              <a:shade val="50000"/>
+            </a:schemeClr>
+          </a:lnRef>
+          <a:fillRef idx="1">
+            <a:schemeClr val="accent1"/>
+          </a:fillRef>
+          <a:effectRef idx="0">
+            <a:schemeClr val="accent1"/>
+          </a:effectRef>
+          <a:fontRef idx="minor">
+            <a:schemeClr val="lt1"/>
+          </a:fontRef>
+        </p:style>
+        <p:txBody>
+          <a:bodyPr rtlCol="0" anchor="ctr"/>
+          <a:lstStyle/>
+          <a:p>
+            <a:pPr algn="ctr"/>
+            <a:endParaRPr lang="en-US"/>
+          </a:p>
+        </p:txBody>
+      </p:sp>
+      <p:sp>
+        <p:nvSpPr>
+          <p:cNvPr id="545" name="Oval 544">
+            <a:extLst>
+              <a:ext uri="{FF2B5EF4-FFF2-40B4-BE49-F238E27FC236}">
+                <a16:creationId xmlns:a16="http://schemas.microsoft.com/office/drawing/2014/main" id="{619A9812-7CE8-E14F-A211-FFD9A0938487}"/>
+              </a:ext>
+            </a:extLst>
+          </p:cNvPr>
+          <p:cNvSpPr/>
+          <p:nvPr/>
+        </p:nvSpPr>
+        <p:spPr>
+          <a:xfrm>
+            <a:off x="10510672" y="3494986"/>
+            <a:ext cx="164092" cy="164092"/>
+          </a:xfrm>
+          <a:prstGeom prst="ellipse">
+            <a:avLst/>
+          </a:prstGeom>
+          <a:solidFill>
+            <a:schemeClr val="tx1"/>
+          </a:solidFill>
+          <a:ln w="38100">
+            <a:noFill/>
+          </a:ln>
+        </p:spPr>
+        <p:style>
+          <a:lnRef idx="2">
+            <a:schemeClr val="accent1">
+              <a:shade val="50000"/>
+            </a:schemeClr>
+          </a:lnRef>
+          <a:fillRef idx="1">
+            <a:schemeClr val="accent1"/>
+          </a:fillRef>
+          <a:effectRef idx="0">
+            <a:schemeClr val="accent1"/>
+          </a:effectRef>
+          <a:fontRef idx="minor">
+            <a:schemeClr val="lt1"/>
+          </a:fontRef>
+        </p:style>
+        <p:txBody>
+          <a:bodyPr rtlCol="0" anchor="ctr"/>
+          <a:lstStyle/>
+          <a:p>
+            <a:pPr algn="ctr"/>
+            <a:endParaRPr lang="en-US"/>
+          </a:p>
+        </p:txBody>
+      </p:sp>
     </p:spTree>
     <p:extLst>
       <p:ext uri="{BB962C8B-B14F-4D97-AF65-F5344CB8AC3E}">

--- a/logos/logos.pptx
+++ b/logos/logos.pptx
@@ -27696,8 +27696,8 @@
           <p:nvPr/>
         </p:nvSpPr>
         <p:spPr>
-          <a:xfrm rot="5400000" flipV="1">
-            <a:off x="10517324" y="3331487"/>
+          <a:xfrm rot="4725229" flipV="1">
+            <a:off x="10507698" y="3331487"/>
             <a:ext cx="188413" cy="544289"/>
           </a:xfrm>
           <a:custGeom>
@@ -27889,8 +27889,8 @@
           <p:nvPr/>
         </p:nvSpPr>
         <p:spPr>
-          <a:xfrm rot="16200000" flipH="1" flipV="1">
-            <a:off x="9980810" y="3331487"/>
+          <a:xfrm rot="16900110" flipH="1" flipV="1">
+            <a:off x="9990436" y="3331487"/>
             <a:ext cx="188413" cy="544289"/>
           </a:xfrm>
           <a:custGeom>
@@ -28082,8 +28082,8 @@
           <p:nvPr/>
         </p:nvSpPr>
         <p:spPr>
-          <a:xfrm>
-            <a:off x="10011783" y="3497202"/>
+          <a:xfrm rot="700110">
+            <a:off x="10011783" y="3482763"/>
             <a:ext cx="164092" cy="164092"/>
           </a:xfrm>
           <a:prstGeom prst="ellipse">
@@ -28134,8 +28134,8 @@
           <p:nvPr/>
         </p:nvSpPr>
         <p:spPr>
-          <a:xfrm>
-            <a:off x="10510672" y="3494986"/>
+          <a:xfrm rot="20925229">
+            <a:off x="10510672" y="3480547"/>
             <a:ext cx="164092" cy="164092"/>
           </a:xfrm>
           <a:prstGeom prst="ellipse">
@@ -28173,6 +28173,2686 @@
           </a:p>
         </p:txBody>
       </p:sp>
+      <p:sp>
+        <p:nvSpPr>
+          <p:cNvPr id="568" name="Rectangle 567">
+            <a:extLst>
+              <a:ext uri="{FF2B5EF4-FFF2-40B4-BE49-F238E27FC236}">
+                <a16:creationId xmlns:a16="http://schemas.microsoft.com/office/drawing/2014/main" id="{9D8F40F1-EEF1-DF44-B54D-A5A662EB1458}"/>
+              </a:ext>
+            </a:extLst>
+          </p:cNvPr>
+          <p:cNvSpPr/>
+          <p:nvPr/>
+        </p:nvSpPr>
+        <p:spPr>
+          <a:xfrm>
+            <a:off x="8921712" y="5332549"/>
+            <a:ext cx="1368208" cy="1368208"/>
+          </a:xfrm>
+          <a:prstGeom prst="rect">
+            <a:avLst/>
+          </a:prstGeom>
+          <a:noFill/>
+        </p:spPr>
+        <p:style>
+          <a:lnRef idx="2">
+            <a:schemeClr val="accent1">
+              <a:shade val="50000"/>
+            </a:schemeClr>
+          </a:lnRef>
+          <a:fillRef idx="1">
+            <a:schemeClr val="accent1"/>
+          </a:fillRef>
+          <a:effectRef idx="0">
+            <a:schemeClr val="accent1"/>
+          </a:effectRef>
+          <a:fontRef idx="minor">
+            <a:schemeClr val="lt1"/>
+          </a:fontRef>
+        </p:style>
+        <p:txBody>
+          <a:bodyPr rtlCol="0" anchor="ctr"/>
+          <a:lstStyle/>
+          <a:p>
+            <a:pPr algn="ctr"/>
+            <a:endParaRPr lang="en-US"/>
+          </a:p>
+        </p:txBody>
+      </p:sp>
+      <p:grpSp>
+        <p:nvGrpSpPr>
+          <p:cNvPr id="11" name="Group 10">
+            <a:extLst>
+              <a:ext uri="{FF2B5EF4-FFF2-40B4-BE49-F238E27FC236}">
+                <a16:creationId xmlns:a16="http://schemas.microsoft.com/office/drawing/2014/main" id="{5965E311-E161-FD40-8B6A-C5575DA5BD97}"/>
+              </a:ext>
+            </a:extLst>
+          </p:cNvPr>
+          <p:cNvGrpSpPr/>
+          <p:nvPr/>
+        </p:nvGrpSpPr>
+        <p:grpSpPr>
+          <a:xfrm>
+            <a:off x="9100798" y="5402959"/>
+            <a:ext cx="848993" cy="1123265"/>
+            <a:chOff x="8399030" y="5756490"/>
+            <a:chExt cx="673849" cy="891543"/>
+          </a:xfrm>
+        </p:grpSpPr>
+        <p:sp>
+          <p:nvSpPr>
+            <p:cNvPr id="570" name="Rectangle 569">
+              <a:extLst>
+                <a:ext uri="{FF2B5EF4-FFF2-40B4-BE49-F238E27FC236}">
+                  <a16:creationId xmlns:a16="http://schemas.microsoft.com/office/drawing/2014/main" id="{B6A69B25-E283-594F-9E09-E5FFACBF3165}"/>
+                </a:ext>
+              </a:extLst>
+            </p:cNvPr>
+            <p:cNvSpPr/>
+            <p:nvPr/>
+          </p:nvSpPr>
+          <p:spPr>
+            <a:xfrm>
+              <a:off x="8399030" y="5756490"/>
+              <a:ext cx="673849" cy="891543"/>
+            </a:xfrm>
+            <a:prstGeom prst="rect">
+              <a:avLst/>
+            </a:prstGeom>
+            <a:solidFill>
+              <a:schemeClr val="bg1"/>
+            </a:solidFill>
+            <a:ln w="38100">
+              <a:solidFill>
+                <a:schemeClr val="tx1"/>
+              </a:solidFill>
+            </a:ln>
+          </p:spPr>
+          <p:style>
+            <a:lnRef idx="2">
+              <a:schemeClr val="accent1">
+                <a:shade val="50000"/>
+              </a:schemeClr>
+            </a:lnRef>
+            <a:fillRef idx="1">
+              <a:schemeClr val="accent1"/>
+            </a:fillRef>
+            <a:effectRef idx="0">
+              <a:schemeClr val="accent1"/>
+            </a:effectRef>
+            <a:fontRef idx="minor">
+              <a:schemeClr val="lt1"/>
+            </a:fontRef>
+          </p:style>
+          <p:txBody>
+            <a:bodyPr rtlCol="0" anchor="ctr"/>
+            <a:lstStyle/>
+            <a:p>
+              <a:pPr algn="ctr"/>
+              <a:endParaRPr lang="en-US"/>
+            </a:p>
+          </p:txBody>
+        </p:sp>
+        <p:cxnSp>
+          <p:nvCxnSpPr>
+            <p:cNvPr id="572" name="Straight Connector 571">
+              <a:extLst>
+                <a:ext uri="{FF2B5EF4-FFF2-40B4-BE49-F238E27FC236}">
+                  <a16:creationId xmlns:a16="http://schemas.microsoft.com/office/drawing/2014/main" id="{E6024BF0-B4FE-2C43-B59C-499A6B7D7164}"/>
+                </a:ext>
+              </a:extLst>
+            </p:cNvPr>
+            <p:cNvCxnSpPr>
+              <a:cxnSpLocks/>
+            </p:cNvCxnSpPr>
+            <p:nvPr/>
+          </p:nvCxnSpPr>
+          <p:spPr>
+            <a:xfrm>
+              <a:off x="8496215" y="5861232"/>
+              <a:ext cx="471094" cy="0"/>
+            </a:xfrm>
+            <a:prstGeom prst="line">
+              <a:avLst/>
+            </a:prstGeom>
+            <a:ln w="38100">
+              <a:solidFill>
+                <a:schemeClr val="tx1"/>
+              </a:solidFill>
+            </a:ln>
+          </p:spPr>
+          <p:style>
+            <a:lnRef idx="1">
+              <a:schemeClr val="accent1"/>
+            </a:lnRef>
+            <a:fillRef idx="0">
+              <a:schemeClr val="accent1"/>
+            </a:fillRef>
+            <a:effectRef idx="0">
+              <a:schemeClr val="accent1"/>
+            </a:effectRef>
+            <a:fontRef idx="minor">
+              <a:schemeClr val="tx1"/>
+            </a:fontRef>
+          </p:style>
+        </p:cxnSp>
+        <p:cxnSp>
+          <p:nvCxnSpPr>
+            <p:cNvPr id="573" name="Straight Connector 572">
+              <a:extLst>
+                <a:ext uri="{FF2B5EF4-FFF2-40B4-BE49-F238E27FC236}">
+                  <a16:creationId xmlns:a16="http://schemas.microsoft.com/office/drawing/2014/main" id="{6483FAEA-2777-D149-9CE1-6CA69F2677CA}"/>
+                </a:ext>
+              </a:extLst>
+            </p:cNvPr>
+            <p:cNvCxnSpPr>
+              <a:cxnSpLocks/>
+            </p:cNvCxnSpPr>
+            <p:nvPr/>
+          </p:nvCxnSpPr>
+          <p:spPr>
+            <a:xfrm>
+              <a:off x="8484532" y="5968828"/>
+              <a:ext cx="205956" cy="0"/>
+            </a:xfrm>
+            <a:prstGeom prst="line">
+              <a:avLst/>
+            </a:prstGeom>
+            <a:ln w="28575">
+              <a:solidFill>
+                <a:schemeClr val="tx1"/>
+              </a:solidFill>
+            </a:ln>
+          </p:spPr>
+          <p:style>
+            <a:lnRef idx="1">
+              <a:schemeClr val="accent1"/>
+            </a:lnRef>
+            <a:fillRef idx="0">
+              <a:schemeClr val="accent1"/>
+            </a:fillRef>
+            <a:effectRef idx="0">
+              <a:schemeClr val="accent1"/>
+            </a:effectRef>
+            <a:fontRef idx="minor">
+              <a:schemeClr val="tx1"/>
+            </a:fontRef>
+          </p:style>
+        </p:cxnSp>
+        <p:cxnSp>
+          <p:nvCxnSpPr>
+            <p:cNvPr id="624" name="Straight Connector 623">
+              <a:extLst>
+                <a:ext uri="{FF2B5EF4-FFF2-40B4-BE49-F238E27FC236}">
+                  <a16:creationId xmlns:a16="http://schemas.microsoft.com/office/drawing/2014/main" id="{17E8F37E-139C-D448-83F0-1509DA2E35AC}"/>
+                </a:ext>
+              </a:extLst>
+            </p:cNvPr>
+            <p:cNvCxnSpPr>
+              <a:cxnSpLocks/>
+            </p:cNvCxnSpPr>
+            <p:nvPr/>
+          </p:nvCxnSpPr>
+          <p:spPr>
+            <a:xfrm>
+              <a:off x="8484532" y="6043743"/>
+              <a:ext cx="205956" cy="0"/>
+            </a:xfrm>
+            <a:prstGeom prst="line">
+              <a:avLst/>
+            </a:prstGeom>
+            <a:ln w="28575">
+              <a:solidFill>
+                <a:schemeClr val="tx1"/>
+              </a:solidFill>
+            </a:ln>
+          </p:spPr>
+          <p:style>
+            <a:lnRef idx="1">
+              <a:schemeClr val="accent1"/>
+            </a:lnRef>
+            <a:fillRef idx="0">
+              <a:schemeClr val="accent1"/>
+            </a:fillRef>
+            <a:effectRef idx="0">
+              <a:schemeClr val="accent1"/>
+            </a:effectRef>
+            <a:fontRef idx="minor">
+              <a:schemeClr val="tx1"/>
+            </a:fontRef>
+          </p:style>
+        </p:cxnSp>
+        <p:cxnSp>
+          <p:nvCxnSpPr>
+            <p:cNvPr id="626" name="Straight Connector 625">
+              <a:extLst>
+                <a:ext uri="{FF2B5EF4-FFF2-40B4-BE49-F238E27FC236}">
+                  <a16:creationId xmlns:a16="http://schemas.microsoft.com/office/drawing/2014/main" id="{8BD64FB7-F4B2-4140-B84C-1ADFC58D3EE8}"/>
+                </a:ext>
+              </a:extLst>
+            </p:cNvPr>
+            <p:cNvCxnSpPr>
+              <a:cxnSpLocks/>
+            </p:cNvCxnSpPr>
+            <p:nvPr/>
+          </p:nvCxnSpPr>
+          <p:spPr>
+            <a:xfrm>
+              <a:off x="8484532" y="6118658"/>
+              <a:ext cx="205956" cy="0"/>
+            </a:xfrm>
+            <a:prstGeom prst="line">
+              <a:avLst/>
+            </a:prstGeom>
+            <a:ln w="28575">
+              <a:solidFill>
+                <a:schemeClr val="tx1"/>
+              </a:solidFill>
+            </a:ln>
+          </p:spPr>
+          <p:style>
+            <a:lnRef idx="1">
+              <a:schemeClr val="accent1"/>
+            </a:lnRef>
+            <a:fillRef idx="0">
+              <a:schemeClr val="accent1"/>
+            </a:fillRef>
+            <a:effectRef idx="0">
+              <a:schemeClr val="accent1"/>
+            </a:effectRef>
+            <a:fontRef idx="minor">
+              <a:schemeClr val="tx1"/>
+            </a:fontRef>
+          </p:style>
+        </p:cxnSp>
+        <p:cxnSp>
+          <p:nvCxnSpPr>
+            <p:cNvPr id="630" name="Straight Connector 629">
+              <a:extLst>
+                <a:ext uri="{FF2B5EF4-FFF2-40B4-BE49-F238E27FC236}">
+                  <a16:creationId xmlns:a16="http://schemas.microsoft.com/office/drawing/2014/main" id="{5D0A6EB3-C387-994C-BFAF-A25EAA2AF080}"/>
+                </a:ext>
+              </a:extLst>
+            </p:cNvPr>
+            <p:cNvCxnSpPr>
+              <a:cxnSpLocks/>
+            </p:cNvCxnSpPr>
+            <p:nvPr/>
+          </p:nvCxnSpPr>
+          <p:spPr>
+            <a:xfrm>
+              <a:off x="8484532" y="6193573"/>
+              <a:ext cx="205956" cy="0"/>
+            </a:xfrm>
+            <a:prstGeom prst="line">
+              <a:avLst/>
+            </a:prstGeom>
+            <a:ln w="28575">
+              <a:solidFill>
+                <a:schemeClr val="tx1"/>
+              </a:solidFill>
+            </a:ln>
+          </p:spPr>
+          <p:style>
+            <a:lnRef idx="1">
+              <a:schemeClr val="accent1"/>
+            </a:lnRef>
+            <a:fillRef idx="0">
+              <a:schemeClr val="accent1"/>
+            </a:fillRef>
+            <a:effectRef idx="0">
+              <a:schemeClr val="accent1"/>
+            </a:effectRef>
+            <a:fontRef idx="minor">
+              <a:schemeClr val="tx1"/>
+            </a:fontRef>
+          </p:style>
+        </p:cxnSp>
+        <p:cxnSp>
+          <p:nvCxnSpPr>
+            <p:cNvPr id="635" name="Straight Connector 634">
+              <a:extLst>
+                <a:ext uri="{FF2B5EF4-FFF2-40B4-BE49-F238E27FC236}">
+                  <a16:creationId xmlns:a16="http://schemas.microsoft.com/office/drawing/2014/main" id="{EDD869BE-1940-9546-91A8-A73265011273}"/>
+                </a:ext>
+              </a:extLst>
+            </p:cNvPr>
+            <p:cNvCxnSpPr>
+              <a:cxnSpLocks/>
+            </p:cNvCxnSpPr>
+            <p:nvPr/>
+          </p:nvCxnSpPr>
+          <p:spPr>
+            <a:xfrm>
+              <a:off x="8484532" y="6268489"/>
+              <a:ext cx="205956" cy="0"/>
+            </a:xfrm>
+            <a:prstGeom prst="line">
+              <a:avLst/>
+            </a:prstGeom>
+            <a:ln w="28575">
+              <a:solidFill>
+                <a:schemeClr val="tx1"/>
+              </a:solidFill>
+            </a:ln>
+          </p:spPr>
+          <p:style>
+            <a:lnRef idx="1">
+              <a:schemeClr val="accent1"/>
+            </a:lnRef>
+            <a:fillRef idx="0">
+              <a:schemeClr val="accent1"/>
+            </a:fillRef>
+            <a:effectRef idx="0">
+              <a:schemeClr val="accent1"/>
+            </a:effectRef>
+            <a:fontRef idx="minor">
+              <a:schemeClr val="tx1"/>
+            </a:fontRef>
+          </p:style>
+        </p:cxnSp>
+        <p:cxnSp>
+          <p:nvCxnSpPr>
+            <p:cNvPr id="636" name="Straight Connector 635">
+              <a:extLst>
+                <a:ext uri="{FF2B5EF4-FFF2-40B4-BE49-F238E27FC236}">
+                  <a16:creationId xmlns:a16="http://schemas.microsoft.com/office/drawing/2014/main" id="{8749498C-D768-C545-BB2C-F8A130DA249E}"/>
+                </a:ext>
+              </a:extLst>
+            </p:cNvPr>
+            <p:cNvCxnSpPr>
+              <a:cxnSpLocks/>
+            </p:cNvCxnSpPr>
+            <p:nvPr/>
+          </p:nvCxnSpPr>
+          <p:spPr>
+            <a:xfrm>
+              <a:off x="8484528" y="6343404"/>
+              <a:ext cx="205956" cy="0"/>
+            </a:xfrm>
+            <a:prstGeom prst="line">
+              <a:avLst/>
+            </a:prstGeom>
+            <a:ln w="28575">
+              <a:solidFill>
+                <a:schemeClr val="tx1"/>
+              </a:solidFill>
+            </a:ln>
+          </p:spPr>
+          <p:style>
+            <a:lnRef idx="1">
+              <a:schemeClr val="accent1"/>
+            </a:lnRef>
+            <a:fillRef idx="0">
+              <a:schemeClr val="accent1"/>
+            </a:fillRef>
+            <a:effectRef idx="0">
+              <a:schemeClr val="accent1"/>
+            </a:effectRef>
+            <a:fontRef idx="minor">
+              <a:schemeClr val="tx1"/>
+            </a:fontRef>
+          </p:style>
+        </p:cxnSp>
+        <p:cxnSp>
+          <p:nvCxnSpPr>
+            <p:cNvPr id="639" name="Straight Connector 638">
+              <a:extLst>
+                <a:ext uri="{FF2B5EF4-FFF2-40B4-BE49-F238E27FC236}">
+                  <a16:creationId xmlns:a16="http://schemas.microsoft.com/office/drawing/2014/main" id="{9A81DDFD-04FA-0940-82CB-ED3D73439981}"/>
+                </a:ext>
+              </a:extLst>
+            </p:cNvPr>
+            <p:cNvCxnSpPr>
+              <a:cxnSpLocks/>
+            </p:cNvCxnSpPr>
+            <p:nvPr/>
+          </p:nvCxnSpPr>
+          <p:spPr>
+            <a:xfrm>
+              <a:off x="8761350" y="6194374"/>
+              <a:ext cx="205956" cy="0"/>
+            </a:xfrm>
+            <a:prstGeom prst="line">
+              <a:avLst/>
+            </a:prstGeom>
+            <a:ln w="28575">
+              <a:solidFill>
+                <a:schemeClr val="tx1"/>
+              </a:solidFill>
+            </a:ln>
+          </p:spPr>
+          <p:style>
+            <a:lnRef idx="1">
+              <a:schemeClr val="accent1"/>
+            </a:lnRef>
+            <a:fillRef idx="0">
+              <a:schemeClr val="accent1"/>
+            </a:fillRef>
+            <a:effectRef idx="0">
+              <a:schemeClr val="accent1"/>
+            </a:effectRef>
+            <a:fontRef idx="minor">
+              <a:schemeClr val="tx1"/>
+            </a:fontRef>
+          </p:style>
+        </p:cxnSp>
+        <p:cxnSp>
+          <p:nvCxnSpPr>
+            <p:cNvPr id="640" name="Straight Connector 639">
+              <a:extLst>
+                <a:ext uri="{FF2B5EF4-FFF2-40B4-BE49-F238E27FC236}">
+                  <a16:creationId xmlns:a16="http://schemas.microsoft.com/office/drawing/2014/main" id="{CB430757-1E9A-C547-97F1-95303D0EC818}"/>
+                </a:ext>
+              </a:extLst>
+            </p:cNvPr>
+            <p:cNvCxnSpPr>
+              <a:cxnSpLocks/>
+            </p:cNvCxnSpPr>
+            <p:nvPr/>
+          </p:nvCxnSpPr>
+          <p:spPr>
+            <a:xfrm>
+              <a:off x="8761350" y="6269289"/>
+              <a:ext cx="205956" cy="0"/>
+            </a:xfrm>
+            <a:prstGeom prst="line">
+              <a:avLst/>
+            </a:prstGeom>
+            <a:ln w="28575">
+              <a:solidFill>
+                <a:schemeClr val="tx1"/>
+              </a:solidFill>
+            </a:ln>
+          </p:spPr>
+          <p:style>
+            <a:lnRef idx="1">
+              <a:schemeClr val="accent1"/>
+            </a:lnRef>
+            <a:fillRef idx="0">
+              <a:schemeClr val="accent1"/>
+            </a:fillRef>
+            <a:effectRef idx="0">
+              <a:schemeClr val="accent1"/>
+            </a:effectRef>
+            <a:fontRef idx="minor">
+              <a:schemeClr val="tx1"/>
+            </a:fontRef>
+          </p:style>
+        </p:cxnSp>
+        <p:cxnSp>
+          <p:nvCxnSpPr>
+            <p:cNvPr id="644" name="Straight Connector 643">
+              <a:extLst>
+                <a:ext uri="{FF2B5EF4-FFF2-40B4-BE49-F238E27FC236}">
+                  <a16:creationId xmlns:a16="http://schemas.microsoft.com/office/drawing/2014/main" id="{12F0EA93-7FAE-594D-A93F-74F73F256185}"/>
+                </a:ext>
+              </a:extLst>
+            </p:cNvPr>
+            <p:cNvCxnSpPr>
+              <a:cxnSpLocks/>
+            </p:cNvCxnSpPr>
+            <p:nvPr/>
+          </p:nvCxnSpPr>
+          <p:spPr>
+            <a:xfrm>
+              <a:off x="8761350" y="6344204"/>
+              <a:ext cx="205956" cy="0"/>
+            </a:xfrm>
+            <a:prstGeom prst="line">
+              <a:avLst/>
+            </a:prstGeom>
+            <a:ln w="28575">
+              <a:solidFill>
+                <a:schemeClr val="tx1"/>
+              </a:solidFill>
+            </a:ln>
+          </p:spPr>
+          <p:style>
+            <a:lnRef idx="1">
+              <a:schemeClr val="accent1"/>
+            </a:lnRef>
+            <a:fillRef idx="0">
+              <a:schemeClr val="accent1"/>
+            </a:fillRef>
+            <a:effectRef idx="0">
+              <a:schemeClr val="accent1"/>
+            </a:effectRef>
+            <a:fontRef idx="minor">
+              <a:schemeClr val="tx1"/>
+            </a:fontRef>
+          </p:style>
+        </p:cxnSp>
+        <p:cxnSp>
+          <p:nvCxnSpPr>
+            <p:cNvPr id="645" name="Straight Connector 644">
+              <a:extLst>
+                <a:ext uri="{FF2B5EF4-FFF2-40B4-BE49-F238E27FC236}">
+                  <a16:creationId xmlns:a16="http://schemas.microsoft.com/office/drawing/2014/main" id="{24D40E6C-D6F4-B841-8130-CF056AD012AB}"/>
+                </a:ext>
+              </a:extLst>
+            </p:cNvPr>
+            <p:cNvCxnSpPr>
+              <a:cxnSpLocks/>
+            </p:cNvCxnSpPr>
+            <p:nvPr/>
+          </p:nvCxnSpPr>
+          <p:spPr>
+            <a:xfrm>
+              <a:off x="8761350" y="6419119"/>
+              <a:ext cx="205956" cy="0"/>
+            </a:xfrm>
+            <a:prstGeom prst="line">
+              <a:avLst/>
+            </a:prstGeom>
+            <a:ln w="28575">
+              <a:solidFill>
+                <a:schemeClr val="tx1"/>
+              </a:solidFill>
+            </a:ln>
+          </p:spPr>
+          <p:style>
+            <a:lnRef idx="1">
+              <a:schemeClr val="accent1"/>
+            </a:lnRef>
+            <a:fillRef idx="0">
+              <a:schemeClr val="accent1"/>
+            </a:fillRef>
+            <a:effectRef idx="0">
+              <a:schemeClr val="accent1"/>
+            </a:effectRef>
+            <a:fontRef idx="minor">
+              <a:schemeClr val="tx1"/>
+            </a:fontRef>
+          </p:style>
+        </p:cxnSp>
+        <p:cxnSp>
+          <p:nvCxnSpPr>
+            <p:cNvPr id="646" name="Straight Connector 645">
+              <a:extLst>
+                <a:ext uri="{FF2B5EF4-FFF2-40B4-BE49-F238E27FC236}">
+                  <a16:creationId xmlns:a16="http://schemas.microsoft.com/office/drawing/2014/main" id="{8ABEFB41-9543-C145-ACCB-EBEED46A800D}"/>
+                </a:ext>
+              </a:extLst>
+            </p:cNvPr>
+            <p:cNvCxnSpPr>
+              <a:cxnSpLocks/>
+            </p:cNvCxnSpPr>
+            <p:nvPr/>
+          </p:nvCxnSpPr>
+          <p:spPr>
+            <a:xfrm>
+              <a:off x="8761350" y="6494034"/>
+              <a:ext cx="205956" cy="0"/>
+            </a:xfrm>
+            <a:prstGeom prst="line">
+              <a:avLst/>
+            </a:prstGeom>
+            <a:ln w="28575">
+              <a:solidFill>
+                <a:schemeClr val="tx1"/>
+              </a:solidFill>
+            </a:ln>
+          </p:spPr>
+          <p:style>
+            <a:lnRef idx="1">
+              <a:schemeClr val="accent1"/>
+            </a:lnRef>
+            <a:fillRef idx="0">
+              <a:schemeClr val="accent1"/>
+            </a:fillRef>
+            <a:effectRef idx="0">
+              <a:schemeClr val="accent1"/>
+            </a:effectRef>
+            <a:fontRef idx="minor">
+              <a:schemeClr val="tx1"/>
+            </a:fontRef>
+          </p:style>
+        </p:cxnSp>
+        <p:cxnSp>
+          <p:nvCxnSpPr>
+            <p:cNvPr id="652" name="Straight Connector 651">
+              <a:extLst>
+                <a:ext uri="{FF2B5EF4-FFF2-40B4-BE49-F238E27FC236}">
+                  <a16:creationId xmlns:a16="http://schemas.microsoft.com/office/drawing/2014/main" id="{DC53E601-7A84-D543-B075-6E9F5F48B7B8}"/>
+                </a:ext>
+              </a:extLst>
+            </p:cNvPr>
+            <p:cNvCxnSpPr>
+              <a:cxnSpLocks/>
+            </p:cNvCxnSpPr>
+            <p:nvPr/>
+          </p:nvCxnSpPr>
+          <p:spPr>
+            <a:xfrm>
+              <a:off x="8761356" y="6568951"/>
+              <a:ext cx="205956" cy="0"/>
+            </a:xfrm>
+            <a:prstGeom prst="line">
+              <a:avLst/>
+            </a:prstGeom>
+            <a:ln w="28575">
+              <a:solidFill>
+                <a:schemeClr val="tx1"/>
+              </a:solidFill>
+            </a:ln>
+          </p:spPr>
+          <p:style>
+            <a:lnRef idx="1">
+              <a:schemeClr val="accent1"/>
+            </a:lnRef>
+            <a:fillRef idx="0">
+              <a:schemeClr val="accent1"/>
+            </a:fillRef>
+            <a:effectRef idx="0">
+              <a:schemeClr val="accent1"/>
+            </a:effectRef>
+            <a:fontRef idx="minor">
+              <a:schemeClr val="tx1"/>
+            </a:fontRef>
+          </p:style>
+        </p:cxnSp>
+        <p:sp>
+          <p:nvSpPr>
+            <p:cNvPr id="653" name="Rectangle 652">
+              <a:extLst>
+                <a:ext uri="{FF2B5EF4-FFF2-40B4-BE49-F238E27FC236}">
+                  <a16:creationId xmlns:a16="http://schemas.microsoft.com/office/drawing/2014/main" id="{41F6848C-B754-334D-9A38-AE02CD53C384}"/>
+                </a:ext>
+              </a:extLst>
+            </p:cNvPr>
+            <p:cNvSpPr/>
+            <p:nvPr/>
+          </p:nvSpPr>
+          <p:spPr>
+            <a:xfrm>
+              <a:off x="8761351" y="5953668"/>
+              <a:ext cx="205956" cy="180142"/>
+            </a:xfrm>
+            <a:prstGeom prst="rect">
+              <a:avLst/>
+            </a:prstGeom>
+            <a:solidFill>
+              <a:schemeClr val="bg1"/>
+            </a:solidFill>
+            <a:ln w="19050">
+              <a:solidFill>
+                <a:schemeClr val="tx1"/>
+              </a:solidFill>
+            </a:ln>
+          </p:spPr>
+          <p:style>
+            <a:lnRef idx="2">
+              <a:schemeClr val="accent1">
+                <a:shade val="50000"/>
+              </a:schemeClr>
+            </a:lnRef>
+            <a:fillRef idx="1">
+              <a:schemeClr val="accent1"/>
+            </a:fillRef>
+            <a:effectRef idx="0">
+              <a:schemeClr val="accent1"/>
+            </a:effectRef>
+            <a:fontRef idx="minor">
+              <a:schemeClr val="lt1"/>
+            </a:fontRef>
+          </p:style>
+          <p:txBody>
+            <a:bodyPr rtlCol="0" anchor="ctr"/>
+            <a:lstStyle/>
+            <a:p>
+              <a:pPr algn="ctr"/>
+              <a:endParaRPr lang="en-US"/>
+            </a:p>
+          </p:txBody>
+        </p:sp>
+        <p:sp>
+          <p:nvSpPr>
+            <p:cNvPr id="654" name="Rectangle 653">
+              <a:extLst>
+                <a:ext uri="{FF2B5EF4-FFF2-40B4-BE49-F238E27FC236}">
+                  <a16:creationId xmlns:a16="http://schemas.microsoft.com/office/drawing/2014/main" id="{7B048A82-1C2D-0F4C-90C8-C3A06CEA16DD}"/>
+                </a:ext>
+              </a:extLst>
+            </p:cNvPr>
+            <p:cNvSpPr/>
+            <p:nvPr/>
+          </p:nvSpPr>
+          <p:spPr>
+            <a:xfrm>
+              <a:off x="8496220" y="6404596"/>
+              <a:ext cx="205956" cy="180142"/>
+            </a:xfrm>
+            <a:prstGeom prst="rect">
+              <a:avLst/>
+            </a:prstGeom>
+            <a:solidFill>
+              <a:schemeClr val="bg1"/>
+            </a:solidFill>
+            <a:ln w="19050">
+              <a:solidFill>
+                <a:schemeClr val="tx1"/>
+              </a:solidFill>
+            </a:ln>
+          </p:spPr>
+          <p:style>
+            <a:lnRef idx="2">
+              <a:schemeClr val="accent1">
+                <a:shade val="50000"/>
+              </a:schemeClr>
+            </a:lnRef>
+            <a:fillRef idx="1">
+              <a:schemeClr val="accent1"/>
+            </a:fillRef>
+            <a:effectRef idx="0">
+              <a:schemeClr val="accent1"/>
+            </a:effectRef>
+            <a:fontRef idx="minor">
+              <a:schemeClr val="lt1"/>
+            </a:fontRef>
+          </p:style>
+          <p:txBody>
+            <a:bodyPr rtlCol="0" anchor="ctr"/>
+            <a:lstStyle/>
+            <a:p>
+              <a:pPr algn="ctr"/>
+              <a:endParaRPr lang="en-US"/>
+            </a:p>
+          </p:txBody>
+        </p:sp>
+        <p:sp>
+          <p:nvSpPr>
+            <p:cNvPr id="655" name="Rectangle 654">
+              <a:extLst>
+                <a:ext uri="{FF2B5EF4-FFF2-40B4-BE49-F238E27FC236}">
+                  <a16:creationId xmlns:a16="http://schemas.microsoft.com/office/drawing/2014/main" id="{9DE1E9EE-D145-184F-9904-32C88364ACD7}"/>
+                </a:ext>
+              </a:extLst>
+            </p:cNvPr>
+            <p:cNvSpPr/>
+            <p:nvPr/>
+          </p:nvSpPr>
+          <p:spPr>
+            <a:xfrm>
+              <a:off x="8791869" y="6011549"/>
+              <a:ext cx="54034" cy="121628"/>
+            </a:xfrm>
+            <a:prstGeom prst="rect">
+              <a:avLst/>
+            </a:prstGeom>
+            <a:solidFill>
+              <a:schemeClr val="tx1"/>
+            </a:solidFill>
+            <a:ln w="19050">
+              <a:noFill/>
+            </a:ln>
+          </p:spPr>
+          <p:style>
+            <a:lnRef idx="2">
+              <a:schemeClr val="accent1">
+                <a:shade val="50000"/>
+              </a:schemeClr>
+            </a:lnRef>
+            <a:fillRef idx="1">
+              <a:schemeClr val="accent1"/>
+            </a:fillRef>
+            <a:effectRef idx="0">
+              <a:schemeClr val="accent1"/>
+            </a:effectRef>
+            <a:fontRef idx="minor">
+              <a:schemeClr val="lt1"/>
+            </a:fontRef>
+          </p:style>
+          <p:txBody>
+            <a:bodyPr rtlCol="0" anchor="ctr"/>
+            <a:lstStyle/>
+            <a:p>
+              <a:pPr algn="ctr"/>
+              <a:endParaRPr lang="en-US"/>
+            </a:p>
+          </p:txBody>
+        </p:sp>
+        <p:sp>
+          <p:nvSpPr>
+            <p:cNvPr id="656" name="Rectangle 655">
+              <a:extLst>
+                <a:ext uri="{FF2B5EF4-FFF2-40B4-BE49-F238E27FC236}">
+                  <a16:creationId xmlns:a16="http://schemas.microsoft.com/office/drawing/2014/main" id="{ACC0F3FA-CC38-6340-9AD3-39E50A885FB7}"/>
+                </a:ext>
+              </a:extLst>
+            </p:cNvPr>
+            <p:cNvSpPr/>
+            <p:nvPr/>
+          </p:nvSpPr>
+          <p:spPr>
+            <a:xfrm>
+              <a:off x="8873756" y="6058784"/>
+              <a:ext cx="50859" cy="72864"/>
+            </a:xfrm>
+            <a:prstGeom prst="rect">
+              <a:avLst/>
+            </a:prstGeom>
+            <a:solidFill>
+              <a:schemeClr val="tx1"/>
+            </a:solidFill>
+            <a:ln w="19050">
+              <a:noFill/>
+            </a:ln>
+          </p:spPr>
+          <p:style>
+            <a:lnRef idx="2">
+              <a:schemeClr val="accent1">
+                <a:shade val="50000"/>
+              </a:schemeClr>
+            </a:lnRef>
+            <a:fillRef idx="1">
+              <a:schemeClr val="accent1"/>
+            </a:fillRef>
+            <a:effectRef idx="0">
+              <a:schemeClr val="accent1"/>
+            </a:effectRef>
+            <a:fontRef idx="minor">
+              <a:schemeClr val="lt1"/>
+            </a:fontRef>
+          </p:style>
+          <p:txBody>
+            <a:bodyPr rtlCol="0" anchor="ctr"/>
+            <a:lstStyle/>
+            <a:p>
+              <a:pPr algn="ctr"/>
+              <a:endParaRPr lang="en-US"/>
+            </a:p>
+          </p:txBody>
+        </p:sp>
+        <p:grpSp>
+          <p:nvGrpSpPr>
+            <p:cNvPr id="657" name="Group 656">
+              <a:extLst>
+                <a:ext uri="{FF2B5EF4-FFF2-40B4-BE49-F238E27FC236}">
+                  <a16:creationId xmlns:a16="http://schemas.microsoft.com/office/drawing/2014/main" id="{28BD72F5-E851-4741-9D6E-A09BB944430C}"/>
+                </a:ext>
+              </a:extLst>
+            </p:cNvPr>
+            <p:cNvGrpSpPr/>
+            <p:nvPr/>
+          </p:nvGrpSpPr>
+          <p:grpSpPr>
+            <a:xfrm>
+              <a:off x="8558798" y="6436780"/>
+              <a:ext cx="116581" cy="132641"/>
+              <a:chOff x="7996008" y="5361761"/>
+              <a:chExt cx="197081" cy="132641"/>
+            </a:xfrm>
+          </p:grpSpPr>
+          <p:cxnSp>
+            <p:nvCxnSpPr>
+              <p:cNvPr id="658" name="Elbow Connector 657">
+                <a:extLst>
+                  <a:ext uri="{FF2B5EF4-FFF2-40B4-BE49-F238E27FC236}">
+                    <a16:creationId xmlns:a16="http://schemas.microsoft.com/office/drawing/2014/main" id="{EE5BD64B-C1E6-1B4C-AB75-C466BAC06E4F}"/>
+                  </a:ext>
+                </a:extLst>
+              </p:cNvPr>
+              <p:cNvCxnSpPr>
+                <a:cxnSpLocks/>
+              </p:cNvCxnSpPr>
+              <p:nvPr/>
+            </p:nvCxnSpPr>
+            <p:spPr>
+              <a:xfrm rot="5400000" flipH="1" flipV="1">
+                <a:off x="7996008" y="5400309"/>
+                <a:ext cx="94093" cy="94093"/>
+              </a:xfrm>
+              <a:prstGeom prst="bentConnector3">
+                <a:avLst>
+                  <a:gd name="adj1" fmla="val 46626"/>
+                </a:avLst>
+              </a:prstGeom>
+              <a:ln w="19050">
+                <a:solidFill>
+                  <a:schemeClr val="tx1"/>
+                </a:solidFill>
+              </a:ln>
+            </p:spPr>
+            <p:style>
+              <a:lnRef idx="1">
+                <a:schemeClr val="accent1"/>
+              </a:lnRef>
+              <a:fillRef idx="0">
+                <a:schemeClr val="accent1"/>
+              </a:fillRef>
+              <a:effectRef idx="0">
+                <a:schemeClr val="accent1"/>
+              </a:effectRef>
+              <a:fontRef idx="minor">
+                <a:schemeClr val="tx1"/>
+              </a:fontRef>
+            </p:style>
+          </p:cxnSp>
+          <p:sp>
+            <p:nvSpPr>
+              <p:cNvPr id="659" name="Triangle 658">
+                <a:extLst>
+                  <a:ext uri="{FF2B5EF4-FFF2-40B4-BE49-F238E27FC236}">
+                    <a16:creationId xmlns:a16="http://schemas.microsoft.com/office/drawing/2014/main" id="{0D80AC41-1528-3049-80EB-2E17B6DB8C8D}"/>
+                  </a:ext>
+                </a:extLst>
+              </p:cNvPr>
+              <p:cNvSpPr/>
+              <p:nvPr/>
+            </p:nvSpPr>
+            <p:spPr>
+              <a:xfrm rot="2065313">
+                <a:off x="8060122" y="5361761"/>
+                <a:ext cx="132967" cy="58269"/>
+              </a:xfrm>
+              <a:prstGeom prst="triangle">
+                <a:avLst/>
+              </a:prstGeom>
+              <a:solidFill>
+                <a:schemeClr val="tx1"/>
+              </a:solidFill>
+              <a:ln>
+                <a:solidFill>
+                  <a:schemeClr val="tx1"/>
+                </a:solidFill>
+              </a:ln>
+            </p:spPr>
+            <p:style>
+              <a:lnRef idx="2">
+                <a:schemeClr val="accent1">
+                  <a:shade val="50000"/>
+                </a:schemeClr>
+              </a:lnRef>
+              <a:fillRef idx="1">
+                <a:schemeClr val="accent1"/>
+              </a:fillRef>
+              <a:effectRef idx="0">
+                <a:schemeClr val="accent1"/>
+              </a:effectRef>
+              <a:fontRef idx="minor">
+                <a:schemeClr val="lt1"/>
+              </a:fontRef>
+            </p:style>
+            <p:txBody>
+              <a:bodyPr rtlCol="0" anchor="ctr"/>
+              <a:lstStyle/>
+              <a:p>
+                <a:pPr algn="ctr"/>
+                <a:endParaRPr lang="en-US"/>
+              </a:p>
+            </p:txBody>
+          </p:sp>
+        </p:grpSp>
+      </p:grpSp>
+      <p:grpSp>
+        <p:nvGrpSpPr>
+          <p:cNvPr id="736" name="Group 735">
+            <a:extLst>
+              <a:ext uri="{FF2B5EF4-FFF2-40B4-BE49-F238E27FC236}">
+                <a16:creationId xmlns:a16="http://schemas.microsoft.com/office/drawing/2014/main" id="{03BF0C69-91AD-144D-9768-FDE5B89D9455}"/>
+              </a:ext>
+            </a:extLst>
+          </p:cNvPr>
+          <p:cNvGrpSpPr/>
+          <p:nvPr/>
+        </p:nvGrpSpPr>
+        <p:grpSpPr>
+          <a:xfrm>
+            <a:off x="9184920" y="5459109"/>
+            <a:ext cx="848993" cy="1123265"/>
+            <a:chOff x="8399030" y="5756490"/>
+            <a:chExt cx="673849" cy="891543"/>
+          </a:xfrm>
+        </p:grpSpPr>
+        <p:sp>
+          <p:nvSpPr>
+            <p:cNvPr id="761" name="Rectangle 760">
+              <a:extLst>
+                <a:ext uri="{FF2B5EF4-FFF2-40B4-BE49-F238E27FC236}">
+                  <a16:creationId xmlns:a16="http://schemas.microsoft.com/office/drawing/2014/main" id="{07FDBD58-EB84-4244-B6FA-BB218AA6211C}"/>
+                </a:ext>
+              </a:extLst>
+            </p:cNvPr>
+            <p:cNvSpPr/>
+            <p:nvPr/>
+          </p:nvSpPr>
+          <p:spPr>
+            <a:xfrm>
+              <a:off x="8399030" y="5756490"/>
+              <a:ext cx="673849" cy="891543"/>
+            </a:xfrm>
+            <a:prstGeom prst="rect">
+              <a:avLst/>
+            </a:prstGeom>
+            <a:solidFill>
+              <a:schemeClr val="bg1"/>
+            </a:solidFill>
+            <a:ln w="38100">
+              <a:solidFill>
+                <a:schemeClr val="tx1"/>
+              </a:solidFill>
+            </a:ln>
+          </p:spPr>
+          <p:style>
+            <a:lnRef idx="2">
+              <a:schemeClr val="accent1">
+                <a:shade val="50000"/>
+              </a:schemeClr>
+            </a:lnRef>
+            <a:fillRef idx="1">
+              <a:schemeClr val="accent1"/>
+            </a:fillRef>
+            <a:effectRef idx="0">
+              <a:schemeClr val="accent1"/>
+            </a:effectRef>
+            <a:fontRef idx="minor">
+              <a:schemeClr val="lt1"/>
+            </a:fontRef>
+          </p:style>
+          <p:txBody>
+            <a:bodyPr rtlCol="0" anchor="ctr"/>
+            <a:lstStyle/>
+            <a:p>
+              <a:pPr algn="ctr"/>
+              <a:endParaRPr lang="en-US"/>
+            </a:p>
+          </p:txBody>
+        </p:sp>
+        <p:cxnSp>
+          <p:nvCxnSpPr>
+            <p:cNvPr id="764" name="Straight Connector 763">
+              <a:extLst>
+                <a:ext uri="{FF2B5EF4-FFF2-40B4-BE49-F238E27FC236}">
+                  <a16:creationId xmlns:a16="http://schemas.microsoft.com/office/drawing/2014/main" id="{2985525B-9AF8-3241-ADB5-FC2ABC1A3041}"/>
+                </a:ext>
+              </a:extLst>
+            </p:cNvPr>
+            <p:cNvCxnSpPr>
+              <a:cxnSpLocks/>
+            </p:cNvCxnSpPr>
+            <p:nvPr/>
+          </p:nvCxnSpPr>
+          <p:spPr>
+            <a:xfrm>
+              <a:off x="8496215" y="5861232"/>
+              <a:ext cx="471094" cy="0"/>
+            </a:xfrm>
+            <a:prstGeom prst="line">
+              <a:avLst/>
+            </a:prstGeom>
+            <a:ln w="38100">
+              <a:solidFill>
+                <a:schemeClr val="tx1"/>
+              </a:solidFill>
+            </a:ln>
+          </p:spPr>
+          <p:style>
+            <a:lnRef idx="1">
+              <a:schemeClr val="accent1"/>
+            </a:lnRef>
+            <a:fillRef idx="0">
+              <a:schemeClr val="accent1"/>
+            </a:fillRef>
+            <a:effectRef idx="0">
+              <a:schemeClr val="accent1"/>
+            </a:effectRef>
+            <a:fontRef idx="minor">
+              <a:schemeClr val="tx1"/>
+            </a:fontRef>
+          </p:style>
+        </p:cxnSp>
+        <p:cxnSp>
+          <p:nvCxnSpPr>
+            <p:cNvPr id="765" name="Straight Connector 764">
+              <a:extLst>
+                <a:ext uri="{FF2B5EF4-FFF2-40B4-BE49-F238E27FC236}">
+                  <a16:creationId xmlns:a16="http://schemas.microsoft.com/office/drawing/2014/main" id="{2D72D943-F6D9-F749-AE1E-10EA8860CDF0}"/>
+                </a:ext>
+              </a:extLst>
+            </p:cNvPr>
+            <p:cNvCxnSpPr>
+              <a:cxnSpLocks/>
+            </p:cNvCxnSpPr>
+            <p:nvPr/>
+          </p:nvCxnSpPr>
+          <p:spPr>
+            <a:xfrm>
+              <a:off x="8484532" y="5968828"/>
+              <a:ext cx="205956" cy="0"/>
+            </a:xfrm>
+            <a:prstGeom prst="line">
+              <a:avLst/>
+            </a:prstGeom>
+            <a:ln w="28575">
+              <a:solidFill>
+                <a:schemeClr val="tx1"/>
+              </a:solidFill>
+            </a:ln>
+          </p:spPr>
+          <p:style>
+            <a:lnRef idx="1">
+              <a:schemeClr val="accent1"/>
+            </a:lnRef>
+            <a:fillRef idx="0">
+              <a:schemeClr val="accent1"/>
+            </a:fillRef>
+            <a:effectRef idx="0">
+              <a:schemeClr val="accent1"/>
+            </a:effectRef>
+            <a:fontRef idx="minor">
+              <a:schemeClr val="tx1"/>
+            </a:fontRef>
+          </p:style>
+        </p:cxnSp>
+        <p:cxnSp>
+          <p:nvCxnSpPr>
+            <p:cNvPr id="770" name="Straight Connector 769">
+              <a:extLst>
+                <a:ext uri="{FF2B5EF4-FFF2-40B4-BE49-F238E27FC236}">
+                  <a16:creationId xmlns:a16="http://schemas.microsoft.com/office/drawing/2014/main" id="{A69FF889-58B5-4C42-93C4-922318BFE9F4}"/>
+                </a:ext>
+              </a:extLst>
+            </p:cNvPr>
+            <p:cNvCxnSpPr>
+              <a:cxnSpLocks/>
+            </p:cNvCxnSpPr>
+            <p:nvPr/>
+          </p:nvCxnSpPr>
+          <p:spPr>
+            <a:xfrm>
+              <a:off x="8484532" y="6043743"/>
+              <a:ext cx="205956" cy="0"/>
+            </a:xfrm>
+            <a:prstGeom prst="line">
+              <a:avLst/>
+            </a:prstGeom>
+            <a:ln w="28575">
+              <a:solidFill>
+                <a:schemeClr val="tx1"/>
+              </a:solidFill>
+            </a:ln>
+          </p:spPr>
+          <p:style>
+            <a:lnRef idx="1">
+              <a:schemeClr val="accent1"/>
+            </a:lnRef>
+            <a:fillRef idx="0">
+              <a:schemeClr val="accent1"/>
+            </a:fillRef>
+            <a:effectRef idx="0">
+              <a:schemeClr val="accent1"/>
+            </a:effectRef>
+            <a:fontRef idx="minor">
+              <a:schemeClr val="tx1"/>
+            </a:fontRef>
+          </p:style>
+        </p:cxnSp>
+        <p:cxnSp>
+          <p:nvCxnSpPr>
+            <p:cNvPr id="804" name="Straight Connector 803">
+              <a:extLst>
+                <a:ext uri="{FF2B5EF4-FFF2-40B4-BE49-F238E27FC236}">
+                  <a16:creationId xmlns:a16="http://schemas.microsoft.com/office/drawing/2014/main" id="{D972E1B1-E838-654C-B752-B3EFC40274B7}"/>
+                </a:ext>
+              </a:extLst>
+            </p:cNvPr>
+            <p:cNvCxnSpPr>
+              <a:cxnSpLocks/>
+            </p:cNvCxnSpPr>
+            <p:nvPr/>
+          </p:nvCxnSpPr>
+          <p:spPr>
+            <a:xfrm>
+              <a:off x="8484532" y="6118658"/>
+              <a:ext cx="205956" cy="0"/>
+            </a:xfrm>
+            <a:prstGeom prst="line">
+              <a:avLst/>
+            </a:prstGeom>
+            <a:ln w="28575">
+              <a:solidFill>
+                <a:schemeClr val="tx1"/>
+              </a:solidFill>
+            </a:ln>
+          </p:spPr>
+          <p:style>
+            <a:lnRef idx="1">
+              <a:schemeClr val="accent1"/>
+            </a:lnRef>
+            <a:fillRef idx="0">
+              <a:schemeClr val="accent1"/>
+            </a:fillRef>
+            <a:effectRef idx="0">
+              <a:schemeClr val="accent1"/>
+            </a:effectRef>
+            <a:fontRef idx="minor">
+              <a:schemeClr val="tx1"/>
+            </a:fontRef>
+          </p:style>
+        </p:cxnSp>
+        <p:cxnSp>
+          <p:nvCxnSpPr>
+            <p:cNvPr id="805" name="Straight Connector 804">
+              <a:extLst>
+                <a:ext uri="{FF2B5EF4-FFF2-40B4-BE49-F238E27FC236}">
+                  <a16:creationId xmlns:a16="http://schemas.microsoft.com/office/drawing/2014/main" id="{FAF86FA5-D690-3E4A-82DF-CBC4B99AE35F}"/>
+                </a:ext>
+              </a:extLst>
+            </p:cNvPr>
+            <p:cNvCxnSpPr>
+              <a:cxnSpLocks/>
+            </p:cNvCxnSpPr>
+            <p:nvPr/>
+          </p:nvCxnSpPr>
+          <p:spPr>
+            <a:xfrm>
+              <a:off x="8484532" y="6193573"/>
+              <a:ext cx="205956" cy="0"/>
+            </a:xfrm>
+            <a:prstGeom prst="line">
+              <a:avLst/>
+            </a:prstGeom>
+            <a:ln w="28575">
+              <a:solidFill>
+                <a:schemeClr val="tx1"/>
+              </a:solidFill>
+            </a:ln>
+          </p:spPr>
+          <p:style>
+            <a:lnRef idx="1">
+              <a:schemeClr val="accent1"/>
+            </a:lnRef>
+            <a:fillRef idx="0">
+              <a:schemeClr val="accent1"/>
+            </a:fillRef>
+            <a:effectRef idx="0">
+              <a:schemeClr val="accent1"/>
+            </a:effectRef>
+            <a:fontRef idx="minor">
+              <a:schemeClr val="tx1"/>
+            </a:fontRef>
+          </p:style>
+        </p:cxnSp>
+        <p:cxnSp>
+          <p:nvCxnSpPr>
+            <p:cNvPr id="806" name="Straight Connector 805">
+              <a:extLst>
+                <a:ext uri="{FF2B5EF4-FFF2-40B4-BE49-F238E27FC236}">
+                  <a16:creationId xmlns:a16="http://schemas.microsoft.com/office/drawing/2014/main" id="{11D1CEF7-674A-A247-9468-2E3317DF82F9}"/>
+                </a:ext>
+              </a:extLst>
+            </p:cNvPr>
+            <p:cNvCxnSpPr>
+              <a:cxnSpLocks/>
+            </p:cNvCxnSpPr>
+            <p:nvPr/>
+          </p:nvCxnSpPr>
+          <p:spPr>
+            <a:xfrm>
+              <a:off x="8484532" y="6268489"/>
+              <a:ext cx="205956" cy="0"/>
+            </a:xfrm>
+            <a:prstGeom prst="line">
+              <a:avLst/>
+            </a:prstGeom>
+            <a:ln w="28575">
+              <a:solidFill>
+                <a:schemeClr val="tx1"/>
+              </a:solidFill>
+            </a:ln>
+          </p:spPr>
+          <p:style>
+            <a:lnRef idx="1">
+              <a:schemeClr val="accent1"/>
+            </a:lnRef>
+            <a:fillRef idx="0">
+              <a:schemeClr val="accent1"/>
+            </a:fillRef>
+            <a:effectRef idx="0">
+              <a:schemeClr val="accent1"/>
+            </a:effectRef>
+            <a:fontRef idx="minor">
+              <a:schemeClr val="tx1"/>
+            </a:fontRef>
+          </p:style>
+        </p:cxnSp>
+        <p:cxnSp>
+          <p:nvCxnSpPr>
+            <p:cNvPr id="808" name="Straight Connector 807">
+              <a:extLst>
+                <a:ext uri="{FF2B5EF4-FFF2-40B4-BE49-F238E27FC236}">
+                  <a16:creationId xmlns:a16="http://schemas.microsoft.com/office/drawing/2014/main" id="{8D082DA4-2307-4F4B-AE77-45C4B273AD96}"/>
+                </a:ext>
+              </a:extLst>
+            </p:cNvPr>
+            <p:cNvCxnSpPr>
+              <a:cxnSpLocks/>
+            </p:cNvCxnSpPr>
+            <p:nvPr/>
+          </p:nvCxnSpPr>
+          <p:spPr>
+            <a:xfrm>
+              <a:off x="8484528" y="6343404"/>
+              <a:ext cx="205956" cy="0"/>
+            </a:xfrm>
+            <a:prstGeom prst="line">
+              <a:avLst/>
+            </a:prstGeom>
+            <a:ln w="28575">
+              <a:solidFill>
+                <a:schemeClr val="tx1"/>
+              </a:solidFill>
+            </a:ln>
+          </p:spPr>
+          <p:style>
+            <a:lnRef idx="1">
+              <a:schemeClr val="accent1"/>
+            </a:lnRef>
+            <a:fillRef idx="0">
+              <a:schemeClr val="accent1"/>
+            </a:fillRef>
+            <a:effectRef idx="0">
+              <a:schemeClr val="accent1"/>
+            </a:effectRef>
+            <a:fontRef idx="minor">
+              <a:schemeClr val="tx1"/>
+            </a:fontRef>
+          </p:style>
+        </p:cxnSp>
+        <p:cxnSp>
+          <p:nvCxnSpPr>
+            <p:cNvPr id="809" name="Straight Connector 808">
+              <a:extLst>
+                <a:ext uri="{FF2B5EF4-FFF2-40B4-BE49-F238E27FC236}">
+                  <a16:creationId xmlns:a16="http://schemas.microsoft.com/office/drawing/2014/main" id="{4E8C82A6-F65F-494B-8611-66DE2E6907CA}"/>
+                </a:ext>
+              </a:extLst>
+            </p:cNvPr>
+            <p:cNvCxnSpPr>
+              <a:cxnSpLocks/>
+            </p:cNvCxnSpPr>
+            <p:nvPr/>
+          </p:nvCxnSpPr>
+          <p:spPr>
+            <a:xfrm>
+              <a:off x="8761350" y="6194374"/>
+              <a:ext cx="205956" cy="0"/>
+            </a:xfrm>
+            <a:prstGeom prst="line">
+              <a:avLst/>
+            </a:prstGeom>
+            <a:ln w="28575">
+              <a:solidFill>
+                <a:schemeClr val="tx1"/>
+              </a:solidFill>
+            </a:ln>
+          </p:spPr>
+          <p:style>
+            <a:lnRef idx="1">
+              <a:schemeClr val="accent1"/>
+            </a:lnRef>
+            <a:fillRef idx="0">
+              <a:schemeClr val="accent1"/>
+            </a:fillRef>
+            <a:effectRef idx="0">
+              <a:schemeClr val="accent1"/>
+            </a:effectRef>
+            <a:fontRef idx="minor">
+              <a:schemeClr val="tx1"/>
+            </a:fontRef>
+          </p:style>
+        </p:cxnSp>
+        <p:cxnSp>
+          <p:nvCxnSpPr>
+            <p:cNvPr id="810" name="Straight Connector 809">
+              <a:extLst>
+                <a:ext uri="{FF2B5EF4-FFF2-40B4-BE49-F238E27FC236}">
+                  <a16:creationId xmlns:a16="http://schemas.microsoft.com/office/drawing/2014/main" id="{7F1DC44F-1A08-DE49-B2DD-32D7D8339BCF}"/>
+                </a:ext>
+              </a:extLst>
+            </p:cNvPr>
+            <p:cNvCxnSpPr>
+              <a:cxnSpLocks/>
+            </p:cNvCxnSpPr>
+            <p:nvPr/>
+          </p:nvCxnSpPr>
+          <p:spPr>
+            <a:xfrm>
+              <a:off x="8761350" y="6269289"/>
+              <a:ext cx="205956" cy="0"/>
+            </a:xfrm>
+            <a:prstGeom prst="line">
+              <a:avLst/>
+            </a:prstGeom>
+            <a:ln w="28575">
+              <a:solidFill>
+                <a:schemeClr val="tx1"/>
+              </a:solidFill>
+            </a:ln>
+          </p:spPr>
+          <p:style>
+            <a:lnRef idx="1">
+              <a:schemeClr val="accent1"/>
+            </a:lnRef>
+            <a:fillRef idx="0">
+              <a:schemeClr val="accent1"/>
+            </a:fillRef>
+            <a:effectRef idx="0">
+              <a:schemeClr val="accent1"/>
+            </a:effectRef>
+            <a:fontRef idx="minor">
+              <a:schemeClr val="tx1"/>
+            </a:fontRef>
+          </p:style>
+        </p:cxnSp>
+        <p:cxnSp>
+          <p:nvCxnSpPr>
+            <p:cNvPr id="811" name="Straight Connector 810">
+              <a:extLst>
+                <a:ext uri="{FF2B5EF4-FFF2-40B4-BE49-F238E27FC236}">
+                  <a16:creationId xmlns:a16="http://schemas.microsoft.com/office/drawing/2014/main" id="{774821E6-3754-4D49-A1A5-4A534A2D4DCE}"/>
+                </a:ext>
+              </a:extLst>
+            </p:cNvPr>
+            <p:cNvCxnSpPr>
+              <a:cxnSpLocks/>
+            </p:cNvCxnSpPr>
+            <p:nvPr/>
+          </p:nvCxnSpPr>
+          <p:spPr>
+            <a:xfrm>
+              <a:off x="8761350" y="6344204"/>
+              <a:ext cx="205956" cy="0"/>
+            </a:xfrm>
+            <a:prstGeom prst="line">
+              <a:avLst/>
+            </a:prstGeom>
+            <a:ln w="28575">
+              <a:solidFill>
+                <a:schemeClr val="tx1"/>
+              </a:solidFill>
+            </a:ln>
+          </p:spPr>
+          <p:style>
+            <a:lnRef idx="1">
+              <a:schemeClr val="accent1"/>
+            </a:lnRef>
+            <a:fillRef idx="0">
+              <a:schemeClr val="accent1"/>
+            </a:fillRef>
+            <a:effectRef idx="0">
+              <a:schemeClr val="accent1"/>
+            </a:effectRef>
+            <a:fontRef idx="minor">
+              <a:schemeClr val="tx1"/>
+            </a:fontRef>
+          </p:style>
+        </p:cxnSp>
+        <p:cxnSp>
+          <p:nvCxnSpPr>
+            <p:cNvPr id="812" name="Straight Connector 811">
+              <a:extLst>
+                <a:ext uri="{FF2B5EF4-FFF2-40B4-BE49-F238E27FC236}">
+                  <a16:creationId xmlns:a16="http://schemas.microsoft.com/office/drawing/2014/main" id="{71F7CE68-5A41-0247-B2C5-1BE61298486B}"/>
+                </a:ext>
+              </a:extLst>
+            </p:cNvPr>
+            <p:cNvCxnSpPr>
+              <a:cxnSpLocks/>
+            </p:cNvCxnSpPr>
+            <p:nvPr/>
+          </p:nvCxnSpPr>
+          <p:spPr>
+            <a:xfrm>
+              <a:off x="8761350" y="6419119"/>
+              <a:ext cx="205956" cy="0"/>
+            </a:xfrm>
+            <a:prstGeom prst="line">
+              <a:avLst/>
+            </a:prstGeom>
+            <a:ln w="28575">
+              <a:solidFill>
+                <a:schemeClr val="tx1"/>
+              </a:solidFill>
+            </a:ln>
+          </p:spPr>
+          <p:style>
+            <a:lnRef idx="1">
+              <a:schemeClr val="accent1"/>
+            </a:lnRef>
+            <a:fillRef idx="0">
+              <a:schemeClr val="accent1"/>
+            </a:fillRef>
+            <a:effectRef idx="0">
+              <a:schemeClr val="accent1"/>
+            </a:effectRef>
+            <a:fontRef idx="minor">
+              <a:schemeClr val="tx1"/>
+            </a:fontRef>
+          </p:style>
+        </p:cxnSp>
+        <p:cxnSp>
+          <p:nvCxnSpPr>
+            <p:cNvPr id="813" name="Straight Connector 812">
+              <a:extLst>
+                <a:ext uri="{FF2B5EF4-FFF2-40B4-BE49-F238E27FC236}">
+                  <a16:creationId xmlns:a16="http://schemas.microsoft.com/office/drawing/2014/main" id="{3A06555B-0656-5841-8CB1-A4830BE264B5}"/>
+                </a:ext>
+              </a:extLst>
+            </p:cNvPr>
+            <p:cNvCxnSpPr>
+              <a:cxnSpLocks/>
+            </p:cNvCxnSpPr>
+            <p:nvPr/>
+          </p:nvCxnSpPr>
+          <p:spPr>
+            <a:xfrm>
+              <a:off x="8761350" y="6494034"/>
+              <a:ext cx="205956" cy="0"/>
+            </a:xfrm>
+            <a:prstGeom prst="line">
+              <a:avLst/>
+            </a:prstGeom>
+            <a:ln w="28575">
+              <a:solidFill>
+                <a:schemeClr val="tx1"/>
+              </a:solidFill>
+            </a:ln>
+          </p:spPr>
+          <p:style>
+            <a:lnRef idx="1">
+              <a:schemeClr val="accent1"/>
+            </a:lnRef>
+            <a:fillRef idx="0">
+              <a:schemeClr val="accent1"/>
+            </a:fillRef>
+            <a:effectRef idx="0">
+              <a:schemeClr val="accent1"/>
+            </a:effectRef>
+            <a:fontRef idx="minor">
+              <a:schemeClr val="tx1"/>
+            </a:fontRef>
+          </p:style>
+        </p:cxnSp>
+        <p:cxnSp>
+          <p:nvCxnSpPr>
+            <p:cNvPr id="814" name="Straight Connector 813">
+              <a:extLst>
+                <a:ext uri="{FF2B5EF4-FFF2-40B4-BE49-F238E27FC236}">
+                  <a16:creationId xmlns:a16="http://schemas.microsoft.com/office/drawing/2014/main" id="{27EC3E46-C357-8D48-B39C-AE7A152B7862}"/>
+                </a:ext>
+              </a:extLst>
+            </p:cNvPr>
+            <p:cNvCxnSpPr>
+              <a:cxnSpLocks/>
+            </p:cNvCxnSpPr>
+            <p:nvPr/>
+          </p:nvCxnSpPr>
+          <p:spPr>
+            <a:xfrm>
+              <a:off x="8761356" y="6568951"/>
+              <a:ext cx="205956" cy="0"/>
+            </a:xfrm>
+            <a:prstGeom prst="line">
+              <a:avLst/>
+            </a:prstGeom>
+            <a:ln w="28575">
+              <a:solidFill>
+                <a:schemeClr val="tx1"/>
+              </a:solidFill>
+            </a:ln>
+          </p:spPr>
+          <p:style>
+            <a:lnRef idx="1">
+              <a:schemeClr val="accent1"/>
+            </a:lnRef>
+            <a:fillRef idx="0">
+              <a:schemeClr val="accent1"/>
+            </a:fillRef>
+            <a:effectRef idx="0">
+              <a:schemeClr val="accent1"/>
+            </a:effectRef>
+            <a:fontRef idx="minor">
+              <a:schemeClr val="tx1"/>
+            </a:fontRef>
+          </p:style>
+        </p:cxnSp>
+        <p:sp>
+          <p:nvSpPr>
+            <p:cNvPr id="815" name="Rectangle 814">
+              <a:extLst>
+                <a:ext uri="{FF2B5EF4-FFF2-40B4-BE49-F238E27FC236}">
+                  <a16:creationId xmlns:a16="http://schemas.microsoft.com/office/drawing/2014/main" id="{06BF8F22-88D7-1A47-9048-6FDB1C9B0443}"/>
+                </a:ext>
+              </a:extLst>
+            </p:cNvPr>
+            <p:cNvSpPr/>
+            <p:nvPr/>
+          </p:nvSpPr>
+          <p:spPr>
+            <a:xfrm>
+              <a:off x="8761351" y="5953668"/>
+              <a:ext cx="205956" cy="180142"/>
+            </a:xfrm>
+            <a:prstGeom prst="rect">
+              <a:avLst/>
+            </a:prstGeom>
+            <a:solidFill>
+              <a:schemeClr val="bg1"/>
+            </a:solidFill>
+            <a:ln w="19050">
+              <a:solidFill>
+                <a:schemeClr val="tx1"/>
+              </a:solidFill>
+            </a:ln>
+          </p:spPr>
+          <p:style>
+            <a:lnRef idx="2">
+              <a:schemeClr val="accent1">
+                <a:shade val="50000"/>
+              </a:schemeClr>
+            </a:lnRef>
+            <a:fillRef idx="1">
+              <a:schemeClr val="accent1"/>
+            </a:fillRef>
+            <a:effectRef idx="0">
+              <a:schemeClr val="accent1"/>
+            </a:effectRef>
+            <a:fontRef idx="minor">
+              <a:schemeClr val="lt1"/>
+            </a:fontRef>
+          </p:style>
+          <p:txBody>
+            <a:bodyPr rtlCol="0" anchor="ctr"/>
+            <a:lstStyle/>
+            <a:p>
+              <a:pPr algn="ctr"/>
+              <a:endParaRPr lang="en-US"/>
+            </a:p>
+          </p:txBody>
+        </p:sp>
+        <p:sp>
+          <p:nvSpPr>
+            <p:cNvPr id="816" name="Rectangle 815">
+              <a:extLst>
+                <a:ext uri="{FF2B5EF4-FFF2-40B4-BE49-F238E27FC236}">
+                  <a16:creationId xmlns:a16="http://schemas.microsoft.com/office/drawing/2014/main" id="{7C08B0FE-9B5A-C84C-80CC-D0879D73DB80}"/>
+                </a:ext>
+              </a:extLst>
+            </p:cNvPr>
+            <p:cNvSpPr/>
+            <p:nvPr/>
+          </p:nvSpPr>
+          <p:spPr>
+            <a:xfrm>
+              <a:off x="8496220" y="6404596"/>
+              <a:ext cx="205956" cy="180142"/>
+            </a:xfrm>
+            <a:prstGeom prst="rect">
+              <a:avLst/>
+            </a:prstGeom>
+            <a:solidFill>
+              <a:schemeClr val="bg1"/>
+            </a:solidFill>
+            <a:ln w="19050">
+              <a:solidFill>
+                <a:schemeClr val="tx1"/>
+              </a:solidFill>
+            </a:ln>
+          </p:spPr>
+          <p:style>
+            <a:lnRef idx="2">
+              <a:schemeClr val="accent1">
+                <a:shade val="50000"/>
+              </a:schemeClr>
+            </a:lnRef>
+            <a:fillRef idx="1">
+              <a:schemeClr val="accent1"/>
+            </a:fillRef>
+            <a:effectRef idx="0">
+              <a:schemeClr val="accent1"/>
+            </a:effectRef>
+            <a:fontRef idx="minor">
+              <a:schemeClr val="lt1"/>
+            </a:fontRef>
+          </p:style>
+          <p:txBody>
+            <a:bodyPr rtlCol="0" anchor="ctr"/>
+            <a:lstStyle/>
+            <a:p>
+              <a:pPr algn="ctr"/>
+              <a:endParaRPr lang="en-US"/>
+            </a:p>
+          </p:txBody>
+        </p:sp>
+        <p:sp>
+          <p:nvSpPr>
+            <p:cNvPr id="817" name="Rectangle 816">
+              <a:extLst>
+                <a:ext uri="{FF2B5EF4-FFF2-40B4-BE49-F238E27FC236}">
+                  <a16:creationId xmlns:a16="http://schemas.microsoft.com/office/drawing/2014/main" id="{58EB3E6B-488D-8846-91AF-55CA1DDC1B7A}"/>
+                </a:ext>
+              </a:extLst>
+            </p:cNvPr>
+            <p:cNvSpPr/>
+            <p:nvPr/>
+          </p:nvSpPr>
+          <p:spPr>
+            <a:xfrm>
+              <a:off x="8791869" y="6011549"/>
+              <a:ext cx="54034" cy="121628"/>
+            </a:xfrm>
+            <a:prstGeom prst="rect">
+              <a:avLst/>
+            </a:prstGeom>
+            <a:solidFill>
+              <a:schemeClr val="tx1"/>
+            </a:solidFill>
+            <a:ln w="19050">
+              <a:noFill/>
+            </a:ln>
+          </p:spPr>
+          <p:style>
+            <a:lnRef idx="2">
+              <a:schemeClr val="accent1">
+                <a:shade val="50000"/>
+              </a:schemeClr>
+            </a:lnRef>
+            <a:fillRef idx="1">
+              <a:schemeClr val="accent1"/>
+            </a:fillRef>
+            <a:effectRef idx="0">
+              <a:schemeClr val="accent1"/>
+            </a:effectRef>
+            <a:fontRef idx="minor">
+              <a:schemeClr val="lt1"/>
+            </a:fontRef>
+          </p:style>
+          <p:txBody>
+            <a:bodyPr rtlCol="0" anchor="ctr"/>
+            <a:lstStyle/>
+            <a:p>
+              <a:pPr algn="ctr"/>
+              <a:endParaRPr lang="en-US"/>
+            </a:p>
+          </p:txBody>
+        </p:sp>
+        <p:sp>
+          <p:nvSpPr>
+            <p:cNvPr id="818" name="Rectangle 817">
+              <a:extLst>
+                <a:ext uri="{FF2B5EF4-FFF2-40B4-BE49-F238E27FC236}">
+                  <a16:creationId xmlns:a16="http://schemas.microsoft.com/office/drawing/2014/main" id="{0BCCFAB5-A7B1-8647-BAA9-E9EE399B2C59}"/>
+                </a:ext>
+              </a:extLst>
+            </p:cNvPr>
+            <p:cNvSpPr/>
+            <p:nvPr/>
+          </p:nvSpPr>
+          <p:spPr>
+            <a:xfrm>
+              <a:off x="8873756" y="6058784"/>
+              <a:ext cx="50859" cy="72864"/>
+            </a:xfrm>
+            <a:prstGeom prst="rect">
+              <a:avLst/>
+            </a:prstGeom>
+            <a:solidFill>
+              <a:schemeClr val="tx1"/>
+            </a:solidFill>
+            <a:ln w="19050">
+              <a:noFill/>
+            </a:ln>
+          </p:spPr>
+          <p:style>
+            <a:lnRef idx="2">
+              <a:schemeClr val="accent1">
+                <a:shade val="50000"/>
+              </a:schemeClr>
+            </a:lnRef>
+            <a:fillRef idx="1">
+              <a:schemeClr val="accent1"/>
+            </a:fillRef>
+            <a:effectRef idx="0">
+              <a:schemeClr val="accent1"/>
+            </a:effectRef>
+            <a:fontRef idx="minor">
+              <a:schemeClr val="lt1"/>
+            </a:fontRef>
+          </p:style>
+          <p:txBody>
+            <a:bodyPr rtlCol="0" anchor="ctr"/>
+            <a:lstStyle/>
+            <a:p>
+              <a:pPr algn="ctr"/>
+              <a:endParaRPr lang="en-US"/>
+            </a:p>
+          </p:txBody>
+        </p:sp>
+        <p:grpSp>
+          <p:nvGrpSpPr>
+            <p:cNvPr id="819" name="Group 818">
+              <a:extLst>
+                <a:ext uri="{FF2B5EF4-FFF2-40B4-BE49-F238E27FC236}">
+                  <a16:creationId xmlns:a16="http://schemas.microsoft.com/office/drawing/2014/main" id="{AB5ED67E-F2D0-1F4E-935B-D26E64FF4C8B}"/>
+                </a:ext>
+              </a:extLst>
+            </p:cNvPr>
+            <p:cNvGrpSpPr/>
+            <p:nvPr/>
+          </p:nvGrpSpPr>
+          <p:grpSpPr>
+            <a:xfrm>
+              <a:off x="8558798" y="6436780"/>
+              <a:ext cx="116581" cy="132641"/>
+              <a:chOff x="7996008" y="5361761"/>
+              <a:chExt cx="197081" cy="132641"/>
+            </a:xfrm>
+          </p:grpSpPr>
+          <p:cxnSp>
+            <p:nvCxnSpPr>
+              <p:cNvPr id="820" name="Elbow Connector 819">
+                <a:extLst>
+                  <a:ext uri="{FF2B5EF4-FFF2-40B4-BE49-F238E27FC236}">
+                    <a16:creationId xmlns:a16="http://schemas.microsoft.com/office/drawing/2014/main" id="{BD7728B7-1207-F34C-AE8B-ADBA98FFC546}"/>
+                  </a:ext>
+                </a:extLst>
+              </p:cNvPr>
+              <p:cNvCxnSpPr>
+                <a:cxnSpLocks/>
+              </p:cNvCxnSpPr>
+              <p:nvPr/>
+            </p:nvCxnSpPr>
+            <p:spPr>
+              <a:xfrm rot="5400000" flipH="1" flipV="1">
+                <a:off x="7996008" y="5400309"/>
+                <a:ext cx="94093" cy="94093"/>
+              </a:xfrm>
+              <a:prstGeom prst="bentConnector3">
+                <a:avLst>
+                  <a:gd name="adj1" fmla="val 46626"/>
+                </a:avLst>
+              </a:prstGeom>
+              <a:ln w="19050">
+                <a:solidFill>
+                  <a:schemeClr val="tx1"/>
+                </a:solidFill>
+              </a:ln>
+            </p:spPr>
+            <p:style>
+              <a:lnRef idx="1">
+                <a:schemeClr val="accent1"/>
+              </a:lnRef>
+              <a:fillRef idx="0">
+                <a:schemeClr val="accent1"/>
+              </a:fillRef>
+              <a:effectRef idx="0">
+                <a:schemeClr val="accent1"/>
+              </a:effectRef>
+              <a:fontRef idx="minor">
+                <a:schemeClr val="tx1"/>
+              </a:fontRef>
+            </p:style>
+          </p:cxnSp>
+          <p:sp>
+            <p:nvSpPr>
+              <p:cNvPr id="821" name="Triangle 820">
+                <a:extLst>
+                  <a:ext uri="{FF2B5EF4-FFF2-40B4-BE49-F238E27FC236}">
+                    <a16:creationId xmlns:a16="http://schemas.microsoft.com/office/drawing/2014/main" id="{83BAA2D6-D813-B449-A1CE-128D552E61E9}"/>
+                  </a:ext>
+                </a:extLst>
+              </p:cNvPr>
+              <p:cNvSpPr/>
+              <p:nvPr/>
+            </p:nvSpPr>
+            <p:spPr>
+              <a:xfrm rot="2065313">
+                <a:off x="8060122" y="5361761"/>
+                <a:ext cx="132967" cy="58269"/>
+              </a:xfrm>
+              <a:prstGeom prst="triangle">
+                <a:avLst/>
+              </a:prstGeom>
+              <a:solidFill>
+                <a:schemeClr val="tx1"/>
+              </a:solidFill>
+              <a:ln>
+                <a:solidFill>
+                  <a:schemeClr val="tx1"/>
+                </a:solidFill>
+              </a:ln>
+            </p:spPr>
+            <p:style>
+              <a:lnRef idx="2">
+                <a:schemeClr val="accent1">
+                  <a:shade val="50000"/>
+                </a:schemeClr>
+              </a:lnRef>
+              <a:fillRef idx="1">
+                <a:schemeClr val="accent1"/>
+              </a:fillRef>
+              <a:effectRef idx="0">
+                <a:schemeClr val="accent1"/>
+              </a:effectRef>
+              <a:fontRef idx="minor">
+                <a:schemeClr val="lt1"/>
+              </a:fontRef>
+            </p:style>
+            <p:txBody>
+              <a:bodyPr rtlCol="0" anchor="ctr"/>
+              <a:lstStyle/>
+              <a:p>
+                <a:pPr algn="ctr"/>
+                <a:endParaRPr lang="en-US"/>
+              </a:p>
+            </p:txBody>
+          </p:sp>
+        </p:grpSp>
+      </p:grpSp>
+      <p:grpSp>
+        <p:nvGrpSpPr>
+          <p:cNvPr id="13" name="Group 12">
+            <a:extLst>
+              <a:ext uri="{FF2B5EF4-FFF2-40B4-BE49-F238E27FC236}">
+                <a16:creationId xmlns:a16="http://schemas.microsoft.com/office/drawing/2014/main" id="{77A755A6-51ED-1F4B-B67C-328BD8BAB476}"/>
+              </a:ext>
+            </a:extLst>
+          </p:cNvPr>
+          <p:cNvGrpSpPr/>
+          <p:nvPr/>
+        </p:nvGrpSpPr>
+        <p:grpSpPr>
+          <a:xfrm>
+            <a:off x="9234349" y="5512932"/>
+            <a:ext cx="901483" cy="1158819"/>
+            <a:chOff x="9740549" y="5662549"/>
+            <a:chExt cx="715508" cy="919699"/>
+          </a:xfrm>
+        </p:grpSpPr>
+        <p:sp>
+          <p:nvSpPr>
+            <p:cNvPr id="547" name="Rectangle 546">
+              <a:extLst>
+                <a:ext uri="{FF2B5EF4-FFF2-40B4-BE49-F238E27FC236}">
+                  <a16:creationId xmlns:a16="http://schemas.microsoft.com/office/drawing/2014/main" id="{D1CD203A-E54B-7B4C-ADCC-6A92FA66063E}"/>
+                </a:ext>
+              </a:extLst>
+            </p:cNvPr>
+            <p:cNvSpPr/>
+            <p:nvPr/>
+          </p:nvSpPr>
+          <p:spPr>
+            <a:xfrm>
+              <a:off x="9762758" y="5662549"/>
+              <a:ext cx="673848" cy="891479"/>
+            </a:xfrm>
+            <a:prstGeom prst="rect">
+              <a:avLst/>
+            </a:prstGeom>
+            <a:solidFill>
+              <a:schemeClr val="bg1"/>
+            </a:solidFill>
+            <a:ln w="38100">
+              <a:solidFill>
+                <a:schemeClr val="tx1"/>
+              </a:solidFill>
+            </a:ln>
+          </p:spPr>
+          <p:style>
+            <a:lnRef idx="2">
+              <a:schemeClr val="accent1">
+                <a:shade val="50000"/>
+              </a:schemeClr>
+            </a:lnRef>
+            <a:fillRef idx="1">
+              <a:schemeClr val="accent1"/>
+            </a:fillRef>
+            <a:effectRef idx="0">
+              <a:schemeClr val="accent1"/>
+            </a:effectRef>
+            <a:fontRef idx="minor">
+              <a:schemeClr val="lt1"/>
+            </a:fontRef>
+          </p:style>
+          <p:txBody>
+            <a:bodyPr rtlCol="0" anchor="ctr"/>
+            <a:lstStyle/>
+            <a:p>
+              <a:pPr algn="ctr"/>
+              <a:endParaRPr lang="en-US"/>
+            </a:p>
+          </p:txBody>
+        </p:sp>
+        <p:cxnSp>
+          <p:nvCxnSpPr>
+            <p:cNvPr id="548" name="Straight Connector 547">
+              <a:extLst>
+                <a:ext uri="{FF2B5EF4-FFF2-40B4-BE49-F238E27FC236}">
+                  <a16:creationId xmlns:a16="http://schemas.microsoft.com/office/drawing/2014/main" id="{1EFFEB48-E3A6-3440-AEA8-5BAECC6C107E}"/>
+                </a:ext>
+              </a:extLst>
+            </p:cNvPr>
+            <p:cNvCxnSpPr>
+              <a:cxnSpLocks/>
+            </p:cNvCxnSpPr>
+            <p:nvPr/>
+          </p:nvCxnSpPr>
+          <p:spPr>
+            <a:xfrm>
+              <a:off x="9865417" y="5748397"/>
+              <a:ext cx="471093" cy="0"/>
+            </a:xfrm>
+            <a:prstGeom prst="line">
+              <a:avLst/>
+            </a:prstGeom>
+            <a:ln w="38100">
+              <a:solidFill>
+                <a:schemeClr val="tx1"/>
+              </a:solidFill>
+            </a:ln>
+          </p:spPr>
+          <p:style>
+            <a:lnRef idx="1">
+              <a:schemeClr val="accent1"/>
+            </a:lnRef>
+            <a:fillRef idx="0">
+              <a:schemeClr val="accent1"/>
+            </a:fillRef>
+            <a:effectRef idx="0">
+              <a:schemeClr val="accent1"/>
+            </a:effectRef>
+            <a:fontRef idx="minor">
+              <a:schemeClr val="tx1"/>
+            </a:fontRef>
+          </p:style>
+        </p:cxnSp>
+        <p:cxnSp>
+          <p:nvCxnSpPr>
+            <p:cNvPr id="549" name="Straight Connector 548">
+              <a:extLst>
+                <a:ext uri="{FF2B5EF4-FFF2-40B4-BE49-F238E27FC236}">
+                  <a16:creationId xmlns:a16="http://schemas.microsoft.com/office/drawing/2014/main" id="{3459E927-24F0-2645-8537-724697176103}"/>
+                </a:ext>
+              </a:extLst>
+            </p:cNvPr>
+            <p:cNvCxnSpPr>
+              <a:cxnSpLocks/>
+            </p:cNvCxnSpPr>
+            <p:nvPr/>
+          </p:nvCxnSpPr>
+          <p:spPr>
+            <a:xfrm>
+              <a:off x="9848252" y="5818922"/>
+              <a:ext cx="205955" cy="0"/>
+            </a:xfrm>
+            <a:prstGeom prst="line">
+              <a:avLst/>
+            </a:prstGeom>
+            <a:ln w="28575">
+              <a:solidFill>
+                <a:schemeClr val="tx1"/>
+              </a:solidFill>
+            </a:ln>
+          </p:spPr>
+          <p:style>
+            <a:lnRef idx="1">
+              <a:schemeClr val="accent1"/>
+            </a:lnRef>
+            <a:fillRef idx="0">
+              <a:schemeClr val="accent1"/>
+            </a:fillRef>
+            <a:effectRef idx="0">
+              <a:schemeClr val="accent1"/>
+            </a:effectRef>
+            <a:fontRef idx="minor">
+              <a:schemeClr val="tx1"/>
+            </a:fontRef>
+          </p:style>
+        </p:cxnSp>
+        <p:cxnSp>
+          <p:nvCxnSpPr>
+            <p:cNvPr id="550" name="Straight Connector 549">
+              <a:extLst>
+                <a:ext uri="{FF2B5EF4-FFF2-40B4-BE49-F238E27FC236}">
+                  <a16:creationId xmlns:a16="http://schemas.microsoft.com/office/drawing/2014/main" id="{2BE4DDBD-11E6-A548-95DA-B7584C67C651}"/>
+                </a:ext>
+              </a:extLst>
+            </p:cNvPr>
+            <p:cNvCxnSpPr>
+              <a:cxnSpLocks/>
+            </p:cNvCxnSpPr>
+            <p:nvPr/>
+          </p:nvCxnSpPr>
+          <p:spPr>
+            <a:xfrm>
+              <a:off x="9848252" y="5893832"/>
+              <a:ext cx="205955" cy="0"/>
+            </a:xfrm>
+            <a:prstGeom prst="line">
+              <a:avLst/>
+            </a:prstGeom>
+            <a:ln w="28575">
+              <a:solidFill>
+                <a:schemeClr val="tx1"/>
+              </a:solidFill>
+            </a:ln>
+          </p:spPr>
+          <p:style>
+            <a:lnRef idx="1">
+              <a:schemeClr val="accent1"/>
+            </a:lnRef>
+            <a:fillRef idx="0">
+              <a:schemeClr val="accent1"/>
+            </a:fillRef>
+            <a:effectRef idx="0">
+              <a:schemeClr val="accent1"/>
+            </a:effectRef>
+            <a:fontRef idx="minor">
+              <a:schemeClr val="tx1"/>
+            </a:fontRef>
+          </p:style>
+        </p:cxnSp>
+        <p:cxnSp>
+          <p:nvCxnSpPr>
+            <p:cNvPr id="551" name="Straight Connector 550">
+              <a:extLst>
+                <a:ext uri="{FF2B5EF4-FFF2-40B4-BE49-F238E27FC236}">
+                  <a16:creationId xmlns:a16="http://schemas.microsoft.com/office/drawing/2014/main" id="{4ABCD876-67DF-A341-A40A-12E4C82961E6}"/>
+                </a:ext>
+              </a:extLst>
+            </p:cNvPr>
+            <p:cNvCxnSpPr>
+              <a:cxnSpLocks/>
+            </p:cNvCxnSpPr>
+            <p:nvPr/>
+          </p:nvCxnSpPr>
+          <p:spPr>
+            <a:xfrm>
+              <a:off x="9848252" y="5968742"/>
+              <a:ext cx="148593" cy="0"/>
+            </a:xfrm>
+            <a:prstGeom prst="line">
+              <a:avLst/>
+            </a:prstGeom>
+            <a:ln w="28575">
+              <a:solidFill>
+                <a:schemeClr val="tx1"/>
+              </a:solidFill>
+            </a:ln>
+          </p:spPr>
+          <p:style>
+            <a:lnRef idx="1">
+              <a:schemeClr val="accent1"/>
+            </a:lnRef>
+            <a:fillRef idx="0">
+              <a:schemeClr val="accent1"/>
+            </a:fillRef>
+            <a:effectRef idx="0">
+              <a:schemeClr val="accent1"/>
+            </a:effectRef>
+            <a:fontRef idx="minor">
+              <a:schemeClr val="tx1"/>
+            </a:fontRef>
+          </p:style>
+        </p:cxnSp>
+        <p:cxnSp>
+          <p:nvCxnSpPr>
+            <p:cNvPr id="552" name="Straight Connector 551">
+              <a:extLst>
+                <a:ext uri="{FF2B5EF4-FFF2-40B4-BE49-F238E27FC236}">
+                  <a16:creationId xmlns:a16="http://schemas.microsoft.com/office/drawing/2014/main" id="{8A64EAE7-6B03-9747-A1A3-F131193D71C9}"/>
+                </a:ext>
+              </a:extLst>
+            </p:cNvPr>
+            <p:cNvCxnSpPr>
+              <a:cxnSpLocks/>
+            </p:cNvCxnSpPr>
+            <p:nvPr/>
+          </p:nvCxnSpPr>
+          <p:spPr>
+            <a:xfrm>
+              <a:off x="9848252" y="6043652"/>
+              <a:ext cx="205955" cy="0"/>
+            </a:xfrm>
+            <a:prstGeom prst="line">
+              <a:avLst/>
+            </a:prstGeom>
+            <a:ln w="28575">
+              <a:solidFill>
+                <a:schemeClr val="tx1"/>
+              </a:solidFill>
+            </a:ln>
+          </p:spPr>
+          <p:style>
+            <a:lnRef idx="1">
+              <a:schemeClr val="accent1"/>
+            </a:lnRef>
+            <a:fillRef idx="0">
+              <a:schemeClr val="accent1"/>
+            </a:fillRef>
+            <a:effectRef idx="0">
+              <a:schemeClr val="accent1"/>
+            </a:effectRef>
+            <a:fontRef idx="minor">
+              <a:schemeClr val="tx1"/>
+            </a:fontRef>
+          </p:style>
+        </p:cxnSp>
+        <p:cxnSp>
+          <p:nvCxnSpPr>
+            <p:cNvPr id="555" name="Straight Connector 554">
+              <a:extLst>
+                <a:ext uri="{FF2B5EF4-FFF2-40B4-BE49-F238E27FC236}">
+                  <a16:creationId xmlns:a16="http://schemas.microsoft.com/office/drawing/2014/main" id="{2A73728F-0AAD-454B-991E-59F99E36E968}"/>
+                </a:ext>
+              </a:extLst>
+            </p:cNvPr>
+            <p:cNvCxnSpPr>
+              <a:cxnSpLocks/>
+            </p:cNvCxnSpPr>
+            <p:nvPr/>
+          </p:nvCxnSpPr>
+          <p:spPr>
+            <a:xfrm>
+              <a:off x="10125073" y="6044452"/>
+              <a:ext cx="205955" cy="0"/>
+            </a:xfrm>
+            <a:prstGeom prst="line">
+              <a:avLst/>
+            </a:prstGeom>
+            <a:ln w="28575">
+              <a:solidFill>
+                <a:schemeClr val="tx1"/>
+              </a:solidFill>
+            </a:ln>
+          </p:spPr>
+          <p:style>
+            <a:lnRef idx="1">
+              <a:schemeClr val="accent1"/>
+            </a:lnRef>
+            <a:fillRef idx="0">
+              <a:schemeClr val="accent1"/>
+            </a:fillRef>
+            <a:effectRef idx="0">
+              <a:schemeClr val="accent1"/>
+            </a:effectRef>
+            <a:fontRef idx="minor">
+              <a:schemeClr val="tx1"/>
+            </a:fontRef>
+          </p:style>
+        </p:cxnSp>
+        <p:sp>
+          <p:nvSpPr>
+            <p:cNvPr id="561" name="Rectangle 560">
+              <a:extLst>
+                <a:ext uri="{FF2B5EF4-FFF2-40B4-BE49-F238E27FC236}">
+                  <a16:creationId xmlns:a16="http://schemas.microsoft.com/office/drawing/2014/main" id="{23146DE2-A19C-6648-B702-B4105E01327E}"/>
+                </a:ext>
+              </a:extLst>
+            </p:cNvPr>
+            <p:cNvSpPr/>
+            <p:nvPr/>
+          </p:nvSpPr>
+          <p:spPr>
+            <a:xfrm>
+              <a:off x="10125073" y="5803769"/>
+              <a:ext cx="205955" cy="180129"/>
+            </a:xfrm>
+            <a:prstGeom prst="rect">
+              <a:avLst/>
+            </a:prstGeom>
+            <a:solidFill>
+              <a:schemeClr val="bg1"/>
+            </a:solidFill>
+            <a:ln w="19050">
+              <a:solidFill>
+                <a:schemeClr val="tx1"/>
+              </a:solidFill>
+            </a:ln>
+          </p:spPr>
+          <p:style>
+            <a:lnRef idx="2">
+              <a:schemeClr val="accent1">
+                <a:shade val="50000"/>
+              </a:schemeClr>
+            </a:lnRef>
+            <a:fillRef idx="1">
+              <a:schemeClr val="accent1"/>
+            </a:fillRef>
+            <a:effectRef idx="0">
+              <a:schemeClr val="accent1"/>
+            </a:effectRef>
+            <a:fontRef idx="minor">
+              <a:schemeClr val="lt1"/>
+            </a:fontRef>
+          </p:style>
+          <p:txBody>
+            <a:bodyPr rtlCol="0" anchor="ctr"/>
+            <a:lstStyle/>
+            <a:p>
+              <a:pPr algn="ctr"/>
+              <a:endParaRPr lang="en-US"/>
+            </a:p>
+          </p:txBody>
+        </p:sp>
+        <p:sp>
+          <p:nvSpPr>
+            <p:cNvPr id="563" name="Rectangle 562">
+              <a:extLst>
+                <a:ext uri="{FF2B5EF4-FFF2-40B4-BE49-F238E27FC236}">
+                  <a16:creationId xmlns:a16="http://schemas.microsoft.com/office/drawing/2014/main" id="{32ED95CC-4718-954D-956D-8C1FCD6A11AD}"/>
+                </a:ext>
+              </a:extLst>
+            </p:cNvPr>
+            <p:cNvSpPr/>
+            <p:nvPr/>
+          </p:nvSpPr>
+          <p:spPr>
+            <a:xfrm>
+              <a:off x="10155584" y="5861650"/>
+              <a:ext cx="54034" cy="121620"/>
+            </a:xfrm>
+            <a:prstGeom prst="rect">
+              <a:avLst/>
+            </a:prstGeom>
+            <a:solidFill>
+              <a:schemeClr val="tx1"/>
+            </a:solidFill>
+            <a:ln w="19050">
+              <a:noFill/>
+            </a:ln>
+          </p:spPr>
+          <p:style>
+            <a:lnRef idx="2">
+              <a:schemeClr val="accent1">
+                <a:shade val="50000"/>
+              </a:schemeClr>
+            </a:lnRef>
+            <a:fillRef idx="1">
+              <a:schemeClr val="accent1"/>
+            </a:fillRef>
+            <a:effectRef idx="0">
+              <a:schemeClr val="accent1"/>
+            </a:effectRef>
+            <a:fontRef idx="minor">
+              <a:schemeClr val="lt1"/>
+            </a:fontRef>
+          </p:style>
+          <p:txBody>
+            <a:bodyPr rtlCol="0" anchor="ctr"/>
+            <a:lstStyle/>
+            <a:p>
+              <a:pPr algn="ctr"/>
+              <a:endParaRPr lang="en-US"/>
+            </a:p>
+          </p:txBody>
+        </p:sp>
+        <p:sp>
+          <p:nvSpPr>
+            <p:cNvPr id="564" name="Rectangle 563">
+              <a:extLst>
+                <a:ext uri="{FF2B5EF4-FFF2-40B4-BE49-F238E27FC236}">
+                  <a16:creationId xmlns:a16="http://schemas.microsoft.com/office/drawing/2014/main" id="{F422F0C3-591F-AA47-B506-25AD9E813D60}"/>
+                </a:ext>
+              </a:extLst>
+            </p:cNvPr>
+            <p:cNvSpPr/>
+            <p:nvPr/>
+          </p:nvSpPr>
+          <p:spPr>
+            <a:xfrm>
+              <a:off x="10237469" y="5908873"/>
+              <a:ext cx="50859" cy="72859"/>
+            </a:xfrm>
+            <a:prstGeom prst="rect">
+              <a:avLst/>
+            </a:prstGeom>
+            <a:solidFill>
+              <a:schemeClr val="tx1"/>
+            </a:solidFill>
+            <a:ln w="19050">
+              <a:noFill/>
+            </a:ln>
+          </p:spPr>
+          <p:style>
+            <a:lnRef idx="2">
+              <a:schemeClr val="accent1">
+                <a:shade val="50000"/>
+              </a:schemeClr>
+            </a:lnRef>
+            <a:fillRef idx="1">
+              <a:schemeClr val="accent1"/>
+            </a:fillRef>
+            <a:effectRef idx="0">
+              <a:schemeClr val="accent1"/>
+            </a:effectRef>
+            <a:fontRef idx="minor">
+              <a:schemeClr val="lt1"/>
+            </a:fontRef>
+          </p:style>
+          <p:txBody>
+            <a:bodyPr rtlCol="0" anchor="ctr"/>
+            <a:lstStyle/>
+            <a:p>
+              <a:pPr algn="ctr"/>
+              <a:endParaRPr lang="en-US"/>
+            </a:p>
+          </p:txBody>
+        </p:sp>
+        <p:sp>
+          <p:nvSpPr>
+            <p:cNvPr id="7" name="TextBox 6">
+              <a:extLst>
+                <a:ext uri="{FF2B5EF4-FFF2-40B4-BE49-F238E27FC236}">
+                  <a16:creationId xmlns:a16="http://schemas.microsoft.com/office/drawing/2014/main" id="{AA76F974-0A18-9840-B6A4-53812E2F0200}"/>
+                </a:ext>
+              </a:extLst>
+            </p:cNvPr>
+            <p:cNvSpPr txBox="1"/>
+            <p:nvPr/>
+          </p:nvSpPr>
+          <p:spPr>
+            <a:xfrm>
+              <a:off x="9740549" y="6169481"/>
+              <a:ext cx="715508" cy="412767"/>
+            </a:xfrm>
+            <a:prstGeom prst="rect">
+              <a:avLst/>
+            </a:prstGeom>
+            <a:noFill/>
+          </p:spPr>
+          <p:txBody>
+            <a:bodyPr wrap="none" rtlCol="0">
+              <a:spAutoFit/>
+            </a:bodyPr>
+            <a:lstStyle/>
+            <a:p>
+              <a:r>
+                <a:rPr lang="en-US" sz="2800" b="1" dirty="0">
+                  <a:latin typeface="Arial" panose="020B0604020202020204" pitchFamily="34" charset="0"/>
+                  <a:cs typeface="Arial" panose="020B0604020202020204" pitchFamily="34" charset="0"/>
+                </a:rPr>
+                <a:t>PDF</a:t>
+              </a:r>
+            </a:p>
+          </p:txBody>
+        </p:sp>
+        <p:cxnSp>
+          <p:nvCxnSpPr>
+            <p:cNvPr id="660" name="Straight Connector 659">
+              <a:extLst>
+                <a:ext uri="{FF2B5EF4-FFF2-40B4-BE49-F238E27FC236}">
+                  <a16:creationId xmlns:a16="http://schemas.microsoft.com/office/drawing/2014/main" id="{9F190FD7-37C6-714E-AC1E-9A2C02E1ABEE}"/>
+                </a:ext>
+              </a:extLst>
+            </p:cNvPr>
+            <p:cNvCxnSpPr>
+              <a:cxnSpLocks/>
+            </p:cNvCxnSpPr>
+            <p:nvPr/>
+          </p:nvCxnSpPr>
+          <p:spPr>
+            <a:xfrm>
+              <a:off x="9850946" y="6121245"/>
+              <a:ext cx="205955" cy="0"/>
+            </a:xfrm>
+            <a:prstGeom prst="line">
+              <a:avLst/>
+            </a:prstGeom>
+            <a:ln w="28575">
+              <a:solidFill>
+                <a:schemeClr val="tx1"/>
+              </a:solidFill>
+            </a:ln>
+          </p:spPr>
+          <p:style>
+            <a:lnRef idx="1">
+              <a:schemeClr val="accent1"/>
+            </a:lnRef>
+            <a:fillRef idx="0">
+              <a:schemeClr val="accent1"/>
+            </a:fillRef>
+            <a:effectRef idx="0">
+              <a:schemeClr val="accent1"/>
+            </a:effectRef>
+            <a:fontRef idx="minor">
+              <a:schemeClr val="tx1"/>
+            </a:fontRef>
+          </p:style>
+        </p:cxnSp>
+        <p:cxnSp>
+          <p:nvCxnSpPr>
+            <p:cNvPr id="662" name="Straight Connector 661">
+              <a:extLst>
+                <a:ext uri="{FF2B5EF4-FFF2-40B4-BE49-F238E27FC236}">
+                  <a16:creationId xmlns:a16="http://schemas.microsoft.com/office/drawing/2014/main" id="{5ABF317A-ACD6-8647-9127-29BE199BD35E}"/>
+                </a:ext>
+              </a:extLst>
+            </p:cNvPr>
+            <p:cNvCxnSpPr>
+              <a:cxnSpLocks/>
+            </p:cNvCxnSpPr>
+            <p:nvPr/>
+          </p:nvCxnSpPr>
+          <p:spPr>
+            <a:xfrm>
+              <a:off x="9850948" y="6196155"/>
+              <a:ext cx="205955" cy="0"/>
+            </a:xfrm>
+            <a:prstGeom prst="line">
+              <a:avLst/>
+            </a:prstGeom>
+            <a:ln w="28575">
+              <a:solidFill>
+                <a:schemeClr val="tx1"/>
+              </a:solidFill>
+            </a:ln>
+          </p:spPr>
+          <p:style>
+            <a:lnRef idx="1">
+              <a:schemeClr val="accent1"/>
+            </a:lnRef>
+            <a:fillRef idx="0">
+              <a:schemeClr val="accent1"/>
+            </a:fillRef>
+            <a:effectRef idx="0">
+              <a:schemeClr val="accent1"/>
+            </a:effectRef>
+            <a:fontRef idx="minor">
+              <a:schemeClr val="tx1"/>
+            </a:fontRef>
+          </p:style>
+        </p:cxnSp>
+        <p:cxnSp>
+          <p:nvCxnSpPr>
+            <p:cNvPr id="663" name="Straight Connector 662">
+              <a:extLst>
+                <a:ext uri="{FF2B5EF4-FFF2-40B4-BE49-F238E27FC236}">
+                  <a16:creationId xmlns:a16="http://schemas.microsoft.com/office/drawing/2014/main" id="{5ADC7D3F-83FB-8C44-9840-74D2AC8B8D41}"/>
+                </a:ext>
+              </a:extLst>
+            </p:cNvPr>
+            <p:cNvCxnSpPr>
+              <a:cxnSpLocks/>
+            </p:cNvCxnSpPr>
+            <p:nvPr/>
+          </p:nvCxnSpPr>
+          <p:spPr>
+            <a:xfrm>
+              <a:off x="10127788" y="6122057"/>
+              <a:ext cx="205955" cy="0"/>
+            </a:xfrm>
+            <a:prstGeom prst="line">
+              <a:avLst/>
+            </a:prstGeom>
+            <a:ln w="28575">
+              <a:solidFill>
+                <a:schemeClr val="tx1"/>
+              </a:solidFill>
+            </a:ln>
+          </p:spPr>
+          <p:style>
+            <a:lnRef idx="1">
+              <a:schemeClr val="accent1"/>
+            </a:lnRef>
+            <a:fillRef idx="0">
+              <a:schemeClr val="accent1"/>
+            </a:fillRef>
+            <a:effectRef idx="0">
+              <a:schemeClr val="accent1"/>
+            </a:effectRef>
+            <a:fontRef idx="minor">
+              <a:schemeClr val="tx1"/>
+            </a:fontRef>
+          </p:style>
+        </p:cxnSp>
+        <p:cxnSp>
+          <p:nvCxnSpPr>
+            <p:cNvPr id="723" name="Straight Connector 722">
+              <a:extLst>
+                <a:ext uri="{FF2B5EF4-FFF2-40B4-BE49-F238E27FC236}">
+                  <a16:creationId xmlns:a16="http://schemas.microsoft.com/office/drawing/2014/main" id="{14F7680C-FDAE-B84E-B691-2344B45DFBB3}"/>
+                </a:ext>
+              </a:extLst>
+            </p:cNvPr>
+            <p:cNvCxnSpPr>
+              <a:cxnSpLocks/>
+            </p:cNvCxnSpPr>
+            <p:nvPr/>
+          </p:nvCxnSpPr>
+          <p:spPr>
+            <a:xfrm flipV="1">
+              <a:off x="10127803" y="6196561"/>
+              <a:ext cx="109699" cy="800"/>
+            </a:xfrm>
+            <a:prstGeom prst="line">
+              <a:avLst/>
+            </a:prstGeom>
+            <a:ln w="28575">
+              <a:solidFill>
+                <a:schemeClr val="tx1"/>
+              </a:solidFill>
+            </a:ln>
+          </p:spPr>
+          <p:style>
+            <a:lnRef idx="1">
+              <a:schemeClr val="accent1"/>
+            </a:lnRef>
+            <a:fillRef idx="0">
+              <a:schemeClr val="accent1"/>
+            </a:fillRef>
+            <a:effectRef idx="0">
+              <a:schemeClr val="accent1"/>
+            </a:effectRef>
+            <a:fontRef idx="minor">
+              <a:schemeClr val="tx1"/>
+            </a:fontRef>
+          </p:style>
+        </p:cxnSp>
+      </p:grpSp>
     </p:spTree>
     <p:extLst>
       <p:ext uri="{BB962C8B-B14F-4D97-AF65-F5344CB8AC3E}">

--- a/logos/logos.pptx
+++ b/logos/logos.pptx
@@ -30853,6 +30853,200 @@
           </p:style>
         </p:cxnSp>
       </p:grpSp>
+      <p:pic>
+        <p:nvPicPr>
+          <p:cNvPr id="18" name="Picture 17">
+            <a:extLst>
+              <a:ext uri="{FF2B5EF4-FFF2-40B4-BE49-F238E27FC236}">
+                <a16:creationId xmlns:a16="http://schemas.microsoft.com/office/drawing/2014/main" id="{169D6D77-3CB7-384C-BBA6-FE66BC58D2D9}"/>
+              </a:ext>
+            </a:extLst>
+          </p:cNvPr>
+          <p:cNvPicPr>
+            <a:picLocks noChangeAspect="1"/>
+          </p:cNvPicPr>
+          <p:nvPr/>
+        </p:nvPicPr>
+        <p:blipFill>
+          <a:blip r:embed="rId14">
+            <a:clrChange>
+              <a:clrFrom>
+                <a:srgbClr val="FFFFFF"/>
+              </a:clrFrom>
+              <a:clrTo>
+                <a:srgbClr val="FFFFFF">
+                  <a:alpha val="0"/>
+                </a:srgbClr>
+              </a:clrTo>
+            </a:clrChange>
+          </a:blip>
+          <a:stretch>
+            <a:fillRect/>
+          </a:stretch>
+        </p:blipFill>
+        <p:spPr>
+          <a:xfrm>
+            <a:off x="11272460" y="-254600"/>
+            <a:ext cx="2667000" cy="2654300"/>
+          </a:xfrm>
+          <a:prstGeom prst="rect">
+            <a:avLst/>
+          </a:prstGeom>
+        </p:spPr>
+      </p:pic>
+      <p:sp>
+        <p:nvSpPr>
+          <p:cNvPr id="822" name="Rectangle 821">
+            <a:extLst>
+              <a:ext uri="{FF2B5EF4-FFF2-40B4-BE49-F238E27FC236}">
+                <a16:creationId xmlns:a16="http://schemas.microsoft.com/office/drawing/2014/main" id="{38987CB5-C4B7-3242-BFA2-9F3D048DFF0B}"/>
+              </a:ext>
+            </a:extLst>
+          </p:cNvPr>
+          <p:cNvSpPr/>
+          <p:nvPr/>
+        </p:nvSpPr>
+        <p:spPr>
+          <a:xfrm>
+            <a:off x="10496246" y="5332549"/>
+            <a:ext cx="1368208" cy="1368208"/>
+          </a:xfrm>
+          <a:prstGeom prst="rect">
+            <a:avLst/>
+          </a:prstGeom>
+          <a:noFill/>
+        </p:spPr>
+        <p:style>
+          <a:lnRef idx="2">
+            <a:schemeClr val="accent1">
+              <a:shade val="50000"/>
+            </a:schemeClr>
+          </a:lnRef>
+          <a:fillRef idx="1">
+            <a:schemeClr val="accent1"/>
+          </a:fillRef>
+          <a:effectRef idx="0">
+            <a:schemeClr val="accent1"/>
+          </a:effectRef>
+          <a:fontRef idx="minor">
+            <a:schemeClr val="lt1"/>
+          </a:fontRef>
+        </p:style>
+        <p:txBody>
+          <a:bodyPr rtlCol="0" anchor="ctr"/>
+          <a:lstStyle/>
+          <a:p>
+            <a:pPr algn="ctr"/>
+            <a:endParaRPr lang="en-US"/>
+          </a:p>
+        </p:txBody>
+      </p:sp>
+      <p:sp>
+        <p:nvSpPr>
+          <p:cNvPr id="19" name="Rounded Rectangle 18">
+            <a:extLst>
+              <a:ext uri="{FF2B5EF4-FFF2-40B4-BE49-F238E27FC236}">
+                <a16:creationId xmlns:a16="http://schemas.microsoft.com/office/drawing/2014/main" id="{B1261D28-A846-8C41-89BA-6A787D5D531B}"/>
+              </a:ext>
+            </a:extLst>
+          </p:cNvPr>
+          <p:cNvSpPr/>
+          <p:nvPr/>
+        </p:nvSpPr>
+        <p:spPr>
+          <a:xfrm>
+            <a:off x="10579585" y="5614670"/>
+            <a:ext cx="1201530" cy="803966"/>
+          </a:xfrm>
+          <a:prstGeom prst="roundRect">
+            <a:avLst>
+              <a:gd name="adj" fmla="val 28755"/>
+            </a:avLst>
+          </a:prstGeom>
+          <a:solidFill>
+            <a:schemeClr val="tx1"/>
+          </a:solidFill>
+          <a:ln>
+            <a:noFill/>
+          </a:ln>
+        </p:spPr>
+        <p:style>
+          <a:lnRef idx="2">
+            <a:schemeClr val="accent1">
+              <a:shade val="50000"/>
+            </a:schemeClr>
+          </a:lnRef>
+          <a:fillRef idx="1">
+            <a:schemeClr val="accent1"/>
+          </a:fillRef>
+          <a:effectRef idx="0">
+            <a:schemeClr val="accent1"/>
+          </a:effectRef>
+          <a:fontRef idx="minor">
+            <a:schemeClr val="lt1"/>
+          </a:fontRef>
+        </p:style>
+        <p:txBody>
+          <a:bodyPr rtlCol="0" anchor="ctr"/>
+          <a:lstStyle/>
+          <a:p>
+            <a:pPr algn="ctr"/>
+            <a:endParaRPr lang="en-US"/>
+          </a:p>
+        </p:txBody>
+      </p:sp>
+      <p:sp>
+        <p:nvSpPr>
+          <p:cNvPr id="20" name="Triangle 19">
+            <a:extLst>
+              <a:ext uri="{FF2B5EF4-FFF2-40B4-BE49-F238E27FC236}">
+                <a16:creationId xmlns:a16="http://schemas.microsoft.com/office/drawing/2014/main" id="{80742D43-C01B-6D44-93FD-FFEBC3E90C9C}"/>
+              </a:ext>
+            </a:extLst>
+          </p:cNvPr>
+          <p:cNvSpPr/>
+          <p:nvPr/>
+        </p:nvSpPr>
+        <p:spPr>
+          <a:xfrm rot="5400000">
+            <a:off x="10963781" y="5798981"/>
+            <a:ext cx="504999" cy="435344"/>
+          </a:xfrm>
+          <a:prstGeom prst="triangle">
+            <a:avLst/>
+          </a:prstGeom>
+          <a:solidFill>
+            <a:schemeClr val="bg1"/>
+          </a:solidFill>
+          <a:ln>
+            <a:noFill/>
+          </a:ln>
+        </p:spPr>
+        <p:style>
+          <a:lnRef idx="2">
+            <a:schemeClr val="accent1">
+              <a:shade val="50000"/>
+            </a:schemeClr>
+          </a:lnRef>
+          <a:fillRef idx="1">
+            <a:schemeClr val="accent1"/>
+          </a:fillRef>
+          <a:effectRef idx="0">
+            <a:schemeClr val="accent1"/>
+          </a:effectRef>
+          <a:fontRef idx="minor">
+            <a:schemeClr val="lt1"/>
+          </a:fontRef>
+        </p:style>
+        <p:txBody>
+          <a:bodyPr rtlCol="0" anchor="ctr"/>
+          <a:lstStyle/>
+          <a:p>
+            <a:pPr algn="ctr"/>
+            <a:endParaRPr lang="en-US"/>
+          </a:p>
+        </p:txBody>
+      </p:sp>
     </p:spTree>
     <p:extLst>
       <p:ext uri="{BB962C8B-B14F-4D97-AF65-F5344CB8AC3E}">

--- a/logos/logos.pptx
+++ b/logos/logos.pptx
@@ -30955,8 +30955,8 @@
         </p:nvSpPr>
         <p:spPr>
           <a:xfrm>
-            <a:off x="10579585" y="5614670"/>
-            <a:ext cx="1201530" cy="803966"/>
+            <a:off x="10612213" y="5466251"/>
+            <a:ext cx="1136274" cy="1100804"/>
           </a:xfrm>
           <a:prstGeom prst="roundRect">
             <a:avLst>
@@ -30966,8 +30966,10 @@
           <a:solidFill>
             <a:schemeClr val="tx1"/>
           </a:solidFill>
-          <a:ln>
-            <a:noFill/>
+          <a:ln w="76200">
+            <a:solidFill>
+              <a:schemeClr val="tx1"/>
+            </a:solidFill>
           </a:ln>
         </p:spPr>
         <p:style>
@@ -31019,7 +31021,9 @@
             <a:schemeClr val="bg1"/>
           </a:solidFill>
           <a:ln>
-            <a:noFill/>
+            <a:solidFill>
+              <a:schemeClr val="bg1"/>
+            </a:solidFill>
           </a:ln>
         </p:spPr>
         <p:style>
@@ -31047,6 +31051,47 @@
           </a:p>
         </p:txBody>
       </p:sp>
+      <p:pic>
+        <p:nvPicPr>
+          <p:cNvPr id="22" name="Picture 21">
+            <a:extLst>
+              <a:ext uri="{FF2B5EF4-FFF2-40B4-BE49-F238E27FC236}">
+                <a16:creationId xmlns:a16="http://schemas.microsoft.com/office/drawing/2014/main" id="{90588753-0E1F-AB40-A568-94E37677BECF}"/>
+              </a:ext>
+            </a:extLst>
+          </p:cNvPr>
+          <p:cNvPicPr>
+            <a:picLocks noChangeAspect="1"/>
+          </p:cNvPicPr>
+          <p:nvPr/>
+        </p:nvPicPr>
+        <p:blipFill>
+          <a:blip r:embed="rId15">
+            <a:clrChange>
+              <a:clrFrom>
+                <a:srgbClr val="FFFFFF"/>
+              </a:clrFrom>
+              <a:clrTo>
+                <a:srgbClr val="FFFFFF">
+                  <a:alpha val="0"/>
+                </a:srgbClr>
+              </a:clrTo>
+            </a:clrChange>
+          </a:blip>
+          <a:stretch>
+            <a:fillRect/>
+          </a:stretch>
+        </p:blipFill>
+        <p:spPr>
+          <a:xfrm>
+            <a:off x="12211041" y="4030799"/>
+            <a:ext cx="2590800" cy="2603500"/>
+          </a:xfrm>
+          <a:prstGeom prst="rect">
+            <a:avLst/>
+          </a:prstGeom>
+        </p:spPr>
+      </p:pic>
     </p:spTree>
     <p:extLst>
       <p:ext uri="{BB962C8B-B14F-4D97-AF65-F5344CB8AC3E}">

--- a/logos/logos.pptx
+++ b/logos/logos.pptx
@@ -261,7 +261,7 @@
           <a:p>
             <a:fld id="{16F93EB0-79FE-3A48-9677-781C433206CF}" type="datetimeFigureOut">
               <a:rPr lang="en-US" smtClean="0"/>
-              <a:t>8/30/21</a:t>
+              <a:t>9/3/21</a:t>
             </a:fld>
             <a:endParaRPr lang="en-US"/>
           </a:p>
@@ -461,7 +461,7 @@
           <a:p>
             <a:fld id="{16F93EB0-79FE-3A48-9677-781C433206CF}" type="datetimeFigureOut">
               <a:rPr lang="en-US" smtClean="0"/>
-              <a:t>8/30/21</a:t>
+              <a:t>9/3/21</a:t>
             </a:fld>
             <a:endParaRPr lang="en-US"/>
           </a:p>
@@ -671,7 +671,7 @@
           <a:p>
             <a:fld id="{16F93EB0-79FE-3A48-9677-781C433206CF}" type="datetimeFigureOut">
               <a:rPr lang="en-US" smtClean="0"/>
-              <a:t>8/30/21</a:t>
+              <a:t>9/3/21</a:t>
             </a:fld>
             <a:endParaRPr lang="en-US"/>
           </a:p>
@@ -871,7 +871,7 @@
           <a:p>
             <a:fld id="{16F93EB0-79FE-3A48-9677-781C433206CF}" type="datetimeFigureOut">
               <a:rPr lang="en-US" smtClean="0"/>
-              <a:t>8/30/21</a:t>
+              <a:t>9/3/21</a:t>
             </a:fld>
             <a:endParaRPr lang="en-US"/>
           </a:p>
@@ -1147,7 +1147,7 @@
           <a:p>
             <a:fld id="{16F93EB0-79FE-3A48-9677-781C433206CF}" type="datetimeFigureOut">
               <a:rPr lang="en-US" smtClean="0"/>
-              <a:t>8/30/21</a:t>
+              <a:t>9/3/21</a:t>
             </a:fld>
             <a:endParaRPr lang="en-US"/>
           </a:p>
@@ -1415,7 +1415,7 @@
           <a:p>
             <a:fld id="{16F93EB0-79FE-3A48-9677-781C433206CF}" type="datetimeFigureOut">
               <a:rPr lang="en-US" smtClean="0"/>
-              <a:t>8/30/21</a:t>
+              <a:t>9/3/21</a:t>
             </a:fld>
             <a:endParaRPr lang="en-US"/>
           </a:p>
@@ -1830,7 +1830,7 @@
           <a:p>
             <a:fld id="{16F93EB0-79FE-3A48-9677-781C433206CF}" type="datetimeFigureOut">
               <a:rPr lang="en-US" smtClean="0"/>
-              <a:t>8/30/21</a:t>
+              <a:t>9/3/21</a:t>
             </a:fld>
             <a:endParaRPr lang="en-US"/>
           </a:p>
@@ -1972,7 +1972,7 @@
           <a:p>
             <a:fld id="{16F93EB0-79FE-3A48-9677-781C433206CF}" type="datetimeFigureOut">
               <a:rPr lang="en-US" smtClean="0"/>
-              <a:t>8/30/21</a:t>
+              <a:t>9/3/21</a:t>
             </a:fld>
             <a:endParaRPr lang="en-US"/>
           </a:p>
@@ -2085,7 +2085,7 @@
           <a:p>
             <a:fld id="{16F93EB0-79FE-3A48-9677-781C433206CF}" type="datetimeFigureOut">
               <a:rPr lang="en-US" smtClean="0"/>
-              <a:t>8/30/21</a:t>
+              <a:t>9/3/21</a:t>
             </a:fld>
             <a:endParaRPr lang="en-US"/>
           </a:p>
@@ -2398,7 +2398,7 @@
           <a:p>
             <a:fld id="{16F93EB0-79FE-3A48-9677-781C433206CF}" type="datetimeFigureOut">
               <a:rPr lang="en-US" smtClean="0"/>
-              <a:t>8/30/21</a:t>
+              <a:t>9/3/21</a:t>
             </a:fld>
             <a:endParaRPr lang="en-US"/>
           </a:p>
@@ -2687,7 +2687,7 @@
           <a:p>
             <a:fld id="{16F93EB0-79FE-3A48-9677-781C433206CF}" type="datetimeFigureOut">
               <a:rPr lang="en-US" smtClean="0"/>
-              <a:t>8/30/21</a:t>
+              <a:t>9/3/21</a:t>
             </a:fld>
             <a:endParaRPr lang="en-US"/>
           </a:p>
@@ -2930,7 +2930,7 @@
           <a:p>
             <a:fld id="{16F93EB0-79FE-3A48-9677-781C433206CF}" type="datetimeFigureOut">
               <a:rPr lang="en-US" smtClean="0"/>
-              <a:t>8/30/21</a:t>
+              <a:t>9/3/21</a:t>
             </a:fld>
             <a:endParaRPr lang="en-US"/>
           </a:p>
@@ -4477,7 +4477,7 @@
         </p:nvGrpSpPr>
         <p:grpSpPr>
           <a:xfrm>
-            <a:off x="9161120" y="1662234"/>
+            <a:off x="8802614" y="2535199"/>
             <a:ext cx="870425" cy="984175"/>
             <a:chOff x="9818170" y="3088909"/>
             <a:chExt cx="670592" cy="758227"/>
@@ -31092,6 +31092,162 @@
           </a:prstGeom>
         </p:spPr>
       </p:pic>
+      <p:grpSp>
+        <p:nvGrpSpPr>
+          <p:cNvPr id="9" name="Group 8">
+            <a:extLst>
+              <a:ext uri="{FF2B5EF4-FFF2-40B4-BE49-F238E27FC236}">
+                <a16:creationId xmlns:a16="http://schemas.microsoft.com/office/drawing/2014/main" id="{7F634254-3F69-D84D-A252-DFEAFC70E7EF}"/>
+              </a:ext>
+            </a:extLst>
+          </p:cNvPr>
+          <p:cNvGrpSpPr/>
+          <p:nvPr/>
+        </p:nvGrpSpPr>
+        <p:grpSpPr>
+          <a:xfrm>
+            <a:off x="8557341" y="575656"/>
+            <a:ext cx="1302078" cy="1226250"/>
+            <a:chOff x="8669047" y="373287"/>
+            <a:chExt cx="2104010" cy="1981477"/>
+          </a:xfrm>
+        </p:grpSpPr>
+        <p:pic>
+          <p:nvPicPr>
+            <p:cNvPr id="724" name="Picture 723">
+              <a:extLst>
+                <a:ext uri="{FF2B5EF4-FFF2-40B4-BE49-F238E27FC236}">
+                  <a16:creationId xmlns:a16="http://schemas.microsoft.com/office/drawing/2014/main" id="{2E2E304F-0D3B-0047-86E9-1D02F912C242}"/>
+                </a:ext>
+              </a:extLst>
+            </p:cNvPr>
+            <p:cNvPicPr>
+              <a:picLocks noChangeAspect="1"/>
+            </p:cNvPicPr>
+            <p:nvPr/>
+          </p:nvPicPr>
+          <p:blipFill rotWithShape="1">
+            <a:blip r:embed="rId16"/>
+            <a:srcRect r="75948"/>
+            <a:stretch/>
+          </p:blipFill>
+          <p:spPr>
+            <a:xfrm>
+              <a:off x="8874063" y="373287"/>
+              <a:ext cx="1671464" cy="1490814"/>
+            </a:xfrm>
+            <a:prstGeom prst="rect">
+              <a:avLst/>
+            </a:prstGeom>
+          </p:spPr>
+        </p:pic>
+        <p:pic>
+          <p:nvPicPr>
+            <p:cNvPr id="725" name="Picture 724">
+              <a:extLst>
+                <a:ext uri="{FF2B5EF4-FFF2-40B4-BE49-F238E27FC236}">
+                  <a16:creationId xmlns:a16="http://schemas.microsoft.com/office/drawing/2014/main" id="{DFB488F4-5771-864F-A37C-DBD4AF8F2C2F}"/>
+                </a:ext>
+              </a:extLst>
+            </p:cNvPr>
+            <p:cNvPicPr>
+              <a:picLocks noChangeAspect="1"/>
+            </p:cNvPicPr>
+            <p:nvPr/>
+          </p:nvPicPr>
+          <p:blipFill rotWithShape="1">
+            <a:blip r:embed="rId16"/>
+            <a:srcRect l="26201"/>
+            <a:stretch/>
+          </p:blipFill>
+          <p:spPr>
+            <a:xfrm>
+              <a:off x="8669047" y="1743158"/>
+              <a:ext cx="2104010" cy="611606"/>
+            </a:xfrm>
+            <a:prstGeom prst="rect">
+              <a:avLst/>
+            </a:prstGeom>
+          </p:spPr>
+        </p:pic>
+      </p:grpSp>
+      <p:sp>
+        <p:nvSpPr>
+          <p:cNvPr id="731" name="Rectangle 730">
+            <a:extLst>
+              <a:ext uri="{FF2B5EF4-FFF2-40B4-BE49-F238E27FC236}">
+                <a16:creationId xmlns:a16="http://schemas.microsoft.com/office/drawing/2014/main" id="{9495C03A-6ECE-9B49-8E66-C782126CE539}"/>
+              </a:ext>
+            </a:extLst>
+          </p:cNvPr>
+          <p:cNvSpPr/>
+          <p:nvPr/>
+        </p:nvSpPr>
+        <p:spPr>
+          <a:xfrm>
+            <a:off x="8533623" y="498253"/>
+            <a:ext cx="1368208" cy="1368208"/>
+          </a:xfrm>
+          <a:prstGeom prst="rect">
+            <a:avLst/>
+          </a:prstGeom>
+          <a:noFill/>
+        </p:spPr>
+        <p:style>
+          <a:lnRef idx="2">
+            <a:schemeClr val="accent1">
+              <a:shade val="50000"/>
+            </a:schemeClr>
+          </a:lnRef>
+          <a:fillRef idx="1">
+            <a:schemeClr val="accent1"/>
+          </a:fillRef>
+          <a:effectRef idx="0">
+            <a:schemeClr val="accent1"/>
+          </a:effectRef>
+          <a:fontRef idx="minor">
+            <a:schemeClr val="lt1"/>
+          </a:fontRef>
+        </p:style>
+        <p:txBody>
+          <a:bodyPr rtlCol="0" anchor="ctr"/>
+          <a:lstStyle/>
+          <a:p>
+            <a:pPr algn="ctr"/>
+            <a:endParaRPr lang="en-US"/>
+          </a:p>
+        </p:txBody>
+      </p:sp>
+      <p:pic>
+        <p:nvPicPr>
+          <p:cNvPr id="10" name="Picture 9">
+            <a:extLst>
+              <a:ext uri="{FF2B5EF4-FFF2-40B4-BE49-F238E27FC236}">
+                <a16:creationId xmlns:a16="http://schemas.microsoft.com/office/drawing/2014/main" id="{9710CC72-3BC5-1349-B056-53754E12C898}"/>
+              </a:ext>
+            </a:extLst>
+          </p:cNvPr>
+          <p:cNvPicPr>
+            <a:picLocks noChangeAspect="1"/>
+          </p:cNvPicPr>
+          <p:nvPr/>
+        </p:nvPicPr>
+        <p:blipFill>
+          <a:blip r:embed="rId17"/>
+          <a:stretch>
+            <a:fillRect/>
+          </a:stretch>
+        </p:blipFill>
+        <p:spPr>
+          <a:xfrm>
+            <a:off x="16122819" y="6107173"/>
+            <a:ext cx="5308600" cy="5194300"/>
+          </a:xfrm>
+          <a:prstGeom prst="rect">
+            <a:avLst/>
+          </a:prstGeom>
+        </p:spPr>
+      </p:pic>
     </p:spTree>
     <p:extLst>
       <p:ext uri="{BB962C8B-B14F-4D97-AF65-F5344CB8AC3E}">

--- a/logos/logos.pptx
+++ b/logos/logos.pptx
@@ -3577,7 +3577,7 @@
         </p:nvSpPr>
         <p:spPr>
           <a:xfrm>
-            <a:off x="5449840" y="2364171"/>
+            <a:off x="1475689" y="-1916368"/>
             <a:ext cx="1495710" cy="1495710"/>
           </a:xfrm>
           <a:prstGeom prst="arc">
@@ -3629,7 +3629,7 @@
         </p:nvSpPr>
         <p:spPr>
           <a:xfrm rot="19693329">
-            <a:off x="5247382" y="3123991"/>
+            <a:off x="1273231" y="-1156548"/>
             <a:ext cx="547895" cy="153022"/>
           </a:xfrm>
           <a:prstGeom prst="rect">
@@ -3681,7 +3681,7 @@
         </p:nvSpPr>
         <p:spPr>
           <a:xfrm rot="19819108">
-            <a:off x="6487695" y="3112575"/>
+            <a:off x="2513544" y="-1167964"/>
             <a:ext cx="708216" cy="281216"/>
           </a:xfrm>
           <a:prstGeom prst="rect">
@@ -3733,7 +3733,7 @@
         </p:nvGrpSpPr>
         <p:grpSpPr>
           <a:xfrm>
-            <a:off x="6602790" y="3029354"/>
+            <a:off x="2628639" y="-1251185"/>
             <a:ext cx="535049" cy="482789"/>
             <a:chOff x="6227183" y="2691999"/>
             <a:chExt cx="418056" cy="377222"/>
@@ -4714,7 +4714,7 @@
         </p:nvSpPr>
         <p:spPr>
           <a:xfrm rot="17263551">
-            <a:off x="3132019" y="4896153"/>
+            <a:off x="3132757" y="4304723"/>
             <a:ext cx="497043" cy="164024"/>
           </a:xfrm>
           <a:prstGeom prst="flowChartTerminator">
@@ -5518,7 +5518,7 @@
         </p:nvGrpSpPr>
         <p:grpSpPr>
           <a:xfrm rot="1816045">
-            <a:off x="6516601" y="4448964"/>
+            <a:off x="6517339" y="3857534"/>
             <a:ext cx="673850" cy="891540"/>
             <a:chOff x="7855592" y="4677715"/>
             <a:chExt cx="673850" cy="891540"/>
@@ -6488,7 +6488,7 @@
         </p:nvSpPr>
         <p:spPr>
           <a:xfrm>
-            <a:off x="3684324" y="4437719"/>
+            <a:off x="3685062" y="3846289"/>
             <a:ext cx="768444" cy="582134"/>
           </a:xfrm>
           <a:prstGeom prst="rect">
@@ -6542,7 +6542,7 @@
         </p:nvGrpSpPr>
         <p:grpSpPr>
           <a:xfrm>
-            <a:off x="4643675" y="4366093"/>
+            <a:off x="4644413" y="3774663"/>
             <a:ext cx="1229558" cy="722370"/>
             <a:chOff x="4681233" y="4518900"/>
             <a:chExt cx="1364624" cy="801721"/>
@@ -6863,7 +6863,7 @@
         </p:nvGrpSpPr>
         <p:grpSpPr>
           <a:xfrm>
-            <a:off x="1939379" y="4531006"/>
+            <a:off x="1940117" y="3939576"/>
             <a:ext cx="1128168" cy="902416"/>
             <a:chOff x="1877750" y="4461886"/>
             <a:chExt cx="1424354" cy="1139334"/>
@@ -7106,7 +7106,7 @@
         </p:nvGrpSpPr>
         <p:grpSpPr>
           <a:xfrm>
-            <a:off x="808486" y="4339907"/>
+            <a:off x="809224" y="3748477"/>
             <a:ext cx="551797" cy="857181"/>
             <a:chOff x="1035799" y="2533121"/>
             <a:chExt cx="551797" cy="857181"/>
@@ -7235,7 +7235,7 @@
         </p:nvSpPr>
         <p:spPr>
           <a:xfrm>
-            <a:off x="1244878" y="5286545"/>
+            <a:off x="1245616" y="4695115"/>
             <a:ext cx="257973" cy="257973"/>
           </a:xfrm>
           <a:prstGeom prst="halfFrame">
@@ -7293,7 +7293,7 @@
         </p:nvSpPr>
         <p:spPr>
           <a:xfrm>
-            <a:off x="1475689" y="5057725"/>
+            <a:off x="1476427" y="4466295"/>
             <a:ext cx="228820" cy="228820"/>
           </a:xfrm>
           <a:prstGeom prst="halfFrame">
@@ -7351,7 +7351,7 @@
         </p:nvCxnSpPr>
         <p:spPr>
           <a:xfrm flipH="1">
-            <a:off x="988104" y="5515365"/>
+            <a:off x="988842" y="4923935"/>
             <a:ext cx="256776" cy="0"/>
           </a:xfrm>
           <a:prstGeom prst="line">
@@ -7392,7 +7392,7 @@
         </p:nvGrpSpPr>
         <p:grpSpPr>
           <a:xfrm>
-            <a:off x="469945" y="4840506"/>
+            <a:off x="470683" y="4249076"/>
             <a:ext cx="690948" cy="561478"/>
             <a:chOff x="2087261" y="4870399"/>
             <a:chExt cx="1424354" cy="1157458"/>
@@ -7637,7 +7637,7 @@
         </p:nvCxnSpPr>
         <p:spPr>
           <a:xfrm flipH="1">
-            <a:off x="988104" y="5519240"/>
+            <a:off x="988842" y="4927810"/>
             <a:ext cx="256776" cy="0"/>
           </a:xfrm>
           <a:prstGeom prst="line">
@@ -7678,7 +7678,7 @@
         </p:nvSpPr>
         <p:spPr>
           <a:xfrm rot="18900000">
-            <a:off x="1292672" y="4314734"/>
+            <a:off x="1293410" y="3723304"/>
             <a:ext cx="504010" cy="458757"/>
           </a:xfrm>
           <a:prstGeom prst="rightArrow">
@@ -7732,7 +7732,7 @@
         </p:nvSpPr>
         <p:spPr>
           <a:xfrm>
-            <a:off x="3230443" y="4291178"/>
+            <a:off x="3231181" y="3699748"/>
             <a:ext cx="1345225" cy="1345225"/>
           </a:xfrm>
           <a:prstGeom prst="rect">
@@ -7779,7 +7779,7 @@
         </p:nvSpPr>
         <p:spPr>
           <a:xfrm>
-            <a:off x="427375" y="4285015"/>
+            <a:off x="428113" y="3693585"/>
             <a:ext cx="1345224" cy="1345224"/>
           </a:xfrm>
           <a:prstGeom prst="rect">
@@ -7826,7 +7826,7 @@
         </p:nvSpPr>
         <p:spPr>
           <a:xfrm>
-            <a:off x="4611736" y="4285016"/>
+            <a:off x="4612474" y="3693586"/>
             <a:ext cx="1368208" cy="1368208"/>
           </a:xfrm>
           <a:prstGeom prst="rect">
@@ -7873,7 +7873,7 @@
         </p:nvSpPr>
         <p:spPr>
           <a:xfrm>
-            <a:off x="1822552" y="4286875"/>
+            <a:off x="1823290" y="3695445"/>
             <a:ext cx="1345224" cy="1345224"/>
           </a:xfrm>
           <a:prstGeom prst="rect">
@@ -7920,7 +7920,7 @@
         </p:nvGrpSpPr>
         <p:grpSpPr>
           <a:xfrm>
-            <a:off x="4902513" y="4884503"/>
+            <a:off x="4903251" y="4293073"/>
             <a:ext cx="993189" cy="696964"/>
             <a:chOff x="2842584" y="2506717"/>
             <a:chExt cx="1081005" cy="758588"/>
@@ -8247,7 +8247,7 @@
         </p:nvSpPr>
         <p:spPr>
           <a:xfrm>
-            <a:off x="6060067" y="4284150"/>
+            <a:off x="6060805" y="3692720"/>
             <a:ext cx="1368208" cy="1368208"/>
           </a:xfrm>
           <a:prstGeom prst="rect">
@@ -9260,7 +9260,7 @@
         </p:nvGrpSpPr>
         <p:grpSpPr>
           <a:xfrm rot="20588204">
-            <a:off x="6230308" y="4516289"/>
+            <a:off x="6231046" y="3924859"/>
             <a:ext cx="673850" cy="891540"/>
             <a:chOff x="7855592" y="4677715"/>
             <a:chExt cx="673850" cy="891540"/>
@@ -10230,7 +10230,7 @@
         </p:nvGrpSpPr>
         <p:grpSpPr>
           <a:xfrm>
-            <a:off x="6468743" y="4681697"/>
+            <a:off x="6469481" y="4090267"/>
             <a:ext cx="673850" cy="891540"/>
             <a:chOff x="7855592" y="4677715"/>
             <a:chExt cx="673850" cy="891540"/>
@@ -11198,7 +11198,7 @@
         </p:nvCxnSpPr>
         <p:spPr>
           <a:xfrm flipV="1">
-            <a:off x="6248523" y="4642288"/>
+            <a:off x="6249261" y="4050858"/>
             <a:ext cx="349002" cy="105791"/>
           </a:xfrm>
           <a:prstGeom prst="line">
@@ -15480,7 +15480,7 @@
         </p:nvSpPr>
         <p:spPr>
           <a:xfrm rot="19606244">
-            <a:off x="3654532" y="4666065"/>
+            <a:off x="3655270" y="4074635"/>
             <a:ext cx="497043" cy="164024"/>
           </a:xfrm>
           <a:prstGeom prst="flowChartTerminator">
@@ -15534,7 +15534,7 @@
         </p:nvSpPr>
         <p:spPr>
           <a:xfrm rot="16200000">
-            <a:off x="3361316" y="4740002"/>
+            <a:off x="3362054" y="4148572"/>
             <a:ext cx="514626" cy="424985"/>
           </a:xfrm>
           <a:prstGeom prst="flowChartDelay">
@@ -15588,7 +15588,7 @@
         </p:nvSpPr>
         <p:spPr>
           <a:xfrm rot="16200000">
-            <a:off x="3298898" y="5204459"/>
+            <a:off x="3299636" y="4613029"/>
             <a:ext cx="371735" cy="371735"/>
           </a:xfrm>
           <a:prstGeom prst="flowChartDelay">
@@ -15642,7 +15642,7 @@
         </p:nvSpPr>
         <p:spPr>
           <a:xfrm rot="16200000">
-            <a:off x="3702212" y="5204458"/>
+            <a:off x="3702950" y="4613028"/>
             <a:ext cx="371735" cy="371735"/>
           </a:xfrm>
           <a:prstGeom prst="flowChartDelay">
@@ -15696,7 +15696,7 @@
         </p:nvSpPr>
         <p:spPr>
           <a:xfrm rot="16200000">
-            <a:off x="4096000" y="5204458"/>
+            <a:off x="4096738" y="4613028"/>
             <a:ext cx="371735" cy="371735"/>
           </a:xfrm>
           <a:prstGeom prst="flowChartDelay">
@@ -15750,7 +15750,7 @@
         </p:nvSpPr>
         <p:spPr>
           <a:xfrm>
-            <a:off x="3368937" y="5015778"/>
+            <a:off x="3369675" y="4424348"/>
             <a:ext cx="231657" cy="231656"/>
           </a:xfrm>
           <a:prstGeom prst="ellipse">
@@ -15804,7 +15804,7 @@
         </p:nvSpPr>
         <p:spPr>
           <a:xfrm>
-            <a:off x="3772252" y="5015777"/>
+            <a:off x="3772990" y="4424347"/>
             <a:ext cx="231657" cy="231656"/>
           </a:xfrm>
           <a:prstGeom prst="ellipse">
@@ -15858,7 +15858,7 @@
         </p:nvSpPr>
         <p:spPr>
           <a:xfrm>
-            <a:off x="4166038" y="5012805"/>
+            <a:off x="4166776" y="4421375"/>
             <a:ext cx="231657" cy="231656"/>
           </a:xfrm>
           <a:prstGeom prst="ellipse">
@@ -15912,7 +15912,7 @@
         </p:nvSpPr>
         <p:spPr>
           <a:xfrm>
-            <a:off x="3463718" y="4405873"/>
+            <a:off x="3464456" y="3814443"/>
             <a:ext cx="316756" cy="316756"/>
           </a:xfrm>
           <a:prstGeom prst="ellipse">
@@ -21182,7 +21182,7 @@
         </p:nvGrpSpPr>
         <p:grpSpPr>
           <a:xfrm>
-            <a:off x="5324860" y="2229891"/>
+            <a:off x="1350709" y="-2050648"/>
             <a:ext cx="564032" cy="568430"/>
             <a:chOff x="5531039" y="2319516"/>
             <a:chExt cx="424284" cy="427592"/>
@@ -21459,7 +21459,7 @@
         </p:nvGrpSpPr>
         <p:grpSpPr>
           <a:xfrm>
-            <a:off x="6574420" y="2358001"/>
+            <a:off x="2600269" y="-1922538"/>
             <a:ext cx="476607" cy="377945"/>
             <a:chOff x="6247282" y="2333992"/>
             <a:chExt cx="365810" cy="290084"/>
@@ -21769,7 +21769,7 @@
         </p:nvGrpSpPr>
         <p:grpSpPr>
           <a:xfrm rot="20623026">
-            <a:off x="5801926" y="2579158"/>
+            <a:off x="1827775" y="-1701381"/>
             <a:ext cx="703901" cy="631809"/>
             <a:chOff x="6036208" y="46177"/>
             <a:chExt cx="1095709" cy="983494"/>
@@ -22857,7 +22857,7 @@
         </p:nvGrpSpPr>
         <p:grpSpPr>
           <a:xfrm>
-            <a:off x="5335130" y="3086184"/>
+            <a:off x="1360979" y="-1194355"/>
             <a:ext cx="488987" cy="431346"/>
             <a:chOff x="5405061" y="3074658"/>
             <a:chExt cx="401770" cy="354410"/>
@@ -23302,7 +23302,7 @@
         </p:nvGrpSpPr>
         <p:grpSpPr>
           <a:xfrm>
-            <a:off x="5803130" y="3252245"/>
+            <a:off x="1828979" y="-1028294"/>
             <a:ext cx="874499" cy="759653"/>
             <a:chOff x="5803130" y="3252245"/>
             <a:chExt cx="874499" cy="759653"/>
@@ -31248,6 +31248,701 @@
           </a:prstGeom>
         </p:spPr>
       </p:pic>
+      <p:sp>
+        <p:nvSpPr>
+          <p:cNvPr id="835" name="Rectangle 834">
+            <a:extLst>
+              <a:ext uri="{FF2B5EF4-FFF2-40B4-BE49-F238E27FC236}">
+                <a16:creationId xmlns:a16="http://schemas.microsoft.com/office/drawing/2014/main" id="{3D3DEC41-4E1A-1D47-86F5-A3ED6DEC39CA}"/>
+              </a:ext>
+            </a:extLst>
+          </p:cNvPr>
+          <p:cNvSpPr/>
+          <p:nvPr/>
+        </p:nvSpPr>
+        <p:spPr>
+          <a:xfrm>
+            <a:off x="365040" y="5259717"/>
+            <a:ext cx="1345224" cy="1345224"/>
+          </a:xfrm>
+          <a:prstGeom prst="rect">
+            <a:avLst/>
+          </a:prstGeom>
+          <a:noFill/>
+        </p:spPr>
+        <p:style>
+          <a:lnRef idx="2">
+            <a:schemeClr val="accent1">
+              <a:shade val="50000"/>
+            </a:schemeClr>
+          </a:lnRef>
+          <a:fillRef idx="1">
+            <a:schemeClr val="accent1"/>
+          </a:fillRef>
+          <a:effectRef idx="0">
+            <a:schemeClr val="accent1"/>
+          </a:effectRef>
+          <a:fontRef idx="minor">
+            <a:schemeClr val="lt1"/>
+          </a:fontRef>
+        </p:style>
+        <p:txBody>
+          <a:bodyPr rtlCol="0" anchor="ctr"/>
+          <a:lstStyle/>
+          <a:p>
+            <a:pPr algn="ctr"/>
+            <a:endParaRPr lang="en-US"/>
+          </a:p>
+        </p:txBody>
+      </p:sp>
+      <p:grpSp>
+        <p:nvGrpSpPr>
+          <p:cNvPr id="3" name="Group 2">
+            <a:extLst>
+              <a:ext uri="{FF2B5EF4-FFF2-40B4-BE49-F238E27FC236}">
+                <a16:creationId xmlns:a16="http://schemas.microsoft.com/office/drawing/2014/main" id="{B53D3FF4-26C0-2646-92D1-A5BD04B18AE1}"/>
+              </a:ext>
+            </a:extLst>
+          </p:cNvPr>
+          <p:cNvGrpSpPr/>
+          <p:nvPr/>
+        </p:nvGrpSpPr>
+        <p:grpSpPr>
+          <a:xfrm>
+            <a:off x="428112" y="5524727"/>
+            <a:ext cx="1213507" cy="861512"/>
+            <a:chOff x="400986" y="5903794"/>
+            <a:chExt cx="705900" cy="501144"/>
+          </a:xfrm>
+        </p:grpSpPr>
+        <p:sp>
+          <p:nvSpPr>
+            <p:cNvPr id="830" name="Rounded Rectangle 829">
+              <a:extLst>
+                <a:ext uri="{FF2B5EF4-FFF2-40B4-BE49-F238E27FC236}">
+                  <a16:creationId xmlns:a16="http://schemas.microsoft.com/office/drawing/2014/main" id="{22885AC6-07FA-154F-9D36-787CA9845D92}"/>
+                </a:ext>
+              </a:extLst>
+            </p:cNvPr>
+            <p:cNvSpPr/>
+            <p:nvPr/>
+          </p:nvSpPr>
+          <p:spPr>
+            <a:xfrm>
+              <a:off x="405456" y="5916583"/>
+              <a:ext cx="685496" cy="488355"/>
+            </a:xfrm>
+            <a:prstGeom prst="roundRect">
+              <a:avLst>
+                <a:gd name="adj" fmla="val 8642"/>
+              </a:avLst>
+            </a:prstGeom>
+            <a:solidFill>
+              <a:schemeClr val="tx1"/>
+            </a:solidFill>
+            <a:ln w="38100">
+              <a:solidFill>
+                <a:schemeClr val="bg1"/>
+              </a:solidFill>
+            </a:ln>
+          </p:spPr>
+          <p:style>
+            <a:lnRef idx="2">
+              <a:schemeClr val="accent1">
+                <a:shade val="50000"/>
+              </a:schemeClr>
+            </a:lnRef>
+            <a:fillRef idx="1">
+              <a:schemeClr val="accent1"/>
+            </a:fillRef>
+            <a:effectRef idx="0">
+              <a:schemeClr val="accent1"/>
+            </a:effectRef>
+            <a:fontRef idx="minor">
+              <a:schemeClr val="lt1"/>
+            </a:fontRef>
+          </p:style>
+          <p:txBody>
+            <a:bodyPr rtlCol="0" anchor="ctr"/>
+            <a:lstStyle/>
+            <a:p>
+              <a:pPr algn="ctr"/>
+              <a:endParaRPr lang="en-US" dirty="0"/>
+            </a:p>
+          </p:txBody>
+        </p:sp>
+        <p:sp>
+          <p:nvSpPr>
+            <p:cNvPr id="2" name="Triangle 1">
+              <a:extLst>
+                <a:ext uri="{FF2B5EF4-FFF2-40B4-BE49-F238E27FC236}">
+                  <a16:creationId xmlns:a16="http://schemas.microsoft.com/office/drawing/2014/main" id="{17C2E358-4B91-3E4F-A9D3-D43418C55FB4}"/>
+                </a:ext>
+              </a:extLst>
+            </p:cNvPr>
+            <p:cNvSpPr/>
+            <p:nvPr/>
+          </p:nvSpPr>
+          <p:spPr>
+            <a:xfrm flipV="1">
+              <a:off x="400986" y="5903794"/>
+              <a:ext cx="705900" cy="228444"/>
+            </a:xfrm>
+            <a:prstGeom prst="triangle">
+              <a:avLst/>
+            </a:prstGeom>
+            <a:solidFill>
+              <a:schemeClr val="tx1"/>
+            </a:solidFill>
+            <a:ln w="57150" cap="rnd">
+              <a:solidFill>
+                <a:schemeClr val="bg1"/>
+              </a:solidFill>
+              <a:round/>
+            </a:ln>
+          </p:spPr>
+          <p:style>
+            <a:lnRef idx="2">
+              <a:schemeClr val="accent1">
+                <a:shade val="50000"/>
+              </a:schemeClr>
+            </a:lnRef>
+            <a:fillRef idx="1">
+              <a:schemeClr val="accent1"/>
+            </a:fillRef>
+            <a:effectRef idx="0">
+              <a:schemeClr val="accent1"/>
+            </a:effectRef>
+            <a:fontRef idx="minor">
+              <a:schemeClr val="lt1"/>
+            </a:fontRef>
+          </p:style>
+          <p:txBody>
+            <a:bodyPr rtlCol="0" anchor="ctr"/>
+            <a:lstStyle/>
+            <a:p>
+              <a:pPr algn="ctr"/>
+              <a:endParaRPr lang="en-US"/>
+            </a:p>
+          </p:txBody>
+        </p:sp>
+      </p:grpSp>
+      <p:sp>
+        <p:nvSpPr>
+          <p:cNvPr id="15" name="TextBox 14">
+            <a:extLst>
+              <a:ext uri="{FF2B5EF4-FFF2-40B4-BE49-F238E27FC236}">
+                <a16:creationId xmlns:a16="http://schemas.microsoft.com/office/drawing/2014/main" id="{74C14341-BE05-EA4C-A852-DE109BC7B6ED}"/>
+              </a:ext>
+            </a:extLst>
+          </p:cNvPr>
+          <p:cNvSpPr txBox="1"/>
+          <p:nvPr/>
+        </p:nvSpPr>
+        <p:spPr>
+          <a:xfrm>
+            <a:off x="355451" y="5677279"/>
+            <a:ext cx="689612" cy="769441"/>
+          </a:xfrm>
+          <a:prstGeom prst="rect">
+            <a:avLst/>
+          </a:prstGeom>
+          <a:noFill/>
+        </p:spPr>
+        <p:txBody>
+          <a:bodyPr wrap="none" rtlCol="0">
+            <a:spAutoFit/>
+          </a:bodyPr>
+          <a:lstStyle/>
+          <a:p>
+            <a:r>
+              <a:rPr lang="en-US" sz="4400" dirty="0">
+                <a:solidFill>
+                  <a:schemeClr val="bg1"/>
+                </a:solidFill>
+              </a:rPr>
+              <a:t>@</a:t>
+            </a:r>
+          </a:p>
+        </p:txBody>
+      </p:sp>
+      <p:sp>
+        <p:nvSpPr>
+          <p:cNvPr id="837" name="Rectangle 836">
+            <a:extLst>
+              <a:ext uri="{FF2B5EF4-FFF2-40B4-BE49-F238E27FC236}">
+                <a16:creationId xmlns:a16="http://schemas.microsoft.com/office/drawing/2014/main" id="{9108FEEA-59DB-3447-9C5F-9070B204BEFC}"/>
+              </a:ext>
+            </a:extLst>
+          </p:cNvPr>
+          <p:cNvSpPr/>
+          <p:nvPr/>
+        </p:nvSpPr>
+        <p:spPr>
+          <a:xfrm>
+            <a:off x="1790486" y="5257035"/>
+            <a:ext cx="1345224" cy="1345224"/>
+          </a:xfrm>
+          <a:prstGeom prst="rect">
+            <a:avLst/>
+          </a:prstGeom>
+          <a:noFill/>
+        </p:spPr>
+        <p:style>
+          <a:lnRef idx="2">
+            <a:schemeClr val="accent1">
+              <a:shade val="50000"/>
+            </a:schemeClr>
+          </a:lnRef>
+          <a:fillRef idx="1">
+            <a:schemeClr val="accent1"/>
+          </a:fillRef>
+          <a:effectRef idx="0">
+            <a:schemeClr val="accent1"/>
+          </a:effectRef>
+          <a:fontRef idx="minor">
+            <a:schemeClr val="lt1"/>
+          </a:fontRef>
+        </p:style>
+        <p:txBody>
+          <a:bodyPr rtlCol="0" anchor="ctr"/>
+          <a:lstStyle/>
+          <a:p>
+            <a:pPr algn="ctr"/>
+            <a:endParaRPr lang="en-US"/>
+          </a:p>
+        </p:txBody>
+      </p:sp>
+      <p:grpSp>
+        <p:nvGrpSpPr>
+          <p:cNvPr id="838" name="Group 837">
+            <a:extLst>
+              <a:ext uri="{FF2B5EF4-FFF2-40B4-BE49-F238E27FC236}">
+                <a16:creationId xmlns:a16="http://schemas.microsoft.com/office/drawing/2014/main" id="{DEFA7076-B054-744D-972A-AF1FDA0BF954}"/>
+              </a:ext>
+            </a:extLst>
+          </p:cNvPr>
+          <p:cNvGrpSpPr/>
+          <p:nvPr/>
+        </p:nvGrpSpPr>
+        <p:grpSpPr>
+          <a:xfrm>
+            <a:off x="1853558" y="5522045"/>
+            <a:ext cx="1213507" cy="861512"/>
+            <a:chOff x="400986" y="5903794"/>
+            <a:chExt cx="705900" cy="501144"/>
+          </a:xfrm>
+        </p:grpSpPr>
+        <p:sp>
+          <p:nvSpPr>
+            <p:cNvPr id="839" name="Rounded Rectangle 838">
+              <a:extLst>
+                <a:ext uri="{FF2B5EF4-FFF2-40B4-BE49-F238E27FC236}">
+                  <a16:creationId xmlns:a16="http://schemas.microsoft.com/office/drawing/2014/main" id="{BFB9FC33-800A-7549-AA69-535B637B9B6E}"/>
+                </a:ext>
+              </a:extLst>
+            </p:cNvPr>
+            <p:cNvSpPr/>
+            <p:nvPr/>
+          </p:nvSpPr>
+          <p:spPr>
+            <a:xfrm>
+              <a:off x="405456" y="5916583"/>
+              <a:ext cx="685496" cy="488355"/>
+            </a:xfrm>
+            <a:prstGeom prst="roundRect">
+              <a:avLst>
+                <a:gd name="adj" fmla="val 8642"/>
+              </a:avLst>
+            </a:prstGeom>
+            <a:solidFill>
+              <a:schemeClr val="tx1"/>
+            </a:solidFill>
+            <a:ln w="38100">
+              <a:solidFill>
+                <a:schemeClr val="bg1"/>
+              </a:solidFill>
+            </a:ln>
+          </p:spPr>
+          <p:style>
+            <a:lnRef idx="2">
+              <a:schemeClr val="accent1">
+                <a:shade val="50000"/>
+              </a:schemeClr>
+            </a:lnRef>
+            <a:fillRef idx="1">
+              <a:schemeClr val="accent1"/>
+            </a:fillRef>
+            <a:effectRef idx="0">
+              <a:schemeClr val="accent1"/>
+            </a:effectRef>
+            <a:fontRef idx="minor">
+              <a:schemeClr val="lt1"/>
+            </a:fontRef>
+          </p:style>
+          <p:txBody>
+            <a:bodyPr rtlCol="0" anchor="ctr"/>
+            <a:lstStyle/>
+            <a:p>
+              <a:pPr algn="ctr"/>
+              <a:endParaRPr lang="en-US" dirty="0"/>
+            </a:p>
+          </p:txBody>
+        </p:sp>
+        <p:sp>
+          <p:nvSpPr>
+            <p:cNvPr id="840" name="Triangle 839">
+              <a:extLst>
+                <a:ext uri="{FF2B5EF4-FFF2-40B4-BE49-F238E27FC236}">
+                  <a16:creationId xmlns:a16="http://schemas.microsoft.com/office/drawing/2014/main" id="{61F51989-9B2D-F34B-98DE-BD4CE6F47098}"/>
+                </a:ext>
+              </a:extLst>
+            </p:cNvPr>
+            <p:cNvSpPr/>
+            <p:nvPr/>
+          </p:nvSpPr>
+          <p:spPr>
+            <a:xfrm flipV="1">
+              <a:off x="400986" y="5903794"/>
+              <a:ext cx="705900" cy="228444"/>
+            </a:xfrm>
+            <a:prstGeom prst="triangle">
+              <a:avLst/>
+            </a:prstGeom>
+            <a:solidFill>
+              <a:schemeClr val="tx1"/>
+            </a:solidFill>
+            <a:ln w="57150" cap="rnd">
+              <a:solidFill>
+                <a:schemeClr val="bg1"/>
+              </a:solidFill>
+              <a:round/>
+            </a:ln>
+          </p:spPr>
+          <p:style>
+            <a:lnRef idx="2">
+              <a:schemeClr val="accent1">
+                <a:shade val="50000"/>
+              </a:schemeClr>
+            </a:lnRef>
+            <a:fillRef idx="1">
+              <a:schemeClr val="accent1"/>
+            </a:fillRef>
+            <a:effectRef idx="0">
+              <a:schemeClr val="accent1"/>
+            </a:effectRef>
+            <a:fontRef idx="minor">
+              <a:schemeClr val="lt1"/>
+            </a:fontRef>
+          </p:style>
+          <p:txBody>
+            <a:bodyPr rtlCol="0" anchor="ctr"/>
+            <a:lstStyle/>
+            <a:p>
+              <a:pPr algn="ctr"/>
+              <a:endParaRPr lang="en-US"/>
+            </a:p>
+          </p:txBody>
+        </p:sp>
+      </p:grpSp>
+      <p:sp>
+        <p:nvSpPr>
+          <p:cNvPr id="841" name="TextBox 840">
+            <a:extLst>
+              <a:ext uri="{FF2B5EF4-FFF2-40B4-BE49-F238E27FC236}">
+                <a16:creationId xmlns:a16="http://schemas.microsoft.com/office/drawing/2014/main" id="{F5924D07-F55F-A54C-8CC4-DEF762FEE03E}"/>
+              </a:ext>
+            </a:extLst>
+          </p:cNvPr>
+          <p:cNvSpPr txBox="1"/>
+          <p:nvPr/>
+        </p:nvSpPr>
+        <p:spPr>
+          <a:xfrm>
+            <a:off x="1780897" y="5674597"/>
+            <a:ext cx="689612" cy="769441"/>
+          </a:xfrm>
+          <a:prstGeom prst="rect">
+            <a:avLst/>
+          </a:prstGeom>
+          <a:noFill/>
+        </p:spPr>
+        <p:txBody>
+          <a:bodyPr wrap="none" rtlCol="0">
+            <a:spAutoFit/>
+          </a:bodyPr>
+          <a:lstStyle/>
+          <a:p>
+            <a:r>
+              <a:rPr lang="en-US" sz="4400" dirty="0">
+                <a:solidFill>
+                  <a:schemeClr val="bg1"/>
+                </a:solidFill>
+              </a:rPr>
+              <a:t>@</a:t>
+            </a:r>
+          </a:p>
+        </p:txBody>
+      </p:sp>
+      <p:sp>
+        <p:nvSpPr>
+          <p:cNvPr id="842" name="Rectangle 841">
+            <a:extLst>
+              <a:ext uri="{FF2B5EF4-FFF2-40B4-BE49-F238E27FC236}">
+                <a16:creationId xmlns:a16="http://schemas.microsoft.com/office/drawing/2014/main" id="{5BDA479D-997D-4F44-8352-059C95997A15}"/>
+              </a:ext>
+            </a:extLst>
+          </p:cNvPr>
+          <p:cNvSpPr/>
+          <p:nvPr/>
+        </p:nvSpPr>
+        <p:spPr>
+          <a:xfrm>
+            <a:off x="3214026" y="5264972"/>
+            <a:ext cx="1345224" cy="1345224"/>
+          </a:xfrm>
+          <a:prstGeom prst="rect">
+            <a:avLst/>
+          </a:prstGeom>
+          <a:noFill/>
+        </p:spPr>
+        <p:style>
+          <a:lnRef idx="2">
+            <a:schemeClr val="accent1">
+              <a:shade val="50000"/>
+            </a:schemeClr>
+          </a:lnRef>
+          <a:fillRef idx="1">
+            <a:schemeClr val="accent1"/>
+          </a:fillRef>
+          <a:effectRef idx="0">
+            <a:schemeClr val="accent1"/>
+          </a:effectRef>
+          <a:fontRef idx="minor">
+            <a:schemeClr val="lt1"/>
+          </a:fontRef>
+        </p:style>
+        <p:txBody>
+          <a:bodyPr rtlCol="0" anchor="ctr"/>
+          <a:lstStyle/>
+          <a:p>
+            <a:pPr algn="ctr"/>
+            <a:endParaRPr lang="en-US"/>
+          </a:p>
+        </p:txBody>
+      </p:sp>
+      <p:grpSp>
+        <p:nvGrpSpPr>
+          <p:cNvPr id="843" name="Group 842">
+            <a:extLst>
+              <a:ext uri="{FF2B5EF4-FFF2-40B4-BE49-F238E27FC236}">
+                <a16:creationId xmlns:a16="http://schemas.microsoft.com/office/drawing/2014/main" id="{7FCAFDD6-A7E3-8A48-9D8B-12E8F79E16C3}"/>
+              </a:ext>
+            </a:extLst>
+          </p:cNvPr>
+          <p:cNvGrpSpPr/>
+          <p:nvPr/>
+        </p:nvGrpSpPr>
+        <p:grpSpPr>
+          <a:xfrm>
+            <a:off x="3277098" y="5529982"/>
+            <a:ext cx="1213507" cy="861512"/>
+            <a:chOff x="400986" y="5903794"/>
+            <a:chExt cx="705900" cy="501144"/>
+          </a:xfrm>
+        </p:grpSpPr>
+        <p:sp>
+          <p:nvSpPr>
+            <p:cNvPr id="844" name="Rounded Rectangle 843">
+              <a:extLst>
+                <a:ext uri="{FF2B5EF4-FFF2-40B4-BE49-F238E27FC236}">
+                  <a16:creationId xmlns:a16="http://schemas.microsoft.com/office/drawing/2014/main" id="{CD35B48A-2E8C-6848-AE68-021AF5F6CC67}"/>
+                </a:ext>
+              </a:extLst>
+            </p:cNvPr>
+            <p:cNvSpPr/>
+            <p:nvPr/>
+          </p:nvSpPr>
+          <p:spPr>
+            <a:xfrm>
+              <a:off x="405456" y="5916583"/>
+              <a:ext cx="685496" cy="488355"/>
+            </a:xfrm>
+            <a:prstGeom prst="roundRect">
+              <a:avLst>
+                <a:gd name="adj" fmla="val 8642"/>
+              </a:avLst>
+            </a:prstGeom>
+            <a:solidFill>
+              <a:schemeClr val="tx1"/>
+            </a:solidFill>
+            <a:ln w="38100">
+              <a:solidFill>
+                <a:schemeClr val="bg1"/>
+              </a:solidFill>
+            </a:ln>
+          </p:spPr>
+          <p:style>
+            <a:lnRef idx="2">
+              <a:schemeClr val="accent1">
+                <a:shade val="50000"/>
+              </a:schemeClr>
+            </a:lnRef>
+            <a:fillRef idx="1">
+              <a:schemeClr val="accent1"/>
+            </a:fillRef>
+            <a:effectRef idx="0">
+              <a:schemeClr val="accent1"/>
+            </a:effectRef>
+            <a:fontRef idx="minor">
+              <a:schemeClr val="lt1"/>
+            </a:fontRef>
+          </p:style>
+          <p:txBody>
+            <a:bodyPr rtlCol="0" anchor="ctr"/>
+            <a:lstStyle/>
+            <a:p>
+              <a:pPr algn="ctr"/>
+              <a:endParaRPr lang="en-US" dirty="0"/>
+            </a:p>
+          </p:txBody>
+        </p:sp>
+        <p:sp>
+          <p:nvSpPr>
+            <p:cNvPr id="845" name="Triangle 844">
+              <a:extLst>
+                <a:ext uri="{FF2B5EF4-FFF2-40B4-BE49-F238E27FC236}">
+                  <a16:creationId xmlns:a16="http://schemas.microsoft.com/office/drawing/2014/main" id="{C1C2E169-8192-FE4F-9AA2-87ABEA62E4C2}"/>
+                </a:ext>
+              </a:extLst>
+            </p:cNvPr>
+            <p:cNvSpPr/>
+            <p:nvPr/>
+          </p:nvSpPr>
+          <p:spPr>
+            <a:xfrm flipV="1">
+              <a:off x="400986" y="5903794"/>
+              <a:ext cx="705900" cy="228444"/>
+            </a:xfrm>
+            <a:prstGeom prst="triangle">
+              <a:avLst/>
+            </a:prstGeom>
+            <a:solidFill>
+              <a:schemeClr val="tx1"/>
+            </a:solidFill>
+            <a:ln w="57150" cap="rnd">
+              <a:solidFill>
+                <a:schemeClr val="bg1"/>
+              </a:solidFill>
+              <a:round/>
+            </a:ln>
+          </p:spPr>
+          <p:style>
+            <a:lnRef idx="2">
+              <a:schemeClr val="accent1">
+                <a:shade val="50000"/>
+              </a:schemeClr>
+            </a:lnRef>
+            <a:fillRef idx="1">
+              <a:schemeClr val="accent1"/>
+            </a:fillRef>
+            <a:effectRef idx="0">
+              <a:schemeClr val="accent1"/>
+            </a:effectRef>
+            <a:fontRef idx="minor">
+              <a:schemeClr val="lt1"/>
+            </a:fontRef>
+          </p:style>
+          <p:txBody>
+            <a:bodyPr rtlCol="0" anchor="ctr"/>
+            <a:lstStyle/>
+            <a:p>
+              <a:pPr algn="ctr"/>
+              <a:endParaRPr lang="en-US"/>
+            </a:p>
+          </p:txBody>
+        </p:sp>
+      </p:grpSp>
+      <p:sp>
+        <p:nvSpPr>
+          <p:cNvPr id="846" name="TextBox 845">
+            <a:extLst>
+              <a:ext uri="{FF2B5EF4-FFF2-40B4-BE49-F238E27FC236}">
+                <a16:creationId xmlns:a16="http://schemas.microsoft.com/office/drawing/2014/main" id="{02C81A68-86AE-6145-9FCD-8CC23D798867}"/>
+              </a:ext>
+            </a:extLst>
+          </p:cNvPr>
+          <p:cNvSpPr txBox="1"/>
+          <p:nvPr/>
+        </p:nvSpPr>
+        <p:spPr>
+          <a:xfrm>
+            <a:off x="3204437" y="5682534"/>
+            <a:ext cx="689612" cy="769441"/>
+          </a:xfrm>
+          <a:prstGeom prst="rect">
+            <a:avLst/>
+          </a:prstGeom>
+          <a:noFill/>
+        </p:spPr>
+        <p:txBody>
+          <a:bodyPr wrap="none" rtlCol="0">
+            <a:spAutoFit/>
+          </a:bodyPr>
+          <a:lstStyle/>
+          <a:p>
+            <a:r>
+              <a:rPr lang="en-US" sz="4400" dirty="0">
+                <a:solidFill>
+                  <a:schemeClr val="bg1"/>
+                </a:solidFill>
+              </a:rPr>
+              <a:t>@</a:t>
+            </a:r>
+          </a:p>
+        </p:txBody>
+      </p:sp>
+      <p:pic>
+        <p:nvPicPr>
+          <p:cNvPr id="17" name="Picture 16">
+            <a:extLst>
+              <a:ext uri="{FF2B5EF4-FFF2-40B4-BE49-F238E27FC236}">
+                <a16:creationId xmlns:a16="http://schemas.microsoft.com/office/drawing/2014/main" id="{02913CA9-F5FF-794D-B468-5DDF947DFDDF}"/>
+              </a:ext>
+            </a:extLst>
+          </p:cNvPr>
+          <p:cNvPicPr>
+            <a:picLocks noChangeAspect="1"/>
+          </p:cNvPicPr>
+          <p:nvPr/>
+        </p:nvPicPr>
+        <p:blipFill>
+          <a:blip r:embed="rId18">
+            <a:clrChange>
+              <a:clrFrom>
+                <a:srgbClr val="FFFFFF"/>
+              </a:clrFrom>
+              <a:clrTo>
+                <a:srgbClr val="FFFFFF">
+                  <a:alpha val="0"/>
+                </a:srgbClr>
+              </a:clrTo>
+            </a:clrChange>
+          </a:blip>
+          <a:stretch>
+            <a:fillRect/>
+          </a:stretch>
+        </p:blipFill>
+        <p:spPr>
+          <a:xfrm>
+            <a:off x="11082900" y="-6435957"/>
+            <a:ext cx="5080000" cy="4902200"/>
+          </a:xfrm>
+          <a:prstGeom prst="rect">
+            <a:avLst/>
+          </a:prstGeom>
+        </p:spPr>
+      </p:pic>
     </p:spTree>
     <p:extLst>
       <p:ext uri="{BB962C8B-B14F-4D97-AF65-F5344CB8AC3E}">
